--- a/4ass/main4.pptx
+++ b/4ass/main4.pptx
@@ -29,19 +29,26 @@
     <p:sldId id="320" r:id="rId23"/>
     <p:sldId id="304" r:id="rId24"/>
     <p:sldId id="305" r:id="rId25"/>
-    <p:sldId id="307" r:id="rId26"/>
-    <p:sldId id="308" r:id="rId27"/>
-    <p:sldId id="309" r:id="rId28"/>
-    <p:sldId id="306" r:id="rId29"/>
-    <p:sldId id="321" r:id="rId30"/>
-    <p:sldId id="310" r:id="rId31"/>
-    <p:sldId id="311" r:id="rId32"/>
-    <p:sldId id="312" r:id="rId33"/>
-    <p:sldId id="313" r:id="rId34"/>
-    <p:sldId id="314" r:id="rId35"/>
-    <p:sldId id="315" r:id="rId36"/>
-    <p:sldId id="316" r:id="rId37"/>
-    <p:sldId id="317" r:id="rId38"/>
+    <p:sldId id="322" r:id="rId26"/>
+    <p:sldId id="307" r:id="rId27"/>
+    <p:sldId id="308" r:id="rId28"/>
+    <p:sldId id="309" r:id="rId29"/>
+    <p:sldId id="306" r:id="rId30"/>
+    <p:sldId id="321" r:id="rId31"/>
+    <p:sldId id="310" r:id="rId32"/>
+    <p:sldId id="311" r:id="rId33"/>
+    <p:sldId id="312" r:id="rId34"/>
+    <p:sldId id="313" r:id="rId35"/>
+    <p:sldId id="314" r:id="rId36"/>
+    <p:sldId id="315" r:id="rId37"/>
+    <p:sldId id="316" r:id="rId38"/>
+    <p:sldId id="317" r:id="rId39"/>
+    <p:sldId id="277" r:id="rId40"/>
+    <p:sldId id="323" r:id="rId41"/>
+    <p:sldId id="324" r:id="rId42"/>
+    <p:sldId id="325" r:id="rId43"/>
+    <p:sldId id="326" r:id="rId44"/>
+    <p:sldId id="327" r:id="rId45"/>
   </p:sldIdLst>
   <p:sldSz cx="12192000" cy="6858000"/>
   <p:notesSz cx="6858000" cy="9144000"/>
@@ -176,6 +183,788 @@
 </file>
 
 <file path=ppt/diagrams/colors1.xml><?xml version="1.0" encoding="utf-8"?>
+<dgm:colorsDef xmlns:dgm="http://schemas.openxmlformats.org/drawingml/2006/diagram" xmlns:a="http://schemas.openxmlformats.org/drawingml/2006/main" uniqueId="urn:microsoft.com/office/officeart/2005/8/colors/colorful5">
+  <dgm:title val=""/>
+  <dgm:desc val=""/>
+  <dgm:catLst>
+    <dgm:cat type="colorful" pri="10500"/>
+  </dgm:catLst>
+  <dgm:styleLbl name="node0">
+    <dgm:fillClrLst meth="repeat">
+      <a:schemeClr val="accent4"/>
+    </dgm:fillClrLst>
+    <dgm:linClrLst meth="repeat">
+      <a:schemeClr val="lt1"/>
+    </dgm:linClrLst>
+    <dgm:effectClrLst/>
+    <dgm:txLinClrLst/>
+    <dgm:txFillClrLst/>
+    <dgm:txEffectClrLst/>
+  </dgm:styleLbl>
+  <dgm:styleLbl name="node1">
+    <dgm:fillClrLst>
+      <a:schemeClr val="accent5"/>
+      <a:schemeClr val="accent6"/>
+    </dgm:fillClrLst>
+    <dgm:linClrLst meth="repeat">
+      <a:schemeClr val="lt1"/>
+    </dgm:linClrLst>
+    <dgm:effectClrLst/>
+    <dgm:txLinClrLst/>
+    <dgm:txFillClrLst/>
+    <dgm:txEffectClrLst/>
+  </dgm:styleLbl>
+  <dgm:styleLbl name="alignNode1">
+    <dgm:fillClrLst>
+      <a:schemeClr val="accent5"/>
+      <a:schemeClr val="accent6"/>
+    </dgm:fillClrLst>
+    <dgm:linClrLst>
+      <a:schemeClr val="accent5"/>
+      <a:schemeClr val="accent6"/>
+    </dgm:linClrLst>
+    <dgm:effectClrLst/>
+    <dgm:txLinClrLst/>
+    <dgm:txFillClrLst/>
+    <dgm:txEffectClrLst/>
+  </dgm:styleLbl>
+  <dgm:styleLbl name="lnNode1">
+    <dgm:fillClrLst>
+      <a:schemeClr val="accent5"/>
+      <a:schemeClr val="accent6"/>
+    </dgm:fillClrLst>
+    <dgm:linClrLst meth="repeat">
+      <a:schemeClr val="lt1"/>
+    </dgm:linClrLst>
+    <dgm:effectClrLst/>
+    <dgm:txLinClrLst/>
+    <dgm:txFillClrLst/>
+    <dgm:txEffectClrLst/>
+  </dgm:styleLbl>
+  <dgm:styleLbl name="vennNode1">
+    <dgm:fillClrLst>
+      <a:schemeClr val="accent5">
+        <a:alpha val="50000"/>
+      </a:schemeClr>
+      <a:schemeClr val="accent6">
+        <a:alpha val="50000"/>
+      </a:schemeClr>
+    </dgm:fillClrLst>
+    <dgm:linClrLst meth="repeat">
+      <a:schemeClr val="lt1"/>
+    </dgm:linClrLst>
+    <dgm:effectClrLst/>
+    <dgm:txLinClrLst/>
+    <dgm:txFillClrLst/>
+    <dgm:txEffectClrLst/>
+  </dgm:styleLbl>
+  <dgm:styleLbl name="node2">
+    <dgm:fillClrLst>
+      <a:schemeClr val="accent6"/>
+    </dgm:fillClrLst>
+    <dgm:linClrLst meth="repeat">
+      <a:schemeClr val="lt1"/>
+    </dgm:linClrLst>
+    <dgm:effectClrLst/>
+    <dgm:txLinClrLst/>
+    <dgm:txFillClrLst/>
+    <dgm:txEffectClrLst/>
+  </dgm:styleLbl>
+  <dgm:styleLbl name="node3">
+    <dgm:fillClrLst>
+      <a:schemeClr val="accent1"/>
+    </dgm:fillClrLst>
+    <dgm:linClrLst meth="repeat">
+      <a:schemeClr val="lt1"/>
+    </dgm:linClrLst>
+    <dgm:effectClrLst/>
+    <dgm:txLinClrLst/>
+    <dgm:txFillClrLst/>
+    <dgm:txEffectClrLst/>
+  </dgm:styleLbl>
+  <dgm:styleLbl name="node4">
+    <dgm:fillClrLst>
+      <a:schemeClr val="accent2"/>
+    </dgm:fillClrLst>
+    <dgm:linClrLst meth="repeat">
+      <a:schemeClr val="lt1"/>
+    </dgm:linClrLst>
+    <dgm:effectClrLst/>
+    <dgm:txLinClrLst/>
+    <dgm:txFillClrLst/>
+    <dgm:txEffectClrLst/>
+  </dgm:styleLbl>
+  <dgm:styleLbl name="fgImgPlace1">
+    <dgm:fillClrLst>
+      <a:schemeClr val="accent5">
+        <a:tint val="50000"/>
+      </a:schemeClr>
+      <a:schemeClr val="accent6">
+        <a:tint val="50000"/>
+      </a:schemeClr>
+    </dgm:fillClrLst>
+    <dgm:linClrLst meth="repeat">
+      <a:schemeClr val="lt1"/>
+    </dgm:linClrLst>
+    <dgm:effectClrLst/>
+    <dgm:txLinClrLst/>
+    <dgm:txFillClrLst meth="repeat">
+      <a:schemeClr val="lt1"/>
+    </dgm:txFillClrLst>
+    <dgm:txEffectClrLst/>
+  </dgm:styleLbl>
+  <dgm:styleLbl name="alignImgPlace1">
+    <dgm:fillClrLst>
+      <a:schemeClr val="accent5">
+        <a:tint val="50000"/>
+      </a:schemeClr>
+      <a:schemeClr val="accent6">
+        <a:tint val="20000"/>
+      </a:schemeClr>
+    </dgm:fillClrLst>
+    <dgm:linClrLst meth="repeat">
+      <a:schemeClr val="lt1"/>
+    </dgm:linClrLst>
+    <dgm:effectClrLst/>
+    <dgm:txLinClrLst/>
+    <dgm:txFillClrLst meth="repeat">
+      <a:schemeClr val="lt1"/>
+    </dgm:txFillClrLst>
+    <dgm:txEffectClrLst/>
+  </dgm:styleLbl>
+  <dgm:styleLbl name="bgImgPlace1">
+    <dgm:fillClrLst>
+      <a:schemeClr val="accent5">
+        <a:tint val="50000"/>
+      </a:schemeClr>
+      <a:schemeClr val="accent6">
+        <a:tint val="20000"/>
+      </a:schemeClr>
+    </dgm:fillClrLst>
+    <dgm:linClrLst meth="repeat">
+      <a:schemeClr val="lt1"/>
+    </dgm:linClrLst>
+    <dgm:effectClrLst/>
+    <dgm:txLinClrLst/>
+    <dgm:txFillClrLst meth="repeat">
+      <a:schemeClr val="lt1"/>
+    </dgm:txFillClrLst>
+    <dgm:txEffectClrLst/>
+  </dgm:styleLbl>
+  <dgm:styleLbl name="sibTrans2D1">
+    <dgm:fillClrLst>
+      <a:schemeClr val="accent5"/>
+      <a:schemeClr val="accent6"/>
+    </dgm:fillClrLst>
+    <dgm:linClrLst meth="repeat">
+      <a:schemeClr val="lt1"/>
+    </dgm:linClrLst>
+    <dgm:effectClrLst/>
+    <dgm:txLinClrLst/>
+    <dgm:txFillClrLst/>
+    <dgm:txEffectClrLst/>
+  </dgm:styleLbl>
+  <dgm:styleLbl name="fgSibTrans2D1">
+    <dgm:fillClrLst>
+      <a:schemeClr val="accent5"/>
+      <a:schemeClr val="accent6"/>
+    </dgm:fillClrLst>
+    <dgm:linClrLst meth="repeat">
+      <a:schemeClr val="lt1"/>
+    </dgm:linClrLst>
+    <dgm:effectClrLst/>
+    <dgm:txLinClrLst/>
+    <dgm:txFillClrLst meth="repeat">
+      <a:schemeClr val="lt1"/>
+    </dgm:txFillClrLst>
+    <dgm:txEffectClrLst/>
+  </dgm:styleLbl>
+  <dgm:styleLbl name="bgSibTrans2D1">
+    <dgm:fillClrLst>
+      <a:schemeClr val="accent5"/>
+      <a:schemeClr val="accent6"/>
+    </dgm:fillClrLst>
+    <dgm:linClrLst meth="repeat">
+      <a:schemeClr val="lt1"/>
+    </dgm:linClrLst>
+    <dgm:effectClrLst/>
+    <dgm:txLinClrLst/>
+    <dgm:txFillClrLst meth="repeat">
+      <a:schemeClr val="lt1"/>
+    </dgm:txFillClrLst>
+    <dgm:txEffectClrLst/>
+  </dgm:styleLbl>
+  <dgm:styleLbl name="sibTrans1D1">
+    <dgm:fillClrLst/>
+    <dgm:linClrLst>
+      <a:schemeClr val="accent5"/>
+      <a:schemeClr val="accent6"/>
+    </dgm:linClrLst>
+    <dgm:effectClrLst/>
+    <dgm:txLinClrLst/>
+    <dgm:txFillClrLst meth="repeat">
+      <a:schemeClr val="tx1"/>
+    </dgm:txFillClrLst>
+    <dgm:txEffectClrLst/>
+  </dgm:styleLbl>
+  <dgm:styleLbl name="callout">
+    <dgm:fillClrLst meth="repeat">
+      <a:schemeClr val="accent5"/>
+    </dgm:fillClrLst>
+    <dgm:linClrLst meth="repeat">
+      <a:schemeClr val="accent5">
+        <a:tint val="50000"/>
+      </a:schemeClr>
+    </dgm:linClrLst>
+    <dgm:effectClrLst/>
+    <dgm:txLinClrLst/>
+    <dgm:txFillClrLst meth="repeat">
+      <a:schemeClr val="tx1"/>
+    </dgm:txFillClrLst>
+    <dgm:txEffectClrLst/>
+  </dgm:styleLbl>
+  <dgm:styleLbl name="asst0">
+    <dgm:fillClrLst meth="repeat">
+      <a:schemeClr val="accent5"/>
+    </dgm:fillClrLst>
+    <dgm:linClrLst meth="repeat">
+      <a:schemeClr val="lt1">
+        <a:shade val="80000"/>
+      </a:schemeClr>
+    </dgm:linClrLst>
+    <dgm:effectClrLst/>
+    <dgm:txLinClrLst/>
+    <dgm:txFillClrLst/>
+    <dgm:txEffectClrLst/>
+  </dgm:styleLbl>
+  <dgm:styleLbl name="asst1">
+    <dgm:fillClrLst meth="repeat">
+      <a:schemeClr val="accent6"/>
+    </dgm:fillClrLst>
+    <dgm:linClrLst meth="repeat">
+      <a:schemeClr val="lt1">
+        <a:shade val="80000"/>
+      </a:schemeClr>
+    </dgm:linClrLst>
+    <dgm:effectClrLst/>
+    <dgm:txLinClrLst/>
+    <dgm:txFillClrLst/>
+    <dgm:txEffectClrLst/>
+  </dgm:styleLbl>
+  <dgm:styleLbl name="asst2">
+    <dgm:fillClrLst>
+      <a:schemeClr val="accent1"/>
+    </dgm:fillClrLst>
+    <dgm:linClrLst meth="repeat">
+      <a:schemeClr val="lt1"/>
+    </dgm:linClrLst>
+    <dgm:effectClrLst/>
+    <dgm:txLinClrLst/>
+    <dgm:txFillClrLst/>
+    <dgm:txEffectClrLst/>
+  </dgm:styleLbl>
+  <dgm:styleLbl name="asst3">
+    <dgm:fillClrLst>
+      <a:schemeClr val="accent2"/>
+    </dgm:fillClrLst>
+    <dgm:linClrLst meth="repeat">
+      <a:schemeClr val="lt1"/>
+    </dgm:linClrLst>
+    <dgm:effectClrLst/>
+    <dgm:txLinClrLst/>
+    <dgm:txFillClrLst/>
+    <dgm:txEffectClrLst/>
+  </dgm:styleLbl>
+  <dgm:styleLbl name="asst4">
+    <dgm:fillClrLst>
+      <a:schemeClr val="accent3"/>
+    </dgm:fillClrLst>
+    <dgm:linClrLst meth="repeat">
+      <a:schemeClr val="lt1"/>
+    </dgm:linClrLst>
+    <dgm:effectClrLst/>
+    <dgm:txLinClrLst/>
+    <dgm:txFillClrLst/>
+    <dgm:txEffectClrLst/>
+  </dgm:styleLbl>
+  <dgm:styleLbl name="parChTrans2D1">
+    <dgm:fillClrLst meth="repeat">
+      <a:schemeClr val="accent5"/>
+    </dgm:fillClrLst>
+    <dgm:linClrLst meth="repeat">
+      <a:schemeClr val="lt1"/>
+    </dgm:linClrLst>
+    <dgm:effectClrLst/>
+    <dgm:txLinClrLst/>
+    <dgm:txFillClrLst meth="repeat">
+      <a:schemeClr val="lt1"/>
+    </dgm:txFillClrLst>
+    <dgm:txEffectClrLst/>
+  </dgm:styleLbl>
+  <dgm:styleLbl name="parChTrans2D2">
+    <dgm:fillClrLst meth="repeat">
+      <a:schemeClr val="accent6"/>
+    </dgm:fillClrLst>
+    <dgm:linClrLst meth="repeat">
+      <a:schemeClr val="lt1"/>
+    </dgm:linClrLst>
+    <dgm:effectClrLst/>
+    <dgm:txLinClrLst/>
+    <dgm:txFillClrLst/>
+    <dgm:txEffectClrLst/>
+  </dgm:styleLbl>
+  <dgm:styleLbl name="parChTrans2D3">
+    <dgm:fillClrLst meth="repeat">
+      <a:schemeClr val="accent6"/>
+    </dgm:fillClrLst>
+    <dgm:linClrLst meth="repeat">
+      <a:schemeClr val="lt1"/>
+    </dgm:linClrLst>
+    <dgm:effectClrLst/>
+    <dgm:txLinClrLst/>
+    <dgm:txFillClrLst/>
+    <dgm:txEffectClrLst/>
+  </dgm:styleLbl>
+  <dgm:styleLbl name="parChTrans2D4">
+    <dgm:fillClrLst meth="repeat">
+      <a:schemeClr val="accent1"/>
+    </dgm:fillClrLst>
+    <dgm:linClrLst meth="repeat">
+      <a:schemeClr val="lt1"/>
+    </dgm:linClrLst>
+    <dgm:effectClrLst/>
+    <dgm:txLinClrLst/>
+    <dgm:txFillClrLst meth="repeat">
+      <a:schemeClr val="lt1"/>
+    </dgm:txFillClrLst>
+    <dgm:txEffectClrLst/>
+  </dgm:styleLbl>
+  <dgm:styleLbl name="parChTrans1D1">
+    <dgm:fillClrLst meth="repeat">
+      <a:schemeClr val="accent5"/>
+    </dgm:fillClrLst>
+    <dgm:linClrLst meth="repeat">
+      <a:schemeClr val="accent5"/>
+    </dgm:linClrLst>
+    <dgm:effectClrLst/>
+    <dgm:txLinClrLst/>
+    <dgm:txFillClrLst meth="repeat">
+      <a:schemeClr val="tx1"/>
+    </dgm:txFillClrLst>
+    <dgm:txEffectClrLst/>
+  </dgm:styleLbl>
+  <dgm:styleLbl name="parChTrans1D2">
+    <dgm:fillClrLst meth="repeat">
+      <a:schemeClr val="accent6">
+        <a:tint val="90000"/>
+      </a:schemeClr>
+    </dgm:fillClrLst>
+    <dgm:linClrLst meth="repeat">
+      <a:schemeClr val="accent6"/>
+    </dgm:linClrLst>
+    <dgm:effectClrLst/>
+    <dgm:txLinClrLst/>
+    <dgm:txFillClrLst meth="repeat">
+      <a:schemeClr val="tx1"/>
+    </dgm:txFillClrLst>
+    <dgm:txEffectClrLst/>
+  </dgm:styleLbl>
+  <dgm:styleLbl name="parChTrans1D3">
+    <dgm:fillClrLst meth="repeat">
+      <a:schemeClr val="accent6">
+        <a:tint val="70000"/>
+      </a:schemeClr>
+    </dgm:fillClrLst>
+    <dgm:linClrLst meth="repeat">
+      <a:schemeClr val="accent1"/>
+    </dgm:linClrLst>
+    <dgm:effectClrLst/>
+    <dgm:txLinClrLst/>
+    <dgm:txFillClrLst meth="repeat">
+      <a:schemeClr val="tx1"/>
+    </dgm:txFillClrLst>
+    <dgm:txEffectClrLst/>
+  </dgm:styleLbl>
+  <dgm:styleLbl name="parChTrans1D4">
+    <dgm:fillClrLst meth="repeat">
+      <a:schemeClr val="accent6">
+        <a:tint val="50000"/>
+      </a:schemeClr>
+    </dgm:fillClrLst>
+    <dgm:linClrLst meth="repeat">
+      <a:schemeClr val="accent2"/>
+    </dgm:linClrLst>
+    <dgm:effectClrLst/>
+    <dgm:txLinClrLst/>
+    <dgm:txFillClrLst meth="repeat">
+      <a:schemeClr val="tx1"/>
+    </dgm:txFillClrLst>
+    <dgm:txEffectClrLst/>
+  </dgm:styleLbl>
+  <dgm:styleLbl name="fgAcc1">
+    <dgm:fillClrLst meth="repeat">
+      <a:schemeClr val="lt1">
+        <a:alpha val="90000"/>
+      </a:schemeClr>
+    </dgm:fillClrLst>
+    <dgm:linClrLst>
+      <a:schemeClr val="accent5"/>
+      <a:schemeClr val="accent6"/>
+    </dgm:linClrLst>
+    <dgm:effectClrLst/>
+    <dgm:txLinClrLst/>
+    <dgm:txFillClrLst meth="repeat">
+      <a:schemeClr val="dk1"/>
+    </dgm:txFillClrLst>
+    <dgm:txEffectClrLst/>
+  </dgm:styleLbl>
+  <dgm:styleLbl name="conFgAcc1">
+    <dgm:fillClrLst meth="repeat">
+      <a:schemeClr val="lt1">
+        <a:alpha val="90000"/>
+      </a:schemeClr>
+    </dgm:fillClrLst>
+    <dgm:linClrLst>
+      <a:schemeClr val="accent5"/>
+      <a:schemeClr val="accent6"/>
+    </dgm:linClrLst>
+    <dgm:effectClrLst/>
+    <dgm:txLinClrLst/>
+    <dgm:txFillClrLst meth="repeat">
+      <a:schemeClr val="dk1"/>
+    </dgm:txFillClrLst>
+    <dgm:txEffectClrLst/>
+  </dgm:styleLbl>
+  <dgm:styleLbl name="alignAcc1">
+    <dgm:fillClrLst meth="repeat">
+      <a:schemeClr val="lt1">
+        <a:alpha val="90000"/>
+      </a:schemeClr>
+    </dgm:fillClrLst>
+    <dgm:linClrLst>
+      <a:schemeClr val="accent5"/>
+      <a:schemeClr val="accent6"/>
+    </dgm:linClrLst>
+    <dgm:effectClrLst/>
+    <dgm:txLinClrLst/>
+    <dgm:txFillClrLst meth="repeat">
+      <a:schemeClr val="dk1"/>
+    </dgm:txFillClrLst>
+    <dgm:txEffectClrLst/>
+  </dgm:styleLbl>
+  <dgm:styleLbl name="trAlignAcc1">
+    <dgm:fillClrLst meth="repeat">
+      <a:schemeClr val="lt1">
+        <a:alpha val="40000"/>
+      </a:schemeClr>
+    </dgm:fillClrLst>
+    <dgm:linClrLst meth="repeat">
+      <a:schemeClr val="accent5"/>
+    </dgm:linClrLst>
+    <dgm:effectClrLst/>
+    <dgm:txLinClrLst/>
+    <dgm:txFillClrLst meth="repeat">
+      <a:schemeClr val="dk1"/>
+    </dgm:txFillClrLst>
+    <dgm:txEffectClrLst/>
+  </dgm:styleLbl>
+  <dgm:styleLbl name="bgAcc1">
+    <dgm:fillClrLst meth="repeat">
+      <a:schemeClr val="lt1">
+        <a:alpha val="90000"/>
+      </a:schemeClr>
+    </dgm:fillClrLst>
+    <dgm:linClrLst>
+      <a:schemeClr val="accent5"/>
+      <a:schemeClr val="accent6"/>
+    </dgm:linClrLst>
+    <dgm:effectClrLst/>
+    <dgm:txLinClrLst/>
+    <dgm:txFillClrLst meth="repeat">
+      <a:schemeClr val="dk1"/>
+    </dgm:txFillClrLst>
+    <dgm:txEffectClrLst/>
+  </dgm:styleLbl>
+  <dgm:styleLbl name="solidFgAcc1">
+    <dgm:fillClrLst meth="repeat">
+      <a:schemeClr val="lt1"/>
+    </dgm:fillClrLst>
+    <dgm:linClrLst>
+      <a:schemeClr val="accent5"/>
+      <a:schemeClr val="accent6"/>
+    </dgm:linClrLst>
+    <dgm:effectClrLst/>
+    <dgm:txLinClrLst/>
+    <dgm:txFillClrLst meth="repeat">
+      <a:schemeClr val="dk1"/>
+    </dgm:txFillClrLst>
+    <dgm:txEffectClrLst/>
+  </dgm:styleLbl>
+  <dgm:styleLbl name="solidAlignAcc1">
+    <dgm:fillClrLst meth="repeat">
+      <a:schemeClr val="lt1"/>
+    </dgm:fillClrLst>
+    <dgm:linClrLst>
+      <a:schemeClr val="accent5"/>
+      <a:schemeClr val="accent6"/>
+    </dgm:linClrLst>
+    <dgm:effectClrLst/>
+    <dgm:txLinClrLst/>
+    <dgm:txFillClrLst meth="repeat">
+      <a:schemeClr val="dk1"/>
+    </dgm:txFillClrLst>
+    <dgm:txEffectClrLst/>
+  </dgm:styleLbl>
+  <dgm:styleLbl name="solidBgAcc1">
+    <dgm:fillClrLst meth="repeat">
+      <a:schemeClr val="lt1"/>
+    </dgm:fillClrLst>
+    <dgm:linClrLst>
+      <a:schemeClr val="accent5"/>
+      <a:schemeClr val="accent6"/>
+    </dgm:linClrLst>
+    <dgm:effectClrLst/>
+    <dgm:txLinClrLst/>
+    <dgm:txFillClrLst meth="repeat">
+      <a:schemeClr val="dk1"/>
+    </dgm:txFillClrLst>
+    <dgm:txEffectClrLst/>
+  </dgm:styleLbl>
+  <dgm:styleLbl name="fgAccFollowNode1">
+    <dgm:fillClrLst>
+      <a:schemeClr val="accent5">
+        <a:tint val="40000"/>
+        <a:alpha val="90000"/>
+      </a:schemeClr>
+      <a:schemeClr val="accent6">
+        <a:tint val="40000"/>
+        <a:alpha val="90000"/>
+      </a:schemeClr>
+    </dgm:fillClrLst>
+    <dgm:linClrLst>
+      <a:schemeClr val="accent5">
+        <a:tint val="40000"/>
+        <a:alpha val="90000"/>
+      </a:schemeClr>
+      <a:schemeClr val="accent5">
+        <a:tint val="40000"/>
+        <a:alpha val="90000"/>
+      </a:schemeClr>
+    </dgm:linClrLst>
+    <dgm:effectClrLst/>
+    <dgm:txLinClrLst/>
+    <dgm:txFillClrLst meth="repeat">
+      <a:schemeClr val="dk1"/>
+    </dgm:txFillClrLst>
+    <dgm:txEffectClrLst/>
+  </dgm:styleLbl>
+  <dgm:styleLbl name="alignAccFollowNode1">
+    <dgm:fillClrLst>
+      <a:schemeClr val="accent5">
+        <a:tint val="40000"/>
+        <a:alpha val="90000"/>
+      </a:schemeClr>
+      <a:schemeClr val="accent6">
+        <a:tint val="40000"/>
+        <a:alpha val="90000"/>
+      </a:schemeClr>
+    </dgm:fillClrLst>
+    <dgm:linClrLst>
+      <a:schemeClr val="accent5">
+        <a:tint val="40000"/>
+        <a:alpha val="90000"/>
+      </a:schemeClr>
+      <a:schemeClr val="accent6">
+        <a:tint val="40000"/>
+        <a:alpha val="90000"/>
+      </a:schemeClr>
+    </dgm:linClrLst>
+    <dgm:effectClrLst/>
+    <dgm:txLinClrLst/>
+    <dgm:txFillClrLst meth="repeat">
+      <a:schemeClr val="dk1"/>
+    </dgm:txFillClrLst>
+    <dgm:txEffectClrLst/>
+  </dgm:styleLbl>
+  <dgm:styleLbl name="bgAccFollowNode1">
+    <dgm:fillClrLst>
+      <a:schemeClr val="accent5">
+        <a:tint val="40000"/>
+        <a:alpha val="90000"/>
+      </a:schemeClr>
+      <a:schemeClr val="accent6">
+        <a:tint val="40000"/>
+        <a:alpha val="90000"/>
+      </a:schemeClr>
+    </dgm:fillClrLst>
+    <dgm:linClrLst>
+      <a:schemeClr val="accent5">
+        <a:tint val="40000"/>
+        <a:alpha val="90000"/>
+      </a:schemeClr>
+      <a:schemeClr val="accent6">
+        <a:tint val="40000"/>
+        <a:alpha val="90000"/>
+      </a:schemeClr>
+    </dgm:linClrLst>
+    <dgm:effectClrLst/>
+    <dgm:txLinClrLst/>
+    <dgm:txFillClrLst meth="repeat">
+      <a:schemeClr val="dk1"/>
+    </dgm:txFillClrLst>
+    <dgm:txEffectClrLst/>
+  </dgm:styleLbl>
+  <dgm:styleLbl name="fgAcc0">
+    <dgm:fillClrLst meth="repeat">
+      <a:schemeClr val="lt1">
+        <a:alpha val="90000"/>
+      </a:schemeClr>
+    </dgm:fillClrLst>
+    <dgm:linClrLst>
+      <a:schemeClr val="accent4"/>
+    </dgm:linClrLst>
+    <dgm:effectClrLst/>
+    <dgm:txLinClrLst/>
+    <dgm:txFillClrLst meth="repeat">
+      <a:schemeClr val="dk1"/>
+    </dgm:txFillClrLst>
+    <dgm:txEffectClrLst/>
+  </dgm:styleLbl>
+  <dgm:styleLbl name="fgAcc2">
+    <dgm:fillClrLst meth="repeat">
+      <a:schemeClr val="lt1">
+        <a:alpha val="90000"/>
+      </a:schemeClr>
+    </dgm:fillClrLst>
+    <dgm:linClrLst>
+      <a:schemeClr val="accent6"/>
+    </dgm:linClrLst>
+    <dgm:effectClrLst/>
+    <dgm:txLinClrLst/>
+    <dgm:txFillClrLst meth="repeat">
+      <a:schemeClr val="dk1"/>
+    </dgm:txFillClrLst>
+    <dgm:txEffectClrLst/>
+  </dgm:styleLbl>
+  <dgm:styleLbl name="fgAcc3">
+    <dgm:fillClrLst meth="repeat">
+      <a:schemeClr val="lt1">
+        <a:alpha val="90000"/>
+      </a:schemeClr>
+    </dgm:fillClrLst>
+    <dgm:linClrLst>
+      <a:schemeClr val="accent1"/>
+    </dgm:linClrLst>
+    <dgm:effectClrLst/>
+    <dgm:txLinClrLst/>
+    <dgm:txFillClrLst meth="repeat">
+      <a:schemeClr val="dk1"/>
+    </dgm:txFillClrLst>
+    <dgm:txEffectClrLst/>
+  </dgm:styleLbl>
+  <dgm:styleLbl name="fgAcc4">
+    <dgm:fillClrLst meth="repeat">
+      <a:schemeClr val="lt1">
+        <a:alpha val="90000"/>
+      </a:schemeClr>
+    </dgm:fillClrLst>
+    <dgm:linClrLst>
+      <a:schemeClr val="accent2"/>
+    </dgm:linClrLst>
+    <dgm:effectClrLst/>
+    <dgm:txLinClrLst/>
+    <dgm:txFillClrLst meth="repeat">
+      <a:schemeClr val="dk1"/>
+    </dgm:txFillClrLst>
+    <dgm:txEffectClrLst/>
+  </dgm:styleLbl>
+  <dgm:styleLbl name="bgShp">
+    <dgm:fillClrLst meth="repeat">
+      <a:schemeClr val="accent5">
+        <a:tint val="40000"/>
+      </a:schemeClr>
+    </dgm:fillClrLst>
+    <dgm:linClrLst meth="repeat">
+      <a:schemeClr val="dk1"/>
+    </dgm:linClrLst>
+    <dgm:effectClrLst/>
+    <dgm:txLinClrLst/>
+    <dgm:txFillClrLst meth="repeat">
+      <a:schemeClr val="dk1"/>
+    </dgm:txFillClrLst>
+    <dgm:txEffectClrLst/>
+  </dgm:styleLbl>
+  <dgm:styleLbl name="dkBgShp">
+    <dgm:fillClrLst meth="repeat">
+      <a:schemeClr val="accent5">
+        <a:shade val="90000"/>
+      </a:schemeClr>
+    </dgm:fillClrLst>
+    <dgm:linClrLst meth="repeat">
+      <a:schemeClr val="dk1"/>
+    </dgm:linClrLst>
+    <dgm:effectClrLst/>
+    <dgm:txLinClrLst/>
+    <dgm:txFillClrLst meth="repeat">
+      <a:schemeClr val="lt1"/>
+    </dgm:txFillClrLst>
+    <dgm:txEffectClrLst/>
+  </dgm:styleLbl>
+  <dgm:styleLbl name="trBgShp">
+    <dgm:fillClrLst meth="repeat">
+      <a:schemeClr val="accent5">
+        <a:tint val="50000"/>
+        <a:alpha val="40000"/>
+      </a:schemeClr>
+    </dgm:fillClrLst>
+    <dgm:linClrLst meth="repeat">
+      <a:schemeClr val="accent5"/>
+    </dgm:linClrLst>
+    <dgm:effectClrLst/>
+    <dgm:txLinClrLst/>
+    <dgm:txFillClrLst meth="repeat">
+      <a:schemeClr val="lt1"/>
+    </dgm:txFillClrLst>
+    <dgm:txEffectClrLst/>
+  </dgm:styleLbl>
+  <dgm:styleLbl name="fgShp">
+    <dgm:fillClrLst meth="repeat">
+      <a:schemeClr val="accent5">
+        <a:tint val="40000"/>
+      </a:schemeClr>
+    </dgm:fillClrLst>
+    <dgm:linClrLst meth="repeat">
+      <a:schemeClr val="lt1"/>
+    </dgm:linClrLst>
+    <dgm:effectClrLst/>
+    <dgm:txLinClrLst/>
+    <dgm:txFillClrLst meth="repeat">
+      <a:schemeClr val="dk1"/>
+    </dgm:txFillClrLst>
+    <dgm:txEffectClrLst/>
+  </dgm:styleLbl>
+  <dgm:styleLbl name="revTx">
+    <dgm:fillClrLst meth="repeat">
+      <a:schemeClr val="lt1">
+        <a:alpha val="0"/>
+      </a:schemeClr>
+    </dgm:fillClrLst>
+    <dgm:linClrLst meth="repeat">
+      <a:schemeClr val="dk1">
+        <a:alpha val="0"/>
+      </a:schemeClr>
+    </dgm:linClrLst>
+    <dgm:effectClrLst/>
+    <dgm:txLinClrLst/>
+    <dgm:txFillClrLst meth="repeat">
+      <a:schemeClr val="tx1"/>
+    </dgm:txFillClrLst>
+    <dgm:txEffectClrLst/>
+  </dgm:styleLbl>
+</dgm:colorsDef>
+</file>
+
+<file path=ppt/diagrams/colors2.xml><?xml version="1.0" encoding="utf-8"?>
 <dgm:colorsDef xmlns:dgm="http://schemas.openxmlformats.org/drawingml/2006/diagram" xmlns:a="http://schemas.openxmlformats.org/drawingml/2006/main" uniqueId="urn:microsoft.com/office/officeart/2005/8/colors/colorful5">
   <dgm:title val=""/>
   <dgm:desc val=""/>
@@ -1307,6 +2096,303 @@
 </dgm:dataModel>
 </file>
 
+<file path=ppt/diagrams/data2.xml><?xml version="1.0" encoding="utf-8"?>
+<dgm:dataModel xmlns:dgm="http://schemas.openxmlformats.org/drawingml/2006/diagram" xmlns:a="http://schemas.openxmlformats.org/drawingml/2006/main">
+  <dgm:ptLst>
+    <dgm:pt modelId="{2E29FB0F-5B5D-44F4-9907-C5F62D197857}" type="doc">
+      <dgm:prSet loTypeId="urn:microsoft.com/office/officeart/2005/8/layout/vList2" loCatId="list" qsTypeId="urn:microsoft.com/office/officeart/2005/8/quickstyle/simple1" qsCatId="simple" csTypeId="urn:microsoft.com/office/officeart/2005/8/colors/colorful5" csCatId="colorful"/>
+      <dgm:spPr/>
+      <dgm:t>
+        <a:bodyPr/>
+        <a:lstStyle/>
+        <a:p>
+          <a:endParaRPr lang="en-US"/>
+        </a:p>
+      </dgm:t>
+    </dgm:pt>
+    <dgm:pt modelId="{C1488D6D-8F0D-4FE1-85D7-1C715C77BA45}">
+      <dgm:prSet/>
+      <dgm:spPr/>
+      <dgm:t>
+        <a:bodyPr/>
+        <a:lstStyle/>
+        <a:p>
+          <a:r>
+            <a:rPr lang="en-US"/>
+            <a:t>The CSS float property is used to make an element float to the left or right of its containing element. When an element is floated, it is removed from the normal flow of the document and other elements will flow around it.</a:t>
+          </a:r>
+        </a:p>
+      </dgm:t>
+    </dgm:pt>
+    <dgm:pt modelId="{A0E71B88-E54B-4A48-9FBD-92B3D9528738}" type="parTrans" cxnId="{AEDAA519-B082-4519-8846-287691B9E008}">
+      <dgm:prSet/>
+      <dgm:spPr/>
+      <dgm:t>
+        <a:bodyPr/>
+        <a:lstStyle/>
+        <a:p>
+          <a:endParaRPr lang="en-US"/>
+        </a:p>
+      </dgm:t>
+    </dgm:pt>
+    <dgm:pt modelId="{126DA5ED-8B73-4EBB-9696-3185578A0CE9}" type="sibTrans" cxnId="{AEDAA519-B082-4519-8846-287691B9E008}">
+      <dgm:prSet/>
+      <dgm:spPr/>
+      <dgm:t>
+        <a:bodyPr/>
+        <a:lstStyle/>
+        <a:p>
+          <a:endParaRPr lang="en-US"/>
+        </a:p>
+      </dgm:t>
+    </dgm:pt>
+    <dgm:pt modelId="{A6CB0FDB-FF14-48EC-B65B-1184EBDCC5B7}">
+      <dgm:prSet/>
+      <dgm:spPr/>
+      <dgm:t>
+        <a:bodyPr/>
+        <a:lstStyle/>
+        <a:p>
+          <a:r>
+            <a:rPr lang="en-US"/>
+            <a:t>The float property can be set to left, right, or none.</a:t>
+          </a:r>
+        </a:p>
+      </dgm:t>
+    </dgm:pt>
+    <dgm:pt modelId="{5082267A-6A49-4A5F-93A0-8C29542ED3F1}" type="parTrans" cxnId="{D7BCE6CA-B129-4835-AC45-5B4303E2C0E0}">
+      <dgm:prSet/>
+      <dgm:spPr/>
+      <dgm:t>
+        <a:bodyPr/>
+        <a:lstStyle/>
+        <a:p>
+          <a:endParaRPr lang="en-US"/>
+        </a:p>
+      </dgm:t>
+    </dgm:pt>
+    <dgm:pt modelId="{F8C358CE-865B-44FB-BFC1-CC94CE9EC66D}" type="sibTrans" cxnId="{D7BCE6CA-B129-4835-AC45-5B4303E2C0E0}">
+      <dgm:prSet/>
+      <dgm:spPr/>
+      <dgm:t>
+        <a:bodyPr/>
+        <a:lstStyle/>
+        <a:p>
+          <a:endParaRPr lang="en-US"/>
+        </a:p>
+      </dgm:t>
+    </dgm:pt>
+    <dgm:pt modelId="{088A3D75-6568-447E-B9B4-00978362CDAF}">
+      <dgm:prSet/>
+      <dgm:spPr/>
+      <dgm:t>
+        <a:bodyPr/>
+        <a:lstStyle/>
+        <a:p>
+          <a:r>
+            <a:rPr lang="en-US"/>
+            <a:t>left will make the element float to the left of its containing element.</a:t>
+          </a:r>
+        </a:p>
+      </dgm:t>
+    </dgm:pt>
+    <dgm:pt modelId="{C1555B3B-F51F-47A7-B094-2693B755853A}" type="parTrans" cxnId="{22D08FCA-8D5D-4098-8E61-8CCAF82B4197}">
+      <dgm:prSet/>
+      <dgm:spPr/>
+      <dgm:t>
+        <a:bodyPr/>
+        <a:lstStyle/>
+        <a:p>
+          <a:endParaRPr lang="en-US"/>
+        </a:p>
+      </dgm:t>
+    </dgm:pt>
+    <dgm:pt modelId="{0362E6C2-B463-4FA9-B1AE-FCA32939FC4D}" type="sibTrans" cxnId="{22D08FCA-8D5D-4098-8E61-8CCAF82B4197}">
+      <dgm:prSet/>
+      <dgm:spPr/>
+      <dgm:t>
+        <a:bodyPr/>
+        <a:lstStyle/>
+        <a:p>
+          <a:endParaRPr lang="en-US"/>
+        </a:p>
+      </dgm:t>
+    </dgm:pt>
+    <dgm:pt modelId="{E2485293-4E43-4F3E-9E03-DAC22147F4D8}">
+      <dgm:prSet/>
+      <dgm:spPr/>
+      <dgm:t>
+        <a:bodyPr/>
+        <a:lstStyle/>
+        <a:p>
+          <a:r>
+            <a:rPr lang="en-US"/>
+            <a:t>right will make the element float to the right of its containing element.</a:t>
+          </a:r>
+        </a:p>
+      </dgm:t>
+    </dgm:pt>
+    <dgm:pt modelId="{E1FFEBB8-79FE-4815-BB01-B28C503E8958}" type="parTrans" cxnId="{9023BAAE-1928-4EC7-B387-1A409E329843}">
+      <dgm:prSet/>
+      <dgm:spPr/>
+      <dgm:t>
+        <a:bodyPr/>
+        <a:lstStyle/>
+        <a:p>
+          <a:endParaRPr lang="en-US"/>
+        </a:p>
+      </dgm:t>
+    </dgm:pt>
+    <dgm:pt modelId="{93D1906B-ED33-4352-A18E-3F1820EAD9B9}" type="sibTrans" cxnId="{9023BAAE-1928-4EC7-B387-1A409E329843}">
+      <dgm:prSet/>
+      <dgm:spPr/>
+      <dgm:t>
+        <a:bodyPr/>
+        <a:lstStyle/>
+        <a:p>
+          <a:endParaRPr lang="en-US"/>
+        </a:p>
+      </dgm:t>
+    </dgm:pt>
+    <dgm:pt modelId="{FE714A85-EA9A-4C33-889F-BA406E9F954E}">
+      <dgm:prSet/>
+      <dgm:spPr/>
+      <dgm:t>
+        <a:bodyPr/>
+        <a:lstStyle/>
+        <a:p>
+          <a:r>
+            <a:rPr lang="en-US"/>
+            <a:t>none will make the element not float and be in normal flow</a:t>
+          </a:r>
+        </a:p>
+      </dgm:t>
+    </dgm:pt>
+    <dgm:pt modelId="{AE50BC4A-B1BC-490F-BFBA-F39654C53BB8}" type="parTrans" cxnId="{54DEF576-87FA-4258-81D4-0234FBD6DE7D}">
+      <dgm:prSet/>
+      <dgm:spPr/>
+      <dgm:t>
+        <a:bodyPr/>
+        <a:lstStyle/>
+        <a:p>
+          <a:endParaRPr lang="en-US"/>
+        </a:p>
+      </dgm:t>
+    </dgm:pt>
+    <dgm:pt modelId="{1BA742BB-7C01-4382-96BA-9AD3EDDB4C3B}" type="sibTrans" cxnId="{54DEF576-87FA-4258-81D4-0234FBD6DE7D}">
+      <dgm:prSet/>
+      <dgm:spPr/>
+      <dgm:t>
+        <a:bodyPr/>
+        <a:lstStyle/>
+        <a:p>
+          <a:endParaRPr lang="en-US"/>
+        </a:p>
+      </dgm:t>
+    </dgm:pt>
+    <dgm:pt modelId="{CDC8FB5E-1E19-1141-95B4-CDD264EA745D}" type="pres">
+      <dgm:prSet presAssocID="{2E29FB0F-5B5D-44F4-9907-C5F62D197857}" presName="linear" presStyleCnt="0">
+        <dgm:presLayoutVars>
+          <dgm:animLvl val="lvl"/>
+          <dgm:resizeHandles val="exact"/>
+        </dgm:presLayoutVars>
+      </dgm:prSet>
+      <dgm:spPr/>
+    </dgm:pt>
+    <dgm:pt modelId="{1F59887A-1CA3-2A4F-B9B8-4AE460161ADE}" type="pres">
+      <dgm:prSet presAssocID="{C1488D6D-8F0D-4FE1-85D7-1C715C77BA45}" presName="parentText" presStyleLbl="node1" presStyleIdx="0" presStyleCnt="5">
+        <dgm:presLayoutVars>
+          <dgm:chMax val="0"/>
+          <dgm:bulletEnabled val="1"/>
+        </dgm:presLayoutVars>
+      </dgm:prSet>
+      <dgm:spPr/>
+    </dgm:pt>
+    <dgm:pt modelId="{9D54650F-D077-EC46-BEB4-D8A8F73F124F}" type="pres">
+      <dgm:prSet presAssocID="{126DA5ED-8B73-4EBB-9696-3185578A0CE9}" presName="spacer" presStyleCnt="0"/>
+      <dgm:spPr/>
+    </dgm:pt>
+    <dgm:pt modelId="{CF5572EF-8116-6D47-9C82-9878EF97530E}" type="pres">
+      <dgm:prSet presAssocID="{A6CB0FDB-FF14-48EC-B65B-1184EBDCC5B7}" presName="parentText" presStyleLbl="node1" presStyleIdx="1" presStyleCnt="5">
+        <dgm:presLayoutVars>
+          <dgm:chMax val="0"/>
+          <dgm:bulletEnabled val="1"/>
+        </dgm:presLayoutVars>
+      </dgm:prSet>
+      <dgm:spPr/>
+    </dgm:pt>
+    <dgm:pt modelId="{5039CBF8-E6D4-5745-807E-4B3D5384CD64}" type="pres">
+      <dgm:prSet presAssocID="{F8C358CE-865B-44FB-BFC1-CC94CE9EC66D}" presName="spacer" presStyleCnt="0"/>
+      <dgm:spPr/>
+    </dgm:pt>
+    <dgm:pt modelId="{D583BBEE-55EF-9B44-893D-8A6405281279}" type="pres">
+      <dgm:prSet presAssocID="{088A3D75-6568-447E-B9B4-00978362CDAF}" presName="parentText" presStyleLbl="node1" presStyleIdx="2" presStyleCnt="5">
+        <dgm:presLayoutVars>
+          <dgm:chMax val="0"/>
+          <dgm:bulletEnabled val="1"/>
+        </dgm:presLayoutVars>
+      </dgm:prSet>
+      <dgm:spPr/>
+    </dgm:pt>
+    <dgm:pt modelId="{FCCD69FD-ADE3-A343-B93C-832B24A9EEAB}" type="pres">
+      <dgm:prSet presAssocID="{0362E6C2-B463-4FA9-B1AE-FCA32939FC4D}" presName="spacer" presStyleCnt="0"/>
+      <dgm:spPr/>
+    </dgm:pt>
+    <dgm:pt modelId="{1270715D-199A-FE43-A662-E54F6F0EDE3E}" type="pres">
+      <dgm:prSet presAssocID="{E2485293-4E43-4F3E-9E03-DAC22147F4D8}" presName="parentText" presStyleLbl="node1" presStyleIdx="3" presStyleCnt="5">
+        <dgm:presLayoutVars>
+          <dgm:chMax val="0"/>
+          <dgm:bulletEnabled val="1"/>
+        </dgm:presLayoutVars>
+      </dgm:prSet>
+      <dgm:spPr/>
+    </dgm:pt>
+    <dgm:pt modelId="{48E165E0-4B69-BE4C-832A-68E81BF7797C}" type="pres">
+      <dgm:prSet presAssocID="{93D1906B-ED33-4352-A18E-3F1820EAD9B9}" presName="spacer" presStyleCnt="0"/>
+      <dgm:spPr/>
+    </dgm:pt>
+    <dgm:pt modelId="{7647DBA3-19A0-224B-9F51-403E3C3FAE35}" type="pres">
+      <dgm:prSet presAssocID="{FE714A85-EA9A-4C33-889F-BA406E9F954E}" presName="parentText" presStyleLbl="node1" presStyleIdx="4" presStyleCnt="5">
+        <dgm:presLayoutVars>
+          <dgm:chMax val="0"/>
+          <dgm:bulletEnabled val="1"/>
+        </dgm:presLayoutVars>
+      </dgm:prSet>
+      <dgm:spPr/>
+    </dgm:pt>
+  </dgm:ptLst>
+  <dgm:cxnLst>
+    <dgm:cxn modelId="{AEDAA519-B082-4519-8846-287691B9E008}" srcId="{2E29FB0F-5B5D-44F4-9907-C5F62D197857}" destId="{C1488D6D-8F0D-4FE1-85D7-1C715C77BA45}" srcOrd="0" destOrd="0" parTransId="{A0E71B88-E54B-4A48-9FBD-92B3D9528738}" sibTransId="{126DA5ED-8B73-4EBB-9696-3185578A0CE9}"/>
+    <dgm:cxn modelId="{03DD5220-1CBB-4643-A40C-2C0D319AB7D4}" type="presOf" srcId="{C1488D6D-8F0D-4FE1-85D7-1C715C77BA45}" destId="{1F59887A-1CA3-2A4F-B9B8-4AE460161ADE}" srcOrd="0" destOrd="0" presId="urn:microsoft.com/office/officeart/2005/8/layout/vList2"/>
+    <dgm:cxn modelId="{F5373944-5543-1A4C-AC9F-7712B1F3AF94}" type="presOf" srcId="{E2485293-4E43-4F3E-9E03-DAC22147F4D8}" destId="{1270715D-199A-FE43-A662-E54F6F0EDE3E}" srcOrd="0" destOrd="0" presId="urn:microsoft.com/office/officeart/2005/8/layout/vList2"/>
+    <dgm:cxn modelId="{161CB960-AA49-C342-A9CF-876FC0FEBB54}" type="presOf" srcId="{088A3D75-6568-447E-B9B4-00978362CDAF}" destId="{D583BBEE-55EF-9B44-893D-8A6405281279}" srcOrd="0" destOrd="0" presId="urn:microsoft.com/office/officeart/2005/8/layout/vList2"/>
+    <dgm:cxn modelId="{54DEF576-87FA-4258-81D4-0234FBD6DE7D}" srcId="{2E29FB0F-5B5D-44F4-9907-C5F62D197857}" destId="{FE714A85-EA9A-4C33-889F-BA406E9F954E}" srcOrd="4" destOrd="0" parTransId="{AE50BC4A-B1BC-490F-BFBA-F39654C53BB8}" sibTransId="{1BA742BB-7C01-4382-96BA-9AD3EDDB4C3B}"/>
+    <dgm:cxn modelId="{34B43EA7-8BFD-5A49-A961-9BB95F5CCB56}" type="presOf" srcId="{FE714A85-EA9A-4C33-889F-BA406E9F954E}" destId="{7647DBA3-19A0-224B-9F51-403E3C3FAE35}" srcOrd="0" destOrd="0" presId="urn:microsoft.com/office/officeart/2005/8/layout/vList2"/>
+    <dgm:cxn modelId="{9023BAAE-1928-4EC7-B387-1A409E329843}" srcId="{2E29FB0F-5B5D-44F4-9907-C5F62D197857}" destId="{E2485293-4E43-4F3E-9E03-DAC22147F4D8}" srcOrd="3" destOrd="0" parTransId="{E1FFEBB8-79FE-4815-BB01-B28C503E8958}" sibTransId="{93D1906B-ED33-4352-A18E-3F1820EAD9B9}"/>
+    <dgm:cxn modelId="{22D08FCA-8D5D-4098-8E61-8CCAF82B4197}" srcId="{2E29FB0F-5B5D-44F4-9907-C5F62D197857}" destId="{088A3D75-6568-447E-B9B4-00978362CDAF}" srcOrd="2" destOrd="0" parTransId="{C1555B3B-F51F-47A7-B094-2693B755853A}" sibTransId="{0362E6C2-B463-4FA9-B1AE-FCA32939FC4D}"/>
+    <dgm:cxn modelId="{D7BCE6CA-B129-4835-AC45-5B4303E2C0E0}" srcId="{2E29FB0F-5B5D-44F4-9907-C5F62D197857}" destId="{A6CB0FDB-FF14-48EC-B65B-1184EBDCC5B7}" srcOrd="1" destOrd="0" parTransId="{5082267A-6A49-4A5F-93A0-8C29542ED3F1}" sibTransId="{F8C358CE-865B-44FB-BFC1-CC94CE9EC66D}"/>
+    <dgm:cxn modelId="{15F0B5CF-8504-7742-AC15-9436251CA8F0}" type="presOf" srcId="{A6CB0FDB-FF14-48EC-B65B-1184EBDCC5B7}" destId="{CF5572EF-8116-6D47-9C82-9878EF97530E}" srcOrd="0" destOrd="0" presId="urn:microsoft.com/office/officeart/2005/8/layout/vList2"/>
+    <dgm:cxn modelId="{24CAD0DC-FB03-4B49-86D4-2BCB31652742}" type="presOf" srcId="{2E29FB0F-5B5D-44F4-9907-C5F62D197857}" destId="{CDC8FB5E-1E19-1141-95B4-CDD264EA745D}" srcOrd="0" destOrd="0" presId="urn:microsoft.com/office/officeart/2005/8/layout/vList2"/>
+    <dgm:cxn modelId="{C26C058B-E17D-CE42-9622-972802173FD0}" type="presParOf" srcId="{CDC8FB5E-1E19-1141-95B4-CDD264EA745D}" destId="{1F59887A-1CA3-2A4F-B9B8-4AE460161ADE}" srcOrd="0" destOrd="0" presId="urn:microsoft.com/office/officeart/2005/8/layout/vList2"/>
+    <dgm:cxn modelId="{45C41830-51FD-B34D-85C1-5CE19CA65525}" type="presParOf" srcId="{CDC8FB5E-1E19-1141-95B4-CDD264EA745D}" destId="{9D54650F-D077-EC46-BEB4-D8A8F73F124F}" srcOrd="1" destOrd="0" presId="urn:microsoft.com/office/officeart/2005/8/layout/vList2"/>
+    <dgm:cxn modelId="{F9C07CD5-9BE4-8949-8CFC-BE9A763876BC}" type="presParOf" srcId="{CDC8FB5E-1E19-1141-95B4-CDD264EA745D}" destId="{CF5572EF-8116-6D47-9C82-9878EF97530E}" srcOrd="2" destOrd="0" presId="urn:microsoft.com/office/officeart/2005/8/layout/vList2"/>
+    <dgm:cxn modelId="{7182AD44-951D-734A-80CF-F3B5D7761D34}" type="presParOf" srcId="{CDC8FB5E-1E19-1141-95B4-CDD264EA745D}" destId="{5039CBF8-E6D4-5745-807E-4B3D5384CD64}" srcOrd="3" destOrd="0" presId="urn:microsoft.com/office/officeart/2005/8/layout/vList2"/>
+    <dgm:cxn modelId="{22B1290E-E8F6-8649-B4C6-6EC23D33BE54}" type="presParOf" srcId="{CDC8FB5E-1E19-1141-95B4-CDD264EA745D}" destId="{D583BBEE-55EF-9B44-893D-8A6405281279}" srcOrd="4" destOrd="0" presId="urn:microsoft.com/office/officeart/2005/8/layout/vList2"/>
+    <dgm:cxn modelId="{000D89AE-9D78-D746-A2E5-974211B5BA41}" type="presParOf" srcId="{CDC8FB5E-1E19-1141-95B4-CDD264EA745D}" destId="{FCCD69FD-ADE3-A343-B93C-832B24A9EEAB}" srcOrd="5" destOrd="0" presId="urn:microsoft.com/office/officeart/2005/8/layout/vList2"/>
+    <dgm:cxn modelId="{5395D5DD-7D8C-A846-82F3-36E600C18670}" type="presParOf" srcId="{CDC8FB5E-1E19-1141-95B4-CDD264EA745D}" destId="{1270715D-199A-FE43-A662-E54F6F0EDE3E}" srcOrd="6" destOrd="0" presId="urn:microsoft.com/office/officeart/2005/8/layout/vList2"/>
+    <dgm:cxn modelId="{B51B8379-4153-F744-ACF4-93FACE2B1AF8}" type="presParOf" srcId="{CDC8FB5E-1E19-1141-95B4-CDD264EA745D}" destId="{48E165E0-4B69-BE4C-832A-68E81BF7797C}" srcOrd="7" destOrd="0" presId="urn:microsoft.com/office/officeart/2005/8/layout/vList2"/>
+    <dgm:cxn modelId="{968275D3-98B8-AF48-A09A-F1DB82BD1B91}" type="presParOf" srcId="{CDC8FB5E-1E19-1141-95B4-CDD264EA745D}" destId="{7647DBA3-19A0-224B-9F51-403E3C3FAE35}" srcOrd="8" destOrd="0" presId="urn:microsoft.com/office/officeart/2005/8/layout/vList2"/>
+  </dgm:cxnLst>
+  <dgm:bg/>
+  <dgm:whole/>
+  <dgm:extLst>
+    <a:ext uri="http://schemas.microsoft.com/office/drawing/2008/diagram">
+      <dsp:dataModelExt xmlns:dsp="http://schemas.microsoft.com/office/drawing/2008/diagram" relId="rId7" minVer="http://schemas.openxmlformats.org/drawingml/2006/diagram"/>
+    </a:ext>
+  </dgm:extLst>
+</dgm:dataModel>
+</file>
+
 <file path=ppt/diagrams/drawing1.xml><?xml version="1.0" encoding="utf-8"?>
 <dsp:drawing xmlns:dgm="http://schemas.openxmlformats.org/drawingml/2006/diagram" xmlns:dsp="http://schemas.microsoft.com/office/drawing/2008/diagram" xmlns:a="http://schemas.openxmlformats.org/drawingml/2006/main">
   <dsp:spTree>
@@ -1787,7 +2873,576 @@
 </dsp:drawing>
 </file>
 
+<file path=ppt/diagrams/drawing2.xml><?xml version="1.0" encoding="utf-8"?>
+<dsp:drawing xmlns:dgm="http://schemas.openxmlformats.org/drawingml/2006/diagram" xmlns:dsp="http://schemas.microsoft.com/office/drawing/2008/diagram" xmlns:a="http://schemas.openxmlformats.org/drawingml/2006/main">
+  <dsp:spTree>
+    <dsp:nvGrpSpPr>
+      <dsp:cNvPr id="0" name=""/>
+      <dsp:cNvGrpSpPr/>
+    </dsp:nvGrpSpPr>
+    <dsp:grpSpPr/>
+    <dsp:sp modelId="{1F59887A-1CA3-2A4F-B9B8-4AE460161ADE}">
+      <dsp:nvSpPr>
+        <dsp:cNvPr id="0" name=""/>
+        <dsp:cNvSpPr/>
+      </dsp:nvSpPr>
+      <dsp:spPr>
+        <a:xfrm>
+          <a:off x="0" y="67328"/>
+          <a:ext cx="6254496" cy="714870"/>
+        </a:xfrm>
+        <a:prstGeom prst="roundRect">
+          <a:avLst/>
+        </a:prstGeom>
+        <a:solidFill>
+          <a:schemeClr val="accent5">
+            <a:hueOff val="0"/>
+            <a:satOff val="0"/>
+            <a:lumOff val="0"/>
+            <a:alphaOff val="0"/>
+          </a:schemeClr>
+        </a:solidFill>
+        <a:ln w="12700" cap="flat" cmpd="sng" algn="ctr">
+          <a:solidFill>
+            <a:schemeClr val="lt1">
+              <a:hueOff val="0"/>
+              <a:satOff val="0"/>
+              <a:lumOff val="0"/>
+              <a:alphaOff val="0"/>
+            </a:schemeClr>
+          </a:solidFill>
+          <a:prstDash val="solid"/>
+          <a:miter lim="800000"/>
+        </a:ln>
+        <a:effectLst/>
+      </dsp:spPr>
+      <dsp:style>
+        <a:lnRef idx="2">
+          <a:scrgbClr r="0" g="0" b="0"/>
+        </a:lnRef>
+        <a:fillRef idx="1">
+          <a:scrgbClr r="0" g="0" b="0"/>
+        </a:fillRef>
+        <a:effectRef idx="0">
+          <a:scrgbClr r="0" g="0" b="0"/>
+        </a:effectRef>
+        <a:fontRef idx="minor">
+          <a:schemeClr val="lt1"/>
+        </a:fontRef>
+      </dsp:style>
+      <dsp:txBody>
+        <a:bodyPr spcFirstLastPara="0" vert="horz" wrap="square" lIns="49530" tIns="49530" rIns="49530" bIns="49530" numCol="1" spcCol="1270" anchor="ctr" anchorCtr="0">
+          <a:noAutofit/>
+        </a:bodyPr>
+        <a:lstStyle/>
+        <a:p>
+          <a:pPr marL="0" lvl="0" indent="0" algn="l" defTabSz="577850">
+            <a:lnSpc>
+              <a:spcPct val="90000"/>
+            </a:lnSpc>
+            <a:spcBef>
+              <a:spcPct val="0"/>
+            </a:spcBef>
+            <a:spcAft>
+              <a:spcPct val="35000"/>
+            </a:spcAft>
+            <a:buNone/>
+          </a:pPr>
+          <a:r>
+            <a:rPr lang="en-US" sz="1300" kern="1200"/>
+            <a:t>The CSS float property is used to make an element float to the left or right of its containing element. When an element is floated, it is removed from the normal flow of the document and other elements will flow around it.</a:t>
+          </a:r>
+        </a:p>
+      </dsp:txBody>
+      <dsp:txXfrm>
+        <a:off x="34897" y="102225"/>
+        <a:ext cx="6184702" cy="645076"/>
+      </dsp:txXfrm>
+    </dsp:sp>
+    <dsp:sp modelId="{CF5572EF-8116-6D47-9C82-9878EF97530E}">
+      <dsp:nvSpPr>
+        <dsp:cNvPr id="0" name=""/>
+        <dsp:cNvSpPr/>
+      </dsp:nvSpPr>
+      <dsp:spPr>
+        <a:xfrm>
+          <a:off x="0" y="819638"/>
+          <a:ext cx="6254496" cy="714870"/>
+        </a:xfrm>
+        <a:prstGeom prst="roundRect">
+          <a:avLst/>
+        </a:prstGeom>
+        <a:solidFill>
+          <a:schemeClr val="accent5">
+            <a:hueOff val="-1689636"/>
+            <a:satOff val="-4355"/>
+            <a:lumOff val="-2941"/>
+            <a:alphaOff val="0"/>
+          </a:schemeClr>
+        </a:solidFill>
+        <a:ln w="12700" cap="flat" cmpd="sng" algn="ctr">
+          <a:solidFill>
+            <a:schemeClr val="lt1">
+              <a:hueOff val="0"/>
+              <a:satOff val="0"/>
+              <a:lumOff val="0"/>
+              <a:alphaOff val="0"/>
+            </a:schemeClr>
+          </a:solidFill>
+          <a:prstDash val="solid"/>
+          <a:miter lim="800000"/>
+        </a:ln>
+        <a:effectLst/>
+      </dsp:spPr>
+      <dsp:style>
+        <a:lnRef idx="2">
+          <a:scrgbClr r="0" g="0" b="0"/>
+        </a:lnRef>
+        <a:fillRef idx="1">
+          <a:scrgbClr r="0" g="0" b="0"/>
+        </a:fillRef>
+        <a:effectRef idx="0">
+          <a:scrgbClr r="0" g="0" b="0"/>
+        </a:effectRef>
+        <a:fontRef idx="minor">
+          <a:schemeClr val="lt1"/>
+        </a:fontRef>
+      </dsp:style>
+      <dsp:txBody>
+        <a:bodyPr spcFirstLastPara="0" vert="horz" wrap="square" lIns="49530" tIns="49530" rIns="49530" bIns="49530" numCol="1" spcCol="1270" anchor="ctr" anchorCtr="0">
+          <a:noAutofit/>
+        </a:bodyPr>
+        <a:lstStyle/>
+        <a:p>
+          <a:pPr marL="0" lvl="0" indent="0" algn="l" defTabSz="577850">
+            <a:lnSpc>
+              <a:spcPct val="90000"/>
+            </a:lnSpc>
+            <a:spcBef>
+              <a:spcPct val="0"/>
+            </a:spcBef>
+            <a:spcAft>
+              <a:spcPct val="35000"/>
+            </a:spcAft>
+            <a:buNone/>
+          </a:pPr>
+          <a:r>
+            <a:rPr lang="en-US" sz="1300" kern="1200"/>
+            <a:t>The float property can be set to left, right, or none.</a:t>
+          </a:r>
+        </a:p>
+      </dsp:txBody>
+      <dsp:txXfrm>
+        <a:off x="34897" y="854535"/>
+        <a:ext cx="6184702" cy="645076"/>
+      </dsp:txXfrm>
+    </dsp:sp>
+    <dsp:sp modelId="{D583BBEE-55EF-9B44-893D-8A6405281279}">
+      <dsp:nvSpPr>
+        <dsp:cNvPr id="0" name=""/>
+        <dsp:cNvSpPr/>
+      </dsp:nvSpPr>
+      <dsp:spPr>
+        <a:xfrm>
+          <a:off x="0" y="1571948"/>
+          <a:ext cx="6254496" cy="714870"/>
+        </a:xfrm>
+        <a:prstGeom prst="roundRect">
+          <a:avLst/>
+        </a:prstGeom>
+        <a:solidFill>
+          <a:schemeClr val="accent5">
+            <a:hueOff val="-3379271"/>
+            <a:satOff val="-8710"/>
+            <a:lumOff val="-5883"/>
+            <a:alphaOff val="0"/>
+          </a:schemeClr>
+        </a:solidFill>
+        <a:ln w="12700" cap="flat" cmpd="sng" algn="ctr">
+          <a:solidFill>
+            <a:schemeClr val="lt1">
+              <a:hueOff val="0"/>
+              <a:satOff val="0"/>
+              <a:lumOff val="0"/>
+              <a:alphaOff val="0"/>
+            </a:schemeClr>
+          </a:solidFill>
+          <a:prstDash val="solid"/>
+          <a:miter lim="800000"/>
+        </a:ln>
+        <a:effectLst/>
+      </dsp:spPr>
+      <dsp:style>
+        <a:lnRef idx="2">
+          <a:scrgbClr r="0" g="0" b="0"/>
+        </a:lnRef>
+        <a:fillRef idx="1">
+          <a:scrgbClr r="0" g="0" b="0"/>
+        </a:fillRef>
+        <a:effectRef idx="0">
+          <a:scrgbClr r="0" g="0" b="0"/>
+        </a:effectRef>
+        <a:fontRef idx="minor">
+          <a:schemeClr val="lt1"/>
+        </a:fontRef>
+      </dsp:style>
+      <dsp:txBody>
+        <a:bodyPr spcFirstLastPara="0" vert="horz" wrap="square" lIns="49530" tIns="49530" rIns="49530" bIns="49530" numCol="1" spcCol="1270" anchor="ctr" anchorCtr="0">
+          <a:noAutofit/>
+        </a:bodyPr>
+        <a:lstStyle/>
+        <a:p>
+          <a:pPr marL="0" lvl="0" indent="0" algn="l" defTabSz="577850">
+            <a:lnSpc>
+              <a:spcPct val="90000"/>
+            </a:lnSpc>
+            <a:spcBef>
+              <a:spcPct val="0"/>
+            </a:spcBef>
+            <a:spcAft>
+              <a:spcPct val="35000"/>
+            </a:spcAft>
+            <a:buNone/>
+          </a:pPr>
+          <a:r>
+            <a:rPr lang="en-US" sz="1300" kern="1200"/>
+            <a:t>left will make the element float to the left of its containing element.</a:t>
+          </a:r>
+        </a:p>
+      </dsp:txBody>
+      <dsp:txXfrm>
+        <a:off x="34897" y="1606845"/>
+        <a:ext cx="6184702" cy="645076"/>
+      </dsp:txXfrm>
+    </dsp:sp>
+    <dsp:sp modelId="{1270715D-199A-FE43-A662-E54F6F0EDE3E}">
+      <dsp:nvSpPr>
+        <dsp:cNvPr id="0" name=""/>
+        <dsp:cNvSpPr/>
+      </dsp:nvSpPr>
+      <dsp:spPr>
+        <a:xfrm>
+          <a:off x="0" y="2324258"/>
+          <a:ext cx="6254496" cy="714870"/>
+        </a:xfrm>
+        <a:prstGeom prst="roundRect">
+          <a:avLst/>
+        </a:prstGeom>
+        <a:solidFill>
+          <a:schemeClr val="accent5">
+            <a:hueOff val="-5068907"/>
+            <a:satOff val="-13064"/>
+            <a:lumOff val="-8824"/>
+            <a:alphaOff val="0"/>
+          </a:schemeClr>
+        </a:solidFill>
+        <a:ln w="12700" cap="flat" cmpd="sng" algn="ctr">
+          <a:solidFill>
+            <a:schemeClr val="lt1">
+              <a:hueOff val="0"/>
+              <a:satOff val="0"/>
+              <a:lumOff val="0"/>
+              <a:alphaOff val="0"/>
+            </a:schemeClr>
+          </a:solidFill>
+          <a:prstDash val="solid"/>
+          <a:miter lim="800000"/>
+        </a:ln>
+        <a:effectLst/>
+      </dsp:spPr>
+      <dsp:style>
+        <a:lnRef idx="2">
+          <a:scrgbClr r="0" g="0" b="0"/>
+        </a:lnRef>
+        <a:fillRef idx="1">
+          <a:scrgbClr r="0" g="0" b="0"/>
+        </a:fillRef>
+        <a:effectRef idx="0">
+          <a:scrgbClr r="0" g="0" b="0"/>
+        </a:effectRef>
+        <a:fontRef idx="minor">
+          <a:schemeClr val="lt1"/>
+        </a:fontRef>
+      </dsp:style>
+      <dsp:txBody>
+        <a:bodyPr spcFirstLastPara="0" vert="horz" wrap="square" lIns="49530" tIns="49530" rIns="49530" bIns="49530" numCol="1" spcCol="1270" anchor="ctr" anchorCtr="0">
+          <a:noAutofit/>
+        </a:bodyPr>
+        <a:lstStyle/>
+        <a:p>
+          <a:pPr marL="0" lvl="0" indent="0" algn="l" defTabSz="577850">
+            <a:lnSpc>
+              <a:spcPct val="90000"/>
+            </a:lnSpc>
+            <a:spcBef>
+              <a:spcPct val="0"/>
+            </a:spcBef>
+            <a:spcAft>
+              <a:spcPct val="35000"/>
+            </a:spcAft>
+            <a:buNone/>
+          </a:pPr>
+          <a:r>
+            <a:rPr lang="en-US" sz="1300" kern="1200"/>
+            <a:t>right will make the element float to the right of its containing element.</a:t>
+          </a:r>
+        </a:p>
+      </dsp:txBody>
+      <dsp:txXfrm>
+        <a:off x="34897" y="2359155"/>
+        <a:ext cx="6184702" cy="645076"/>
+      </dsp:txXfrm>
+    </dsp:sp>
+    <dsp:sp modelId="{7647DBA3-19A0-224B-9F51-403E3C3FAE35}">
+      <dsp:nvSpPr>
+        <dsp:cNvPr id="0" name=""/>
+        <dsp:cNvSpPr/>
+      </dsp:nvSpPr>
+      <dsp:spPr>
+        <a:xfrm>
+          <a:off x="0" y="3076569"/>
+          <a:ext cx="6254496" cy="714870"/>
+        </a:xfrm>
+        <a:prstGeom prst="roundRect">
+          <a:avLst/>
+        </a:prstGeom>
+        <a:solidFill>
+          <a:schemeClr val="accent5">
+            <a:hueOff val="-6758543"/>
+            <a:satOff val="-17419"/>
+            <a:lumOff val="-11765"/>
+            <a:alphaOff val="0"/>
+          </a:schemeClr>
+        </a:solidFill>
+        <a:ln w="12700" cap="flat" cmpd="sng" algn="ctr">
+          <a:solidFill>
+            <a:schemeClr val="lt1">
+              <a:hueOff val="0"/>
+              <a:satOff val="0"/>
+              <a:lumOff val="0"/>
+              <a:alphaOff val="0"/>
+            </a:schemeClr>
+          </a:solidFill>
+          <a:prstDash val="solid"/>
+          <a:miter lim="800000"/>
+        </a:ln>
+        <a:effectLst/>
+      </dsp:spPr>
+      <dsp:style>
+        <a:lnRef idx="2">
+          <a:scrgbClr r="0" g="0" b="0"/>
+        </a:lnRef>
+        <a:fillRef idx="1">
+          <a:scrgbClr r="0" g="0" b="0"/>
+        </a:fillRef>
+        <a:effectRef idx="0">
+          <a:scrgbClr r="0" g="0" b="0"/>
+        </a:effectRef>
+        <a:fontRef idx="minor">
+          <a:schemeClr val="lt1"/>
+        </a:fontRef>
+      </dsp:style>
+      <dsp:txBody>
+        <a:bodyPr spcFirstLastPara="0" vert="horz" wrap="square" lIns="49530" tIns="49530" rIns="49530" bIns="49530" numCol="1" spcCol="1270" anchor="ctr" anchorCtr="0">
+          <a:noAutofit/>
+        </a:bodyPr>
+        <a:lstStyle/>
+        <a:p>
+          <a:pPr marL="0" lvl="0" indent="0" algn="l" defTabSz="577850">
+            <a:lnSpc>
+              <a:spcPct val="90000"/>
+            </a:lnSpc>
+            <a:spcBef>
+              <a:spcPct val="0"/>
+            </a:spcBef>
+            <a:spcAft>
+              <a:spcPct val="35000"/>
+            </a:spcAft>
+            <a:buNone/>
+          </a:pPr>
+          <a:r>
+            <a:rPr lang="en-US" sz="1300" kern="1200"/>
+            <a:t>none will make the element not float and be in normal flow</a:t>
+          </a:r>
+        </a:p>
+      </dsp:txBody>
+      <dsp:txXfrm>
+        <a:off x="34897" y="3111466"/>
+        <a:ext cx="6184702" cy="645076"/>
+      </dsp:txXfrm>
+    </dsp:sp>
+  </dsp:spTree>
+</dsp:drawing>
+</file>
+
 <file path=ppt/diagrams/layout1.xml><?xml version="1.0" encoding="utf-8"?>
+<dgm:layoutDef xmlns:dgm="http://schemas.openxmlformats.org/drawingml/2006/diagram" xmlns:a="http://schemas.openxmlformats.org/drawingml/2006/main" uniqueId="urn:microsoft.com/office/officeart/2005/8/layout/vList2">
+  <dgm:title val=""/>
+  <dgm:desc val=""/>
+  <dgm:catLst>
+    <dgm:cat type="list" pri="3000"/>
+    <dgm:cat type="convert" pri="1000"/>
+  </dgm:catLst>
+  <dgm:sampData>
+    <dgm:dataModel>
+      <dgm:ptLst>
+        <dgm:pt modelId="0" type="doc"/>
+        <dgm:pt modelId="1">
+          <dgm:prSet phldr="1"/>
+        </dgm:pt>
+        <dgm:pt modelId="11">
+          <dgm:prSet phldr="1"/>
+        </dgm:pt>
+        <dgm:pt modelId="2">
+          <dgm:prSet phldr="1"/>
+        </dgm:pt>
+        <dgm:pt modelId="21">
+          <dgm:prSet phldr="1"/>
+        </dgm:pt>
+      </dgm:ptLst>
+      <dgm:cxnLst>
+        <dgm:cxn modelId="4" srcId="0" destId="1" srcOrd="0" destOrd="0"/>
+        <dgm:cxn modelId="5" srcId="0" destId="2" srcOrd="1" destOrd="0"/>
+        <dgm:cxn modelId="12" srcId="1" destId="11" srcOrd="0" destOrd="0"/>
+        <dgm:cxn modelId="23" srcId="2" destId="21" srcOrd="0" destOrd="0"/>
+      </dgm:cxnLst>
+      <dgm:bg/>
+      <dgm:whole/>
+    </dgm:dataModel>
+  </dgm:sampData>
+  <dgm:styleData>
+    <dgm:dataModel>
+      <dgm:ptLst>
+        <dgm:pt modelId="0" type="doc"/>
+        <dgm:pt modelId="1"/>
+        <dgm:pt modelId="2"/>
+      </dgm:ptLst>
+      <dgm:cxnLst>
+        <dgm:cxn modelId="3" srcId="0" destId="1" srcOrd="0" destOrd="0"/>
+        <dgm:cxn modelId="4" srcId="0" destId="2" srcOrd="1" destOrd="0"/>
+      </dgm:cxnLst>
+      <dgm:bg/>
+      <dgm:whole/>
+    </dgm:dataModel>
+  </dgm:styleData>
+  <dgm:clrData>
+    <dgm:dataModel>
+      <dgm:ptLst>
+        <dgm:pt modelId="0" type="doc"/>
+        <dgm:pt modelId="1"/>
+        <dgm:pt modelId="2"/>
+        <dgm:pt modelId="3"/>
+        <dgm:pt modelId="4"/>
+      </dgm:ptLst>
+      <dgm:cxnLst>
+        <dgm:cxn modelId="5" srcId="0" destId="1" srcOrd="0" destOrd="0"/>
+        <dgm:cxn modelId="6" srcId="0" destId="2" srcOrd="1" destOrd="0"/>
+        <dgm:cxn modelId="7" srcId="0" destId="3" srcOrd="2" destOrd="0"/>
+        <dgm:cxn modelId="8" srcId="0" destId="4" srcOrd="3" destOrd="0"/>
+      </dgm:cxnLst>
+      <dgm:bg/>
+      <dgm:whole/>
+    </dgm:dataModel>
+  </dgm:clrData>
+  <dgm:layoutNode name="linear">
+    <dgm:varLst>
+      <dgm:animLvl val="lvl"/>
+      <dgm:resizeHandles val="exact"/>
+    </dgm:varLst>
+    <dgm:alg type="lin">
+      <dgm:param type="linDir" val="fromT"/>
+      <dgm:param type="vertAlign" val="mid"/>
+    </dgm:alg>
+    <dgm:shape xmlns:r="http://schemas.openxmlformats.org/officeDocument/2006/relationships" r:blip="">
+      <dgm:adjLst/>
+    </dgm:shape>
+    <dgm:presOf/>
+    <dgm:constrLst>
+      <dgm:constr type="w" for="ch" forName="parentText" refType="w"/>
+      <dgm:constr type="h" for="ch" forName="parentText" refType="primFontSz" refFor="ch" refForName="parentText" fact="0.52"/>
+      <dgm:constr type="w" for="ch" forName="childText" refType="w"/>
+      <dgm:constr type="h" for="ch" forName="childText" refType="primFontSz" refFor="ch" refForName="parentText" fact="0.46"/>
+      <dgm:constr type="h" for="ch" forName="parentText" op="equ"/>
+      <dgm:constr type="primFontSz" for="ch" forName="parentText" op="equ" val="65"/>
+      <dgm:constr type="primFontSz" for="ch" forName="childText" refType="primFontSz" refFor="ch" refForName="parentText" op="equ"/>
+      <dgm:constr type="h" for="ch" forName="spacer" refType="primFontSz" refFor="ch" refForName="parentText" fact="0.08"/>
+    </dgm:constrLst>
+    <dgm:ruleLst>
+      <dgm:rule type="primFontSz" for="ch" forName="parentText" val="5" fact="NaN" max="NaN"/>
+    </dgm:ruleLst>
+    <dgm:forEach name="Name0" axis="ch" ptType="node">
+      <dgm:layoutNode name="parentText" styleLbl="node1">
+        <dgm:varLst>
+          <dgm:chMax val="0"/>
+          <dgm:bulletEnabled val="1"/>
+        </dgm:varLst>
+        <dgm:alg type="tx">
+          <dgm:param type="parTxLTRAlign" val="l"/>
+          <dgm:param type="parTxRTLAlign" val="r"/>
+        </dgm:alg>
+        <dgm:shape xmlns:r="http://schemas.openxmlformats.org/officeDocument/2006/relationships" type="roundRect" r:blip="">
+          <dgm:adjLst/>
+        </dgm:shape>
+        <dgm:presOf axis="self"/>
+        <dgm:constrLst>
+          <dgm:constr type="tMarg" refType="primFontSz" fact="0.3"/>
+          <dgm:constr type="bMarg" refType="primFontSz" fact="0.3"/>
+          <dgm:constr type="lMarg" refType="primFontSz" fact="0.3"/>
+          <dgm:constr type="rMarg" refType="primFontSz" fact="0.3"/>
+        </dgm:constrLst>
+        <dgm:ruleLst>
+          <dgm:rule type="h" val="INF" fact="NaN" max="NaN"/>
+        </dgm:ruleLst>
+      </dgm:layoutNode>
+      <dgm:choose name="Name1">
+        <dgm:if name="Name2" axis="ch" ptType="node" func="cnt" op="gte" val="1">
+          <dgm:layoutNode name="childText" styleLbl="revTx">
+            <dgm:varLst>
+              <dgm:bulletEnabled val="1"/>
+            </dgm:varLst>
+            <dgm:alg type="tx">
+              <dgm:param type="stBulletLvl" val="1"/>
+              <dgm:param type="lnSpAfChP" val="20"/>
+            </dgm:alg>
+            <dgm:shape xmlns:r="http://schemas.openxmlformats.org/officeDocument/2006/relationships" type="rect" r:blip="">
+              <dgm:adjLst/>
+            </dgm:shape>
+            <dgm:presOf axis="des" ptType="node"/>
+            <dgm:constrLst>
+              <dgm:constr type="tMarg" refType="primFontSz" fact="0.1"/>
+              <dgm:constr type="bMarg" refType="primFontSz" fact="0.1"/>
+              <dgm:constr type="lMarg" refType="w" fact="0.09"/>
+            </dgm:constrLst>
+            <dgm:ruleLst>
+              <dgm:rule type="h" val="INF" fact="NaN" max="NaN"/>
+            </dgm:ruleLst>
+          </dgm:layoutNode>
+        </dgm:if>
+        <dgm:else name="Name3">
+          <dgm:choose name="Name4">
+            <dgm:if name="Name5" axis="par ch" ptType="doc node" func="cnt" op="gte" val="2">
+              <dgm:forEach name="Name6" axis="followSib" ptType="sibTrans" cnt="1">
+                <dgm:layoutNode name="spacer">
+                  <dgm:alg type="sp"/>
+                  <dgm:shape xmlns:r="http://schemas.openxmlformats.org/officeDocument/2006/relationships" r:blip="">
+                    <dgm:adjLst/>
+                  </dgm:shape>
+                  <dgm:presOf/>
+                  <dgm:constrLst/>
+                  <dgm:ruleLst/>
+                </dgm:layoutNode>
+              </dgm:forEach>
+            </dgm:if>
+            <dgm:else name="Name7"/>
+          </dgm:choose>
+        </dgm:else>
+      </dgm:choose>
+    </dgm:forEach>
+  </dgm:layoutNode>
+</dgm:layoutDef>
+</file>
+
+<file path=ppt/diagrams/layout2.xml><?xml version="1.0" encoding="utf-8"?>
 <dgm:layoutDef xmlns:dgm="http://schemas.openxmlformats.org/drawingml/2006/diagram" xmlns:a="http://schemas.openxmlformats.org/drawingml/2006/main" uniqueId="urn:microsoft.com/office/officeart/2005/8/layout/vList2">
   <dgm:title val=""/>
   <dgm:desc val=""/>
@@ -2988,6 +4643,1040 @@
 </dgm:styleDef>
 </file>
 
+<file path=ppt/diagrams/quickStyle2.xml><?xml version="1.0" encoding="utf-8"?>
+<dgm:styleDef xmlns:dgm="http://schemas.openxmlformats.org/drawingml/2006/diagram" xmlns:a="http://schemas.openxmlformats.org/drawingml/2006/main" uniqueId="urn:microsoft.com/office/officeart/2005/8/quickstyle/simple1">
+  <dgm:title val=""/>
+  <dgm:desc val=""/>
+  <dgm:catLst>
+    <dgm:cat type="simple" pri="10100"/>
+  </dgm:catLst>
+  <dgm:scene3d>
+    <a:camera prst="orthographicFront"/>
+    <a:lightRig rig="threePt" dir="t"/>
+  </dgm:scene3d>
+  <dgm:styleLbl name="node0">
+    <dgm:scene3d>
+      <a:camera prst="orthographicFront"/>
+      <a:lightRig rig="threePt" dir="t"/>
+    </dgm:scene3d>
+    <dgm:sp3d/>
+    <dgm:txPr/>
+    <dgm:style>
+      <a:lnRef idx="2">
+        <a:scrgbClr r="0" g="0" b="0"/>
+      </a:lnRef>
+      <a:fillRef idx="1">
+        <a:scrgbClr r="0" g="0" b="0"/>
+      </a:fillRef>
+      <a:effectRef idx="0">
+        <a:scrgbClr r="0" g="0" b="0"/>
+      </a:effectRef>
+      <a:fontRef idx="minor">
+        <a:schemeClr val="lt1"/>
+      </a:fontRef>
+    </dgm:style>
+  </dgm:styleLbl>
+  <dgm:styleLbl name="lnNode1">
+    <dgm:scene3d>
+      <a:camera prst="orthographicFront"/>
+      <a:lightRig rig="threePt" dir="t"/>
+    </dgm:scene3d>
+    <dgm:sp3d/>
+    <dgm:txPr/>
+    <dgm:style>
+      <a:lnRef idx="2">
+        <a:scrgbClr r="0" g="0" b="0"/>
+      </a:lnRef>
+      <a:fillRef idx="1">
+        <a:scrgbClr r="0" g="0" b="0"/>
+      </a:fillRef>
+      <a:effectRef idx="0">
+        <a:scrgbClr r="0" g="0" b="0"/>
+      </a:effectRef>
+      <a:fontRef idx="minor">
+        <a:schemeClr val="lt1"/>
+      </a:fontRef>
+    </dgm:style>
+  </dgm:styleLbl>
+  <dgm:styleLbl name="vennNode1">
+    <dgm:scene3d>
+      <a:camera prst="orthographicFront"/>
+      <a:lightRig rig="threePt" dir="t"/>
+    </dgm:scene3d>
+    <dgm:sp3d/>
+    <dgm:txPr/>
+    <dgm:style>
+      <a:lnRef idx="2">
+        <a:scrgbClr r="0" g="0" b="0"/>
+      </a:lnRef>
+      <a:fillRef idx="1">
+        <a:scrgbClr r="0" g="0" b="0"/>
+      </a:fillRef>
+      <a:effectRef idx="0">
+        <a:scrgbClr r="0" g="0" b="0"/>
+      </a:effectRef>
+      <a:fontRef idx="minor">
+        <a:schemeClr val="tx1"/>
+      </a:fontRef>
+    </dgm:style>
+  </dgm:styleLbl>
+  <dgm:styleLbl name="alignNode1">
+    <dgm:scene3d>
+      <a:camera prst="orthographicFront"/>
+      <a:lightRig rig="threePt" dir="t"/>
+    </dgm:scene3d>
+    <dgm:sp3d/>
+    <dgm:txPr/>
+    <dgm:style>
+      <a:lnRef idx="2">
+        <a:scrgbClr r="0" g="0" b="0"/>
+      </a:lnRef>
+      <a:fillRef idx="1">
+        <a:scrgbClr r="0" g="0" b="0"/>
+      </a:fillRef>
+      <a:effectRef idx="0">
+        <a:scrgbClr r="0" g="0" b="0"/>
+      </a:effectRef>
+      <a:fontRef idx="minor">
+        <a:schemeClr val="lt1"/>
+      </a:fontRef>
+    </dgm:style>
+  </dgm:styleLbl>
+  <dgm:styleLbl name="node1">
+    <dgm:scene3d>
+      <a:camera prst="orthographicFront"/>
+      <a:lightRig rig="threePt" dir="t"/>
+    </dgm:scene3d>
+    <dgm:sp3d/>
+    <dgm:txPr/>
+    <dgm:style>
+      <a:lnRef idx="2">
+        <a:scrgbClr r="0" g="0" b="0"/>
+      </a:lnRef>
+      <a:fillRef idx="1">
+        <a:scrgbClr r="0" g="0" b="0"/>
+      </a:fillRef>
+      <a:effectRef idx="0">
+        <a:scrgbClr r="0" g="0" b="0"/>
+      </a:effectRef>
+      <a:fontRef idx="minor">
+        <a:schemeClr val="lt1"/>
+      </a:fontRef>
+    </dgm:style>
+  </dgm:styleLbl>
+  <dgm:styleLbl name="node2">
+    <dgm:scene3d>
+      <a:camera prst="orthographicFront"/>
+      <a:lightRig rig="threePt" dir="t"/>
+    </dgm:scene3d>
+    <dgm:sp3d/>
+    <dgm:txPr/>
+    <dgm:style>
+      <a:lnRef idx="2">
+        <a:scrgbClr r="0" g="0" b="0"/>
+      </a:lnRef>
+      <a:fillRef idx="1">
+        <a:scrgbClr r="0" g="0" b="0"/>
+      </a:fillRef>
+      <a:effectRef idx="0">
+        <a:scrgbClr r="0" g="0" b="0"/>
+      </a:effectRef>
+      <a:fontRef idx="minor">
+        <a:schemeClr val="lt1"/>
+      </a:fontRef>
+    </dgm:style>
+  </dgm:styleLbl>
+  <dgm:styleLbl name="node3">
+    <dgm:scene3d>
+      <a:camera prst="orthographicFront"/>
+      <a:lightRig rig="threePt" dir="t"/>
+    </dgm:scene3d>
+    <dgm:sp3d/>
+    <dgm:txPr/>
+    <dgm:style>
+      <a:lnRef idx="2">
+        <a:scrgbClr r="0" g="0" b="0"/>
+      </a:lnRef>
+      <a:fillRef idx="1">
+        <a:scrgbClr r="0" g="0" b="0"/>
+      </a:fillRef>
+      <a:effectRef idx="0">
+        <a:scrgbClr r="0" g="0" b="0"/>
+      </a:effectRef>
+      <a:fontRef idx="minor">
+        <a:schemeClr val="lt1"/>
+      </a:fontRef>
+    </dgm:style>
+  </dgm:styleLbl>
+  <dgm:styleLbl name="node4">
+    <dgm:scene3d>
+      <a:camera prst="orthographicFront"/>
+      <a:lightRig rig="threePt" dir="t"/>
+    </dgm:scene3d>
+    <dgm:sp3d/>
+    <dgm:txPr/>
+    <dgm:style>
+      <a:lnRef idx="2">
+        <a:scrgbClr r="0" g="0" b="0"/>
+      </a:lnRef>
+      <a:fillRef idx="1">
+        <a:scrgbClr r="0" g="0" b="0"/>
+      </a:fillRef>
+      <a:effectRef idx="0">
+        <a:scrgbClr r="0" g="0" b="0"/>
+      </a:effectRef>
+      <a:fontRef idx="minor">
+        <a:schemeClr val="lt1"/>
+      </a:fontRef>
+    </dgm:style>
+  </dgm:styleLbl>
+  <dgm:styleLbl name="fgImgPlace1">
+    <dgm:scene3d>
+      <a:camera prst="orthographicFront"/>
+      <a:lightRig rig="threePt" dir="t"/>
+    </dgm:scene3d>
+    <dgm:sp3d/>
+    <dgm:txPr/>
+    <dgm:style>
+      <a:lnRef idx="2">
+        <a:scrgbClr r="0" g="0" b="0"/>
+      </a:lnRef>
+      <a:fillRef idx="1">
+        <a:scrgbClr r="0" g="0" b="0"/>
+      </a:fillRef>
+      <a:effectRef idx="0">
+        <a:scrgbClr r="0" g="0" b="0"/>
+      </a:effectRef>
+      <a:fontRef idx="minor"/>
+    </dgm:style>
+  </dgm:styleLbl>
+  <dgm:styleLbl name="alignImgPlace1">
+    <dgm:scene3d>
+      <a:camera prst="orthographicFront"/>
+      <a:lightRig rig="threePt" dir="t"/>
+    </dgm:scene3d>
+    <dgm:sp3d/>
+    <dgm:txPr/>
+    <dgm:style>
+      <a:lnRef idx="2">
+        <a:scrgbClr r="0" g="0" b="0"/>
+      </a:lnRef>
+      <a:fillRef idx="1">
+        <a:scrgbClr r="0" g="0" b="0"/>
+      </a:fillRef>
+      <a:effectRef idx="0">
+        <a:scrgbClr r="0" g="0" b="0"/>
+      </a:effectRef>
+      <a:fontRef idx="minor"/>
+    </dgm:style>
+  </dgm:styleLbl>
+  <dgm:styleLbl name="bgImgPlace1">
+    <dgm:scene3d>
+      <a:camera prst="orthographicFront"/>
+      <a:lightRig rig="threePt" dir="t"/>
+    </dgm:scene3d>
+    <dgm:sp3d/>
+    <dgm:txPr/>
+    <dgm:style>
+      <a:lnRef idx="2">
+        <a:scrgbClr r="0" g="0" b="0"/>
+      </a:lnRef>
+      <a:fillRef idx="1">
+        <a:scrgbClr r="0" g="0" b="0"/>
+      </a:fillRef>
+      <a:effectRef idx="0">
+        <a:scrgbClr r="0" g="0" b="0"/>
+      </a:effectRef>
+      <a:fontRef idx="minor"/>
+    </dgm:style>
+  </dgm:styleLbl>
+  <dgm:styleLbl name="sibTrans2D1">
+    <dgm:scene3d>
+      <a:camera prst="orthographicFront"/>
+      <a:lightRig rig="threePt" dir="t"/>
+    </dgm:scene3d>
+    <dgm:sp3d/>
+    <dgm:txPr/>
+    <dgm:style>
+      <a:lnRef idx="0">
+        <a:scrgbClr r="0" g="0" b="0"/>
+      </a:lnRef>
+      <a:fillRef idx="1">
+        <a:scrgbClr r="0" g="0" b="0"/>
+      </a:fillRef>
+      <a:effectRef idx="0">
+        <a:scrgbClr r="0" g="0" b="0"/>
+      </a:effectRef>
+      <a:fontRef idx="minor">
+        <a:schemeClr val="lt1"/>
+      </a:fontRef>
+    </dgm:style>
+  </dgm:styleLbl>
+  <dgm:styleLbl name="fgSibTrans2D1">
+    <dgm:scene3d>
+      <a:camera prst="orthographicFront"/>
+      <a:lightRig rig="threePt" dir="t"/>
+    </dgm:scene3d>
+    <dgm:sp3d/>
+    <dgm:txPr/>
+    <dgm:style>
+      <a:lnRef idx="0">
+        <a:scrgbClr r="0" g="0" b="0"/>
+      </a:lnRef>
+      <a:fillRef idx="1">
+        <a:scrgbClr r="0" g="0" b="0"/>
+      </a:fillRef>
+      <a:effectRef idx="0">
+        <a:scrgbClr r="0" g="0" b="0"/>
+      </a:effectRef>
+      <a:fontRef idx="minor">
+        <a:schemeClr val="lt1"/>
+      </a:fontRef>
+    </dgm:style>
+  </dgm:styleLbl>
+  <dgm:styleLbl name="bgSibTrans2D1">
+    <dgm:scene3d>
+      <a:camera prst="orthographicFront"/>
+      <a:lightRig rig="threePt" dir="t"/>
+    </dgm:scene3d>
+    <dgm:sp3d/>
+    <dgm:txPr/>
+    <dgm:style>
+      <a:lnRef idx="0">
+        <a:scrgbClr r="0" g="0" b="0"/>
+      </a:lnRef>
+      <a:fillRef idx="1">
+        <a:scrgbClr r="0" g="0" b="0"/>
+      </a:fillRef>
+      <a:effectRef idx="0">
+        <a:scrgbClr r="0" g="0" b="0"/>
+      </a:effectRef>
+      <a:fontRef idx="minor">
+        <a:schemeClr val="lt1"/>
+      </a:fontRef>
+    </dgm:style>
+  </dgm:styleLbl>
+  <dgm:styleLbl name="sibTrans1D1">
+    <dgm:scene3d>
+      <a:camera prst="orthographicFront"/>
+      <a:lightRig rig="threePt" dir="t"/>
+    </dgm:scene3d>
+    <dgm:sp3d/>
+    <dgm:txPr/>
+    <dgm:style>
+      <a:lnRef idx="1">
+        <a:scrgbClr r="0" g="0" b="0"/>
+      </a:lnRef>
+      <a:fillRef idx="0">
+        <a:scrgbClr r="0" g="0" b="0"/>
+      </a:fillRef>
+      <a:effectRef idx="0">
+        <a:scrgbClr r="0" g="0" b="0"/>
+      </a:effectRef>
+      <a:fontRef idx="minor"/>
+    </dgm:style>
+  </dgm:styleLbl>
+  <dgm:styleLbl name="callout">
+    <dgm:scene3d>
+      <a:camera prst="orthographicFront"/>
+      <a:lightRig rig="threePt" dir="t"/>
+    </dgm:scene3d>
+    <dgm:sp3d/>
+    <dgm:txPr/>
+    <dgm:style>
+      <a:lnRef idx="2">
+        <a:scrgbClr r="0" g="0" b="0"/>
+      </a:lnRef>
+      <a:fillRef idx="1">
+        <a:scrgbClr r="0" g="0" b="0"/>
+      </a:fillRef>
+      <a:effectRef idx="0">
+        <a:scrgbClr r="0" g="0" b="0"/>
+      </a:effectRef>
+      <a:fontRef idx="minor"/>
+    </dgm:style>
+  </dgm:styleLbl>
+  <dgm:styleLbl name="asst0">
+    <dgm:scene3d>
+      <a:camera prst="orthographicFront"/>
+      <a:lightRig rig="threePt" dir="t"/>
+    </dgm:scene3d>
+    <dgm:sp3d/>
+    <dgm:txPr/>
+    <dgm:style>
+      <a:lnRef idx="2">
+        <a:scrgbClr r="0" g="0" b="0"/>
+      </a:lnRef>
+      <a:fillRef idx="1">
+        <a:scrgbClr r="0" g="0" b="0"/>
+      </a:fillRef>
+      <a:effectRef idx="0">
+        <a:scrgbClr r="0" g="0" b="0"/>
+      </a:effectRef>
+      <a:fontRef idx="minor">
+        <a:schemeClr val="lt1"/>
+      </a:fontRef>
+    </dgm:style>
+  </dgm:styleLbl>
+  <dgm:styleLbl name="asst1">
+    <dgm:scene3d>
+      <a:camera prst="orthographicFront"/>
+      <a:lightRig rig="threePt" dir="t"/>
+    </dgm:scene3d>
+    <dgm:sp3d/>
+    <dgm:txPr/>
+    <dgm:style>
+      <a:lnRef idx="2">
+        <a:scrgbClr r="0" g="0" b="0"/>
+      </a:lnRef>
+      <a:fillRef idx="1">
+        <a:scrgbClr r="0" g="0" b="0"/>
+      </a:fillRef>
+      <a:effectRef idx="0">
+        <a:scrgbClr r="0" g="0" b="0"/>
+      </a:effectRef>
+      <a:fontRef idx="minor">
+        <a:schemeClr val="lt1"/>
+      </a:fontRef>
+    </dgm:style>
+  </dgm:styleLbl>
+  <dgm:styleLbl name="asst2">
+    <dgm:scene3d>
+      <a:camera prst="orthographicFront"/>
+      <a:lightRig rig="threePt" dir="t"/>
+    </dgm:scene3d>
+    <dgm:sp3d/>
+    <dgm:txPr/>
+    <dgm:style>
+      <a:lnRef idx="2">
+        <a:scrgbClr r="0" g="0" b="0"/>
+      </a:lnRef>
+      <a:fillRef idx="1">
+        <a:scrgbClr r="0" g="0" b="0"/>
+      </a:fillRef>
+      <a:effectRef idx="0">
+        <a:scrgbClr r="0" g="0" b="0"/>
+      </a:effectRef>
+      <a:fontRef idx="minor">
+        <a:schemeClr val="lt1"/>
+      </a:fontRef>
+    </dgm:style>
+  </dgm:styleLbl>
+  <dgm:styleLbl name="asst3">
+    <dgm:scene3d>
+      <a:camera prst="orthographicFront"/>
+      <a:lightRig rig="threePt" dir="t"/>
+    </dgm:scene3d>
+    <dgm:sp3d/>
+    <dgm:txPr/>
+    <dgm:style>
+      <a:lnRef idx="2">
+        <a:scrgbClr r="0" g="0" b="0"/>
+      </a:lnRef>
+      <a:fillRef idx="1">
+        <a:scrgbClr r="0" g="0" b="0"/>
+      </a:fillRef>
+      <a:effectRef idx="0">
+        <a:scrgbClr r="0" g="0" b="0"/>
+      </a:effectRef>
+      <a:fontRef idx="minor">
+        <a:schemeClr val="lt1"/>
+      </a:fontRef>
+    </dgm:style>
+  </dgm:styleLbl>
+  <dgm:styleLbl name="asst4">
+    <dgm:scene3d>
+      <a:camera prst="orthographicFront"/>
+      <a:lightRig rig="threePt" dir="t"/>
+    </dgm:scene3d>
+    <dgm:sp3d/>
+    <dgm:txPr/>
+    <dgm:style>
+      <a:lnRef idx="2">
+        <a:scrgbClr r="0" g="0" b="0"/>
+      </a:lnRef>
+      <a:fillRef idx="1">
+        <a:scrgbClr r="0" g="0" b="0"/>
+      </a:fillRef>
+      <a:effectRef idx="0">
+        <a:scrgbClr r="0" g="0" b="0"/>
+      </a:effectRef>
+      <a:fontRef idx="minor">
+        <a:schemeClr val="lt1"/>
+      </a:fontRef>
+    </dgm:style>
+  </dgm:styleLbl>
+  <dgm:styleLbl name="parChTrans2D1">
+    <dgm:scene3d>
+      <a:camera prst="orthographicFront"/>
+      <a:lightRig rig="threePt" dir="t"/>
+    </dgm:scene3d>
+    <dgm:sp3d/>
+    <dgm:txPr/>
+    <dgm:style>
+      <a:lnRef idx="2">
+        <a:scrgbClr r="0" g="0" b="0"/>
+      </a:lnRef>
+      <a:fillRef idx="1">
+        <a:scrgbClr r="0" g="0" b="0"/>
+      </a:fillRef>
+      <a:effectRef idx="0">
+        <a:scrgbClr r="0" g="0" b="0"/>
+      </a:effectRef>
+      <a:fontRef idx="minor">
+        <a:schemeClr val="lt1"/>
+      </a:fontRef>
+    </dgm:style>
+  </dgm:styleLbl>
+  <dgm:styleLbl name="parChTrans2D2">
+    <dgm:scene3d>
+      <a:camera prst="orthographicFront"/>
+      <a:lightRig rig="threePt" dir="t"/>
+    </dgm:scene3d>
+    <dgm:sp3d/>
+    <dgm:txPr/>
+    <dgm:style>
+      <a:lnRef idx="2">
+        <a:scrgbClr r="0" g="0" b="0"/>
+      </a:lnRef>
+      <a:fillRef idx="1">
+        <a:scrgbClr r="0" g="0" b="0"/>
+      </a:fillRef>
+      <a:effectRef idx="0">
+        <a:scrgbClr r="0" g="0" b="0"/>
+      </a:effectRef>
+      <a:fontRef idx="minor">
+        <a:schemeClr val="lt1"/>
+      </a:fontRef>
+    </dgm:style>
+  </dgm:styleLbl>
+  <dgm:styleLbl name="parChTrans2D3">
+    <dgm:scene3d>
+      <a:camera prst="orthographicFront"/>
+      <a:lightRig rig="threePt" dir="t"/>
+    </dgm:scene3d>
+    <dgm:sp3d/>
+    <dgm:txPr/>
+    <dgm:style>
+      <a:lnRef idx="2">
+        <a:scrgbClr r="0" g="0" b="0"/>
+      </a:lnRef>
+      <a:fillRef idx="1">
+        <a:scrgbClr r="0" g="0" b="0"/>
+      </a:fillRef>
+      <a:effectRef idx="0">
+        <a:scrgbClr r="0" g="0" b="0"/>
+      </a:effectRef>
+      <a:fontRef idx="minor">
+        <a:schemeClr val="lt1"/>
+      </a:fontRef>
+    </dgm:style>
+  </dgm:styleLbl>
+  <dgm:styleLbl name="parChTrans2D4">
+    <dgm:scene3d>
+      <a:camera prst="orthographicFront"/>
+      <a:lightRig rig="threePt" dir="t"/>
+    </dgm:scene3d>
+    <dgm:sp3d/>
+    <dgm:txPr/>
+    <dgm:style>
+      <a:lnRef idx="2">
+        <a:scrgbClr r="0" g="0" b="0"/>
+      </a:lnRef>
+      <a:fillRef idx="1">
+        <a:scrgbClr r="0" g="0" b="0"/>
+      </a:fillRef>
+      <a:effectRef idx="0">
+        <a:scrgbClr r="0" g="0" b="0"/>
+      </a:effectRef>
+      <a:fontRef idx="minor">
+        <a:schemeClr val="lt1"/>
+      </a:fontRef>
+    </dgm:style>
+  </dgm:styleLbl>
+  <dgm:styleLbl name="parChTrans1D1">
+    <dgm:scene3d>
+      <a:camera prst="orthographicFront"/>
+      <a:lightRig rig="threePt" dir="t"/>
+    </dgm:scene3d>
+    <dgm:sp3d/>
+    <dgm:txPr/>
+    <dgm:style>
+      <a:lnRef idx="2">
+        <a:scrgbClr r="0" g="0" b="0"/>
+      </a:lnRef>
+      <a:fillRef idx="0">
+        <a:scrgbClr r="0" g="0" b="0"/>
+      </a:fillRef>
+      <a:effectRef idx="0">
+        <a:scrgbClr r="0" g="0" b="0"/>
+      </a:effectRef>
+      <a:fontRef idx="minor"/>
+    </dgm:style>
+  </dgm:styleLbl>
+  <dgm:styleLbl name="parChTrans1D2">
+    <dgm:scene3d>
+      <a:camera prst="orthographicFront"/>
+      <a:lightRig rig="threePt" dir="t"/>
+    </dgm:scene3d>
+    <dgm:sp3d/>
+    <dgm:txPr/>
+    <dgm:style>
+      <a:lnRef idx="2">
+        <a:scrgbClr r="0" g="0" b="0"/>
+      </a:lnRef>
+      <a:fillRef idx="0">
+        <a:scrgbClr r="0" g="0" b="0"/>
+      </a:fillRef>
+      <a:effectRef idx="0">
+        <a:scrgbClr r="0" g="0" b="0"/>
+      </a:effectRef>
+      <a:fontRef idx="minor"/>
+    </dgm:style>
+  </dgm:styleLbl>
+  <dgm:styleLbl name="parChTrans1D3">
+    <dgm:scene3d>
+      <a:camera prst="orthographicFront"/>
+      <a:lightRig rig="threePt" dir="t"/>
+    </dgm:scene3d>
+    <dgm:sp3d/>
+    <dgm:txPr/>
+    <dgm:style>
+      <a:lnRef idx="2">
+        <a:scrgbClr r="0" g="0" b="0"/>
+      </a:lnRef>
+      <a:fillRef idx="0">
+        <a:scrgbClr r="0" g="0" b="0"/>
+      </a:fillRef>
+      <a:effectRef idx="0">
+        <a:scrgbClr r="0" g="0" b="0"/>
+      </a:effectRef>
+      <a:fontRef idx="minor"/>
+    </dgm:style>
+  </dgm:styleLbl>
+  <dgm:styleLbl name="parChTrans1D4">
+    <dgm:scene3d>
+      <a:camera prst="orthographicFront"/>
+      <a:lightRig rig="threePt" dir="t"/>
+    </dgm:scene3d>
+    <dgm:sp3d/>
+    <dgm:txPr/>
+    <dgm:style>
+      <a:lnRef idx="2">
+        <a:scrgbClr r="0" g="0" b="0"/>
+      </a:lnRef>
+      <a:fillRef idx="0">
+        <a:scrgbClr r="0" g="0" b="0"/>
+      </a:fillRef>
+      <a:effectRef idx="0">
+        <a:scrgbClr r="0" g="0" b="0"/>
+      </a:effectRef>
+      <a:fontRef idx="minor"/>
+    </dgm:style>
+  </dgm:styleLbl>
+  <dgm:styleLbl name="fgAcc1">
+    <dgm:scene3d>
+      <a:camera prst="orthographicFront"/>
+      <a:lightRig rig="threePt" dir="t"/>
+    </dgm:scene3d>
+    <dgm:sp3d/>
+    <dgm:txPr/>
+    <dgm:style>
+      <a:lnRef idx="2">
+        <a:scrgbClr r="0" g="0" b="0"/>
+      </a:lnRef>
+      <a:fillRef idx="1">
+        <a:scrgbClr r="0" g="0" b="0"/>
+      </a:fillRef>
+      <a:effectRef idx="0">
+        <a:scrgbClr r="0" g="0" b="0"/>
+      </a:effectRef>
+      <a:fontRef idx="minor"/>
+    </dgm:style>
+  </dgm:styleLbl>
+  <dgm:styleLbl name="conFgAcc1">
+    <dgm:scene3d>
+      <a:camera prst="orthographicFront"/>
+      <a:lightRig rig="threePt" dir="t"/>
+    </dgm:scene3d>
+    <dgm:sp3d/>
+    <dgm:txPr/>
+    <dgm:style>
+      <a:lnRef idx="2">
+        <a:scrgbClr r="0" g="0" b="0"/>
+      </a:lnRef>
+      <a:fillRef idx="1">
+        <a:scrgbClr r="0" g="0" b="0"/>
+      </a:fillRef>
+      <a:effectRef idx="0">
+        <a:scrgbClr r="0" g="0" b="0"/>
+      </a:effectRef>
+      <a:fontRef idx="minor"/>
+    </dgm:style>
+  </dgm:styleLbl>
+  <dgm:styleLbl name="alignAcc1">
+    <dgm:scene3d>
+      <a:camera prst="orthographicFront"/>
+      <a:lightRig rig="threePt" dir="t"/>
+    </dgm:scene3d>
+    <dgm:sp3d/>
+    <dgm:txPr/>
+    <dgm:style>
+      <a:lnRef idx="2">
+        <a:scrgbClr r="0" g="0" b="0"/>
+      </a:lnRef>
+      <a:fillRef idx="1">
+        <a:scrgbClr r="0" g="0" b="0"/>
+      </a:fillRef>
+      <a:effectRef idx="0">
+        <a:scrgbClr r="0" g="0" b="0"/>
+      </a:effectRef>
+      <a:fontRef idx="minor"/>
+    </dgm:style>
+  </dgm:styleLbl>
+  <dgm:styleLbl name="trAlignAcc1">
+    <dgm:scene3d>
+      <a:camera prst="orthographicFront"/>
+      <a:lightRig rig="threePt" dir="t"/>
+    </dgm:scene3d>
+    <dgm:sp3d/>
+    <dgm:txPr/>
+    <dgm:style>
+      <a:lnRef idx="1">
+        <a:scrgbClr r="0" g="0" b="0"/>
+      </a:lnRef>
+      <a:fillRef idx="1">
+        <a:scrgbClr r="0" g="0" b="0"/>
+      </a:fillRef>
+      <a:effectRef idx="0">
+        <a:scrgbClr r="0" g="0" b="0"/>
+      </a:effectRef>
+      <a:fontRef idx="minor"/>
+    </dgm:style>
+  </dgm:styleLbl>
+  <dgm:styleLbl name="bgAcc1">
+    <dgm:scene3d>
+      <a:camera prst="orthographicFront"/>
+      <a:lightRig rig="threePt" dir="t"/>
+    </dgm:scene3d>
+    <dgm:sp3d/>
+    <dgm:txPr/>
+    <dgm:style>
+      <a:lnRef idx="2">
+        <a:scrgbClr r="0" g="0" b="0"/>
+      </a:lnRef>
+      <a:fillRef idx="1">
+        <a:scrgbClr r="0" g="0" b="0"/>
+      </a:fillRef>
+      <a:effectRef idx="0">
+        <a:scrgbClr r="0" g="0" b="0"/>
+      </a:effectRef>
+      <a:fontRef idx="minor"/>
+    </dgm:style>
+  </dgm:styleLbl>
+  <dgm:styleLbl name="solidFgAcc1">
+    <dgm:scene3d>
+      <a:camera prst="orthographicFront"/>
+      <a:lightRig rig="threePt" dir="t"/>
+    </dgm:scene3d>
+    <dgm:sp3d/>
+    <dgm:txPr/>
+    <dgm:style>
+      <a:lnRef idx="2">
+        <a:scrgbClr r="0" g="0" b="0"/>
+      </a:lnRef>
+      <a:fillRef idx="1">
+        <a:scrgbClr r="0" g="0" b="0"/>
+      </a:fillRef>
+      <a:effectRef idx="0">
+        <a:scrgbClr r="0" g="0" b="0"/>
+      </a:effectRef>
+      <a:fontRef idx="minor"/>
+    </dgm:style>
+  </dgm:styleLbl>
+  <dgm:styleLbl name="solidAlignAcc1">
+    <dgm:scene3d>
+      <a:camera prst="orthographicFront"/>
+      <a:lightRig rig="threePt" dir="t"/>
+    </dgm:scene3d>
+    <dgm:sp3d/>
+    <dgm:txPr/>
+    <dgm:style>
+      <a:lnRef idx="2">
+        <a:scrgbClr r="0" g="0" b="0"/>
+      </a:lnRef>
+      <a:fillRef idx="1">
+        <a:scrgbClr r="0" g="0" b="0"/>
+      </a:fillRef>
+      <a:effectRef idx="0">
+        <a:scrgbClr r="0" g="0" b="0"/>
+      </a:effectRef>
+      <a:fontRef idx="minor"/>
+    </dgm:style>
+  </dgm:styleLbl>
+  <dgm:styleLbl name="solidBgAcc1">
+    <dgm:scene3d>
+      <a:camera prst="orthographicFront"/>
+      <a:lightRig rig="threePt" dir="t"/>
+    </dgm:scene3d>
+    <dgm:sp3d/>
+    <dgm:txPr/>
+    <dgm:style>
+      <a:lnRef idx="2">
+        <a:scrgbClr r="0" g="0" b="0"/>
+      </a:lnRef>
+      <a:fillRef idx="1">
+        <a:scrgbClr r="0" g="0" b="0"/>
+      </a:fillRef>
+      <a:effectRef idx="0">
+        <a:scrgbClr r="0" g="0" b="0"/>
+      </a:effectRef>
+      <a:fontRef idx="minor"/>
+    </dgm:style>
+  </dgm:styleLbl>
+  <dgm:styleLbl name="fgAccFollowNode1">
+    <dgm:scene3d>
+      <a:camera prst="orthographicFront"/>
+      <a:lightRig rig="threePt" dir="t"/>
+    </dgm:scene3d>
+    <dgm:sp3d/>
+    <dgm:txPr/>
+    <dgm:style>
+      <a:lnRef idx="2">
+        <a:scrgbClr r="0" g="0" b="0"/>
+      </a:lnRef>
+      <a:fillRef idx="1">
+        <a:scrgbClr r="0" g="0" b="0"/>
+      </a:fillRef>
+      <a:effectRef idx="0">
+        <a:scrgbClr r="0" g="0" b="0"/>
+      </a:effectRef>
+      <a:fontRef idx="minor"/>
+    </dgm:style>
+  </dgm:styleLbl>
+  <dgm:styleLbl name="alignAccFollowNode1">
+    <dgm:scene3d>
+      <a:camera prst="orthographicFront"/>
+      <a:lightRig rig="threePt" dir="t"/>
+    </dgm:scene3d>
+    <dgm:sp3d/>
+    <dgm:txPr/>
+    <dgm:style>
+      <a:lnRef idx="2">
+        <a:scrgbClr r="0" g="0" b="0"/>
+      </a:lnRef>
+      <a:fillRef idx="1">
+        <a:scrgbClr r="0" g="0" b="0"/>
+      </a:fillRef>
+      <a:effectRef idx="0">
+        <a:scrgbClr r="0" g="0" b="0"/>
+      </a:effectRef>
+      <a:fontRef idx="minor"/>
+    </dgm:style>
+  </dgm:styleLbl>
+  <dgm:styleLbl name="bgAccFollowNode1">
+    <dgm:scene3d>
+      <a:camera prst="orthographicFront"/>
+      <a:lightRig rig="threePt" dir="t"/>
+    </dgm:scene3d>
+    <dgm:sp3d/>
+    <dgm:txPr/>
+    <dgm:style>
+      <a:lnRef idx="2">
+        <a:scrgbClr r="0" g="0" b="0"/>
+      </a:lnRef>
+      <a:fillRef idx="1">
+        <a:scrgbClr r="0" g="0" b="0"/>
+      </a:fillRef>
+      <a:effectRef idx="0">
+        <a:scrgbClr r="0" g="0" b="0"/>
+      </a:effectRef>
+      <a:fontRef idx="minor"/>
+    </dgm:style>
+  </dgm:styleLbl>
+  <dgm:styleLbl name="fgAcc0">
+    <dgm:scene3d>
+      <a:camera prst="orthographicFront"/>
+      <a:lightRig rig="threePt" dir="t"/>
+    </dgm:scene3d>
+    <dgm:sp3d/>
+    <dgm:txPr/>
+    <dgm:style>
+      <a:lnRef idx="2">
+        <a:scrgbClr r="0" g="0" b="0"/>
+      </a:lnRef>
+      <a:fillRef idx="1">
+        <a:scrgbClr r="0" g="0" b="0"/>
+      </a:fillRef>
+      <a:effectRef idx="0">
+        <a:scrgbClr r="0" g="0" b="0"/>
+      </a:effectRef>
+      <a:fontRef idx="minor"/>
+    </dgm:style>
+  </dgm:styleLbl>
+  <dgm:styleLbl name="fgAcc2">
+    <dgm:scene3d>
+      <a:camera prst="orthographicFront"/>
+      <a:lightRig rig="threePt" dir="t"/>
+    </dgm:scene3d>
+    <dgm:sp3d/>
+    <dgm:txPr/>
+    <dgm:style>
+      <a:lnRef idx="2">
+        <a:scrgbClr r="0" g="0" b="0"/>
+      </a:lnRef>
+      <a:fillRef idx="1">
+        <a:scrgbClr r="0" g="0" b="0"/>
+      </a:fillRef>
+      <a:effectRef idx="0">
+        <a:scrgbClr r="0" g="0" b="0"/>
+      </a:effectRef>
+      <a:fontRef idx="minor"/>
+    </dgm:style>
+  </dgm:styleLbl>
+  <dgm:styleLbl name="fgAcc3">
+    <dgm:scene3d>
+      <a:camera prst="orthographicFront"/>
+      <a:lightRig rig="threePt" dir="t"/>
+    </dgm:scene3d>
+    <dgm:sp3d/>
+    <dgm:txPr/>
+    <dgm:style>
+      <a:lnRef idx="2">
+        <a:scrgbClr r="0" g="0" b="0"/>
+      </a:lnRef>
+      <a:fillRef idx="1">
+        <a:scrgbClr r="0" g="0" b="0"/>
+      </a:fillRef>
+      <a:effectRef idx="0">
+        <a:scrgbClr r="0" g="0" b="0"/>
+      </a:effectRef>
+      <a:fontRef idx="minor"/>
+    </dgm:style>
+  </dgm:styleLbl>
+  <dgm:styleLbl name="fgAcc4">
+    <dgm:scene3d>
+      <a:camera prst="orthographicFront"/>
+      <a:lightRig rig="threePt" dir="t"/>
+    </dgm:scene3d>
+    <dgm:sp3d/>
+    <dgm:txPr/>
+    <dgm:style>
+      <a:lnRef idx="2">
+        <a:scrgbClr r="0" g="0" b="0"/>
+      </a:lnRef>
+      <a:fillRef idx="1">
+        <a:scrgbClr r="0" g="0" b="0"/>
+      </a:fillRef>
+      <a:effectRef idx="0">
+        <a:scrgbClr r="0" g="0" b="0"/>
+      </a:effectRef>
+      <a:fontRef idx="minor"/>
+    </dgm:style>
+  </dgm:styleLbl>
+  <dgm:styleLbl name="bgShp">
+    <dgm:scene3d>
+      <a:camera prst="orthographicFront"/>
+      <a:lightRig rig="threePt" dir="t"/>
+    </dgm:scene3d>
+    <dgm:sp3d/>
+    <dgm:txPr/>
+    <dgm:style>
+      <a:lnRef idx="0">
+        <a:scrgbClr r="0" g="0" b="0"/>
+      </a:lnRef>
+      <a:fillRef idx="1">
+        <a:scrgbClr r="0" g="0" b="0"/>
+      </a:fillRef>
+      <a:effectRef idx="0">
+        <a:scrgbClr r="0" g="0" b="0"/>
+      </a:effectRef>
+      <a:fontRef idx="minor"/>
+    </dgm:style>
+  </dgm:styleLbl>
+  <dgm:styleLbl name="dkBgShp">
+    <dgm:scene3d>
+      <a:camera prst="orthographicFront"/>
+      <a:lightRig rig="threePt" dir="t"/>
+    </dgm:scene3d>
+    <dgm:sp3d/>
+    <dgm:txPr/>
+    <dgm:style>
+      <a:lnRef idx="0">
+        <a:scrgbClr r="0" g="0" b="0"/>
+      </a:lnRef>
+      <a:fillRef idx="1">
+        <a:scrgbClr r="0" g="0" b="0"/>
+      </a:fillRef>
+      <a:effectRef idx="0">
+        <a:scrgbClr r="0" g="0" b="0"/>
+      </a:effectRef>
+      <a:fontRef idx="minor"/>
+    </dgm:style>
+  </dgm:styleLbl>
+  <dgm:styleLbl name="trBgShp">
+    <dgm:scene3d>
+      <a:camera prst="orthographicFront"/>
+      <a:lightRig rig="threePt" dir="t"/>
+    </dgm:scene3d>
+    <dgm:sp3d/>
+    <dgm:txPr/>
+    <dgm:style>
+      <a:lnRef idx="0">
+        <a:scrgbClr r="0" g="0" b="0"/>
+      </a:lnRef>
+      <a:fillRef idx="1">
+        <a:scrgbClr r="0" g="0" b="0"/>
+      </a:fillRef>
+      <a:effectRef idx="0">
+        <a:scrgbClr r="0" g="0" b="0"/>
+      </a:effectRef>
+      <a:fontRef idx="minor"/>
+    </dgm:style>
+  </dgm:styleLbl>
+  <dgm:styleLbl name="fgShp">
+    <dgm:scene3d>
+      <a:camera prst="orthographicFront"/>
+      <a:lightRig rig="threePt" dir="t"/>
+    </dgm:scene3d>
+    <dgm:sp3d/>
+    <dgm:txPr/>
+    <dgm:style>
+      <a:lnRef idx="2">
+        <a:scrgbClr r="0" g="0" b="0"/>
+      </a:lnRef>
+      <a:fillRef idx="1">
+        <a:scrgbClr r="0" g="0" b="0"/>
+      </a:fillRef>
+      <a:effectRef idx="0">
+        <a:scrgbClr r="0" g="0" b="0"/>
+      </a:effectRef>
+      <a:fontRef idx="minor"/>
+    </dgm:style>
+  </dgm:styleLbl>
+  <dgm:styleLbl name="revTx">
+    <dgm:scene3d>
+      <a:camera prst="orthographicFront"/>
+      <a:lightRig rig="threePt" dir="t"/>
+    </dgm:scene3d>
+    <dgm:sp3d/>
+    <dgm:txPr/>
+    <dgm:style>
+      <a:lnRef idx="0">
+        <a:scrgbClr r="0" g="0" b="0"/>
+      </a:lnRef>
+      <a:fillRef idx="0">
+        <a:scrgbClr r="0" g="0" b="0"/>
+      </a:fillRef>
+      <a:effectRef idx="0">
+        <a:scrgbClr r="0" g="0" b="0"/>
+      </a:effectRef>
+      <a:fontRef idx="minor"/>
+    </dgm:style>
+  </dgm:styleLbl>
+</dgm:styleDef>
+</file>
+
 <file path=ppt/slideLayouts/slideLayout1.xml><?xml version="1.0" encoding="utf-8"?>
 <p:sldLayout xmlns:a="http://schemas.openxmlformats.org/drawingml/2006/main" xmlns:r="http://schemas.openxmlformats.org/officeDocument/2006/relationships" xmlns:p="http://schemas.openxmlformats.org/presentationml/2006/main" type="title" preserve="1">
   <p:cSld name="Title Slide">
@@ -3137,7 +5826,7 @@
           <a:p>
             <a:fld id="{E0C858BD-AA26-3249-9D78-E68179219554}" type="datetimeFigureOut">
               <a:rPr lang="en-IL" smtClean="0"/>
-              <a:t>15/01/2023</a:t>
+              <a:t>18/01/2023</a:t>
             </a:fld>
             <a:endParaRPr lang="en-IL"/>
           </a:p>
@@ -3337,7 +6026,7 @@
           <a:p>
             <a:fld id="{E0C858BD-AA26-3249-9D78-E68179219554}" type="datetimeFigureOut">
               <a:rPr lang="en-IL" smtClean="0"/>
-              <a:t>15/01/2023</a:t>
+              <a:t>18/01/2023</a:t>
             </a:fld>
             <a:endParaRPr lang="en-IL"/>
           </a:p>
@@ -3547,7 +6236,7 @@
           <a:p>
             <a:fld id="{E0C858BD-AA26-3249-9D78-E68179219554}" type="datetimeFigureOut">
               <a:rPr lang="en-IL" smtClean="0"/>
-              <a:t>15/01/2023</a:t>
+              <a:t>18/01/2023</a:t>
             </a:fld>
             <a:endParaRPr lang="en-IL"/>
           </a:p>
@@ -3747,7 +6436,7 @@
           <a:p>
             <a:fld id="{E0C858BD-AA26-3249-9D78-E68179219554}" type="datetimeFigureOut">
               <a:rPr lang="en-IL" smtClean="0"/>
-              <a:t>15/01/2023</a:t>
+              <a:t>18/01/2023</a:t>
             </a:fld>
             <a:endParaRPr lang="en-IL"/>
           </a:p>
@@ -4023,7 +6712,7 @@
           <a:p>
             <a:fld id="{E0C858BD-AA26-3249-9D78-E68179219554}" type="datetimeFigureOut">
               <a:rPr lang="en-IL" smtClean="0"/>
-              <a:t>15/01/2023</a:t>
+              <a:t>18/01/2023</a:t>
             </a:fld>
             <a:endParaRPr lang="en-IL"/>
           </a:p>
@@ -4291,7 +6980,7 @@
           <a:p>
             <a:fld id="{E0C858BD-AA26-3249-9D78-E68179219554}" type="datetimeFigureOut">
               <a:rPr lang="en-IL" smtClean="0"/>
-              <a:t>15/01/2023</a:t>
+              <a:t>18/01/2023</a:t>
             </a:fld>
             <a:endParaRPr lang="en-IL"/>
           </a:p>
@@ -4706,7 +7395,7 @@
           <a:p>
             <a:fld id="{E0C858BD-AA26-3249-9D78-E68179219554}" type="datetimeFigureOut">
               <a:rPr lang="en-IL" smtClean="0"/>
-              <a:t>15/01/2023</a:t>
+              <a:t>18/01/2023</a:t>
             </a:fld>
             <a:endParaRPr lang="en-IL"/>
           </a:p>
@@ -4848,7 +7537,7 @@
           <a:p>
             <a:fld id="{E0C858BD-AA26-3249-9D78-E68179219554}" type="datetimeFigureOut">
               <a:rPr lang="en-IL" smtClean="0"/>
-              <a:t>15/01/2023</a:t>
+              <a:t>18/01/2023</a:t>
             </a:fld>
             <a:endParaRPr lang="en-IL"/>
           </a:p>
@@ -4961,7 +7650,7 @@
           <a:p>
             <a:fld id="{E0C858BD-AA26-3249-9D78-E68179219554}" type="datetimeFigureOut">
               <a:rPr lang="en-IL" smtClean="0"/>
-              <a:t>15/01/2023</a:t>
+              <a:t>18/01/2023</a:t>
             </a:fld>
             <a:endParaRPr lang="en-IL"/>
           </a:p>
@@ -5274,7 +7963,7 @@
           <a:p>
             <a:fld id="{E0C858BD-AA26-3249-9D78-E68179219554}" type="datetimeFigureOut">
               <a:rPr lang="en-IL" smtClean="0"/>
-              <a:t>15/01/2023</a:t>
+              <a:t>18/01/2023</a:t>
             </a:fld>
             <a:endParaRPr lang="en-IL"/>
           </a:p>
@@ -5563,7 +8252,7 @@
           <a:p>
             <a:fld id="{E0C858BD-AA26-3249-9D78-E68179219554}" type="datetimeFigureOut">
               <a:rPr lang="en-IL" smtClean="0"/>
-              <a:t>15/01/2023</a:t>
+              <a:t>18/01/2023</a:t>
             </a:fld>
             <a:endParaRPr lang="en-IL"/>
           </a:p>
@@ -5806,7 +8495,7 @@
           <a:p>
             <a:fld id="{E0C858BD-AA26-3249-9D78-E68179219554}" type="datetimeFigureOut">
               <a:rPr lang="en-IL" smtClean="0"/>
-              <a:t>15/01/2023</a:t>
+              <a:t>18/01/2023</a:t>
             </a:fld>
             <a:endParaRPr lang="en-IL"/>
           </a:p>
@@ -7120,9 +9809,18 @@
   <p:clrMapOvr>
     <a:masterClrMapping/>
   </p:clrMapOvr>
-  <p:transition spd="slow">
-    <p:push dir="u"/>
-  </p:transition>
+  <mc:AlternateContent xmlns:mc="http://schemas.openxmlformats.org/markup-compatibility/2006" xmlns:p14="http://schemas.microsoft.com/office/powerpoint/2010/main">
+    <mc:Choice Requires="p14">
+      <p:transition spd="med" p14:dur="700">
+        <p:fade/>
+      </p:transition>
+    </mc:Choice>
+    <mc:Fallback xmlns="">
+      <p:transition spd="med">
+        <p:fade/>
+      </p:transition>
+    </mc:Fallback>
+  </mc:AlternateContent>
 </p:sld>
 </file>
 
@@ -7547,14 +10245,14 @@
   <p:clrMapOvr>
     <a:masterClrMapping/>
   </p:clrMapOvr>
-  <mc:AlternateContent xmlns:mc="http://schemas.openxmlformats.org/markup-compatibility/2006" xmlns:p159="http://schemas.microsoft.com/office/powerpoint/2015/09/main">
-    <mc:Choice Requires="p159">
-      <p:transition xmlns:p14="http://schemas.microsoft.com/office/powerpoint/2010/main" spd="slow" p14:dur="2000">
-        <p159:morph option="byObject"/>
+  <mc:AlternateContent xmlns:mc="http://schemas.openxmlformats.org/markup-compatibility/2006" xmlns:p14="http://schemas.microsoft.com/office/powerpoint/2010/main">
+    <mc:Choice Requires="p14">
+      <p:transition spd="med" p14:dur="700">
+        <p:fade/>
       </p:transition>
     </mc:Choice>
     <mc:Fallback xmlns="">
-      <p:transition spd="slow">
+      <p:transition spd="med">
         <p:fade/>
       </p:transition>
     </mc:Fallback>
@@ -8284,9 +10982,18 @@
   <p:clrMapOvr>
     <a:masterClrMapping/>
   </p:clrMapOvr>
-  <p:transition spd="slow">
-    <p:comb dir="vert"/>
-  </p:transition>
+  <mc:AlternateContent xmlns:mc="http://schemas.openxmlformats.org/markup-compatibility/2006" xmlns:p14="http://schemas.microsoft.com/office/powerpoint/2010/main">
+    <mc:Choice Requires="p14">
+      <p:transition spd="med" p14:dur="700">
+        <p:fade/>
+      </p:transition>
+    </mc:Choice>
+    <mc:Fallback xmlns="">
+      <p:transition spd="med">
+        <p:fade/>
+      </p:transition>
+    </mc:Fallback>
+  </mc:AlternateContent>
 </p:sld>
 </file>
 
@@ -8557,13 +11264,13 @@
   </p:clrMapOvr>
   <mc:AlternateContent xmlns:mc="http://schemas.openxmlformats.org/markup-compatibility/2006" xmlns:p14="http://schemas.microsoft.com/office/powerpoint/2010/main">
     <mc:Choice Requires="p14">
-      <p:transition spd="slow" p14:dur="1500">
-        <p:split orient="vert"/>
+      <p:transition spd="med" p14:dur="700">
+        <p:fade/>
       </p:transition>
     </mc:Choice>
     <mc:Fallback xmlns="">
-      <p:transition spd="slow">
-        <p:split orient="vert"/>
+      <p:transition spd="med">
+        <p:fade/>
       </p:transition>
     </mc:Fallback>
   </mc:AlternateContent>
@@ -8669,12 +11376,12 @@
   </p:clrMapOvr>
   <mc:AlternateContent xmlns:mc="http://schemas.openxmlformats.org/markup-compatibility/2006" xmlns:p14="http://schemas.microsoft.com/office/powerpoint/2010/main">
     <mc:Choice Requires="p14">
-      <p:transition spd="slow" p14:dur="1600">
-        <p14:gallery dir="l"/>
+      <p:transition spd="med" p14:dur="700">
+        <p:fade/>
       </p:transition>
     </mc:Choice>
     <mc:Fallback xmlns="">
-      <p:transition spd="slow">
+      <p:transition spd="med">
         <p:fade/>
       </p:transition>
     </mc:Fallback>
@@ -8776,12 +11483,12 @@
   </p:clrMapOvr>
   <mc:AlternateContent xmlns:mc="http://schemas.openxmlformats.org/markup-compatibility/2006" xmlns:p14="http://schemas.microsoft.com/office/powerpoint/2010/main">
     <mc:Choice Requires="p14">
-      <p:transition spd="slow" p14:dur="2000">
-        <p14:ferris dir="l"/>
+      <p:transition spd="med" p14:dur="700">
+        <p:fade/>
       </p:transition>
     </mc:Choice>
     <mc:Fallback xmlns="">
-      <p:transition spd="slow">
+      <p:transition spd="med">
         <p:fade/>
       </p:transition>
     </mc:Fallback>
@@ -9294,6 +12001,18 @@
   <p:clrMapOvr>
     <a:masterClrMapping/>
   </p:clrMapOvr>
+  <mc:AlternateContent xmlns:mc="http://schemas.openxmlformats.org/markup-compatibility/2006" xmlns:p14="http://schemas.microsoft.com/office/powerpoint/2010/main">
+    <mc:Choice Requires="p14">
+      <p:transition spd="med" p14:dur="700">
+        <p:fade/>
+      </p:transition>
+    </mc:Choice>
+    <mc:Fallback xmlns="">
+      <p:transition spd="med">
+        <p:fade/>
+      </p:transition>
+    </mc:Fallback>
+  </mc:AlternateContent>
 </p:sld>
 </file>
 
@@ -12550,6 +15269,18 @@
   <p:clrMapOvr>
     <a:masterClrMapping/>
   </p:clrMapOvr>
+  <mc:AlternateContent xmlns:mc="http://schemas.openxmlformats.org/markup-compatibility/2006" xmlns:p14="http://schemas.microsoft.com/office/powerpoint/2010/main">
+    <mc:Choice Requires="p14">
+      <p:transition spd="med" p14:dur="700">
+        <p:fade/>
+      </p:transition>
+    </mc:Choice>
+    <mc:Fallback xmlns="">
+      <p:transition spd="med">
+        <p:fade/>
+      </p:transition>
+    </mc:Fallback>
+  </mc:AlternateContent>
 </p:sld>
 </file>
 
@@ -13116,6 +15847,18 @@
   <p:clrMapOvr>
     <a:masterClrMapping/>
   </p:clrMapOvr>
+  <mc:AlternateContent xmlns:mc="http://schemas.openxmlformats.org/markup-compatibility/2006" xmlns:p14="http://schemas.microsoft.com/office/powerpoint/2010/main">
+    <mc:Choice Requires="p14">
+      <p:transition spd="med" p14:dur="700">
+        <p:fade/>
+      </p:transition>
+    </mc:Choice>
+    <mc:Fallback xmlns="">
+      <p:transition spd="med">
+        <p:fade/>
+      </p:transition>
+    </mc:Fallback>
+  </mc:AlternateContent>
 </p:sld>
 </file>
 
@@ -16835,6 +19578,18 @@
   <p:clrMapOvr>
     <a:masterClrMapping/>
   </p:clrMapOvr>
+  <mc:AlternateContent xmlns:mc="http://schemas.openxmlformats.org/markup-compatibility/2006" xmlns:p14="http://schemas.microsoft.com/office/powerpoint/2010/main">
+    <mc:Choice Requires="p14">
+      <p:transition spd="med" p14:dur="700">
+        <p:fade/>
+      </p:transition>
+    </mc:Choice>
+    <mc:Fallback xmlns="">
+      <p:transition spd="med">
+        <p:fade/>
+      </p:transition>
+    </mc:Fallback>
+  </mc:AlternateContent>
 </p:sld>
 </file>
 
@@ -17380,6 +20135,18 @@
   <p:clrMapOvr>
     <a:masterClrMapping/>
   </p:clrMapOvr>
+  <mc:AlternateContent xmlns:mc="http://schemas.openxmlformats.org/markup-compatibility/2006" xmlns:p14="http://schemas.microsoft.com/office/powerpoint/2010/main">
+    <mc:Choice Requires="p14">
+      <p:transition spd="med" p14:dur="700">
+        <p:fade/>
+      </p:transition>
+    </mc:Choice>
+    <mc:Fallback xmlns="">
+      <p:transition spd="med">
+        <p:fade/>
+      </p:transition>
+    </mc:Fallback>
+  </mc:AlternateContent>
 </p:sld>
 </file>
 
@@ -17693,9 +20460,18 @@
   <p:clrMapOvr>
     <a:masterClrMapping/>
   </p:clrMapOvr>
-  <p:transition spd="slow">
-    <p:comb/>
-  </p:transition>
+  <mc:AlternateContent xmlns:mc="http://schemas.openxmlformats.org/markup-compatibility/2006" xmlns:p14="http://schemas.microsoft.com/office/powerpoint/2010/main">
+    <mc:Choice Requires="p14">
+      <p:transition spd="med" p14:dur="700">
+        <p:fade/>
+      </p:transition>
+    </mc:Choice>
+    <mc:Fallback xmlns="">
+      <p:transition spd="med">
+        <p:fade/>
+      </p:transition>
+    </mc:Fallback>
+  </mc:AlternateContent>
 </p:sld>
 </file>
 
@@ -18054,6 +20830,18 @@
   <p:clrMapOvr>
     <a:masterClrMapping/>
   </p:clrMapOvr>
+  <mc:AlternateContent xmlns:mc="http://schemas.openxmlformats.org/markup-compatibility/2006" xmlns:p14="http://schemas.microsoft.com/office/powerpoint/2010/main">
+    <mc:Choice Requires="p14">
+      <p:transition spd="med" p14:dur="700">
+        <p:fade/>
+      </p:transition>
+    </mc:Choice>
+    <mc:Fallback xmlns="">
+      <p:transition spd="med">
+        <p:fade/>
+      </p:transition>
+    </mc:Fallback>
+  </mc:AlternateContent>
 </p:sld>
 </file>
 
@@ -18585,6 +21373,18 @@
   <p:clrMapOvr>
     <a:masterClrMapping/>
   </p:clrMapOvr>
+  <mc:AlternateContent xmlns:mc="http://schemas.openxmlformats.org/markup-compatibility/2006" xmlns:p14="http://schemas.microsoft.com/office/powerpoint/2010/main">
+    <mc:Choice Requires="p14">
+      <p:transition spd="med" p14:dur="700">
+        <p:fade/>
+      </p:transition>
+    </mc:Choice>
+    <mc:Fallback xmlns="">
+      <p:transition spd="med">
+        <p:fade/>
+      </p:transition>
+    </mc:Fallback>
+  </mc:AlternateContent>
 </p:sld>
 </file>
 
@@ -18946,6 +21746,18 @@
   <p:clrMapOvr>
     <a:masterClrMapping/>
   </p:clrMapOvr>
+  <mc:AlternateContent xmlns:mc="http://schemas.openxmlformats.org/markup-compatibility/2006" xmlns:p14="http://schemas.microsoft.com/office/powerpoint/2010/main">
+    <mc:Choice Requires="p14">
+      <p:transition spd="med" p14:dur="700">
+        <p:fade/>
+      </p:transition>
+    </mc:Choice>
+    <mc:Fallback xmlns="">
+      <p:transition spd="med">
+        <p:fade/>
+      </p:transition>
+    </mc:Fallback>
+  </mc:AlternateContent>
 </p:sld>
 </file>
 
@@ -19452,6 +22264,18 @@
   <p:clrMapOvr>
     <a:masterClrMapping/>
   </p:clrMapOvr>
+  <mc:AlternateContent xmlns:mc="http://schemas.openxmlformats.org/markup-compatibility/2006" xmlns:p14="http://schemas.microsoft.com/office/powerpoint/2010/main">
+    <mc:Choice Requires="p14">
+      <p:transition spd="med" p14:dur="700">
+        <p:fade/>
+      </p:transition>
+    </mc:Choice>
+    <mc:Fallback xmlns="">
+      <p:transition spd="med">
+        <p:fade/>
+      </p:transition>
+    </mc:Fallback>
+  </mc:AlternateContent>
 </p:sld>
 </file>
 
@@ -19966,6 +22790,18 @@
   <p:clrMapOvr>
     <a:masterClrMapping/>
   </p:clrMapOvr>
+  <mc:AlternateContent xmlns:mc="http://schemas.openxmlformats.org/markup-compatibility/2006" xmlns:p14="http://schemas.microsoft.com/office/powerpoint/2010/main">
+    <mc:Choice Requires="p14">
+      <p:transition spd="med" p14:dur="700">
+        <p:fade/>
+      </p:transition>
+    </mc:Choice>
+    <mc:Fallback xmlns="">
+      <p:transition spd="med">
+        <p:fade/>
+      </p:transition>
+    </mc:Fallback>
+  </mc:AlternateContent>
 </p:sld>
 </file>
 
@@ -20375,6 +23211,520 @@
           <p:cNvPr id="2" name="Title 1">
             <a:extLst>
               <a:ext uri="{FF2B5EF4-FFF2-40B4-BE49-F238E27FC236}">
+                <a16:creationId xmlns:a16="http://schemas.microsoft.com/office/drawing/2014/main" id="{E9F15DCF-AEC4-45E2-894B-AFF99C840FE8}"/>
+              </a:ext>
+            </a:extLst>
+          </p:cNvPr>
+          <p:cNvSpPr>
+            <a:spLocks noGrp="1"/>
+          </p:cNvSpPr>
+          <p:nvPr>
+            <p:ph type="title"/>
+          </p:nvPr>
+        </p:nvSpPr>
+        <p:spPr>
+          <a:xfrm>
+            <a:off x="1371599" y="294538"/>
+            <a:ext cx="9895951" cy="1033669"/>
+          </a:xfrm>
+        </p:spPr>
+        <p:txBody>
+          <a:bodyPr>
+            <a:normAutofit/>
+          </a:bodyPr>
+          <a:lstStyle/>
+          <a:p>
+            <a:r>
+              <a:rPr lang="en-US" sz="4000">
+                <a:solidFill>
+                  <a:srgbClr val="FFFFFF"/>
+                </a:solidFill>
+              </a:rPr>
+              <a:t>text-shadow</a:t>
+            </a:r>
+            <a:endParaRPr lang="en-IL" sz="4000">
+              <a:solidFill>
+                <a:srgbClr val="FFFFFF"/>
+              </a:solidFill>
+            </a:endParaRPr>
+          </a:p>
+        </p:txBody>
+      </p:sp>
+      <p:sp>
+        <p:nvSpPr>
+          <p:cNvPr id="3" name="Content Placeholder 2">
+            <a:extLst>
+              <a:ext uri="{FF2B5EF4-FFF2-40B4-BE49-F238E27FC236}">
+                <a16:creationId xmlns:a16="http://schemas.microsoft.com/office/drawing/2014/main" id="{1879DC99-EA7C-CF70-CC63-B17E826FEEA7}"/>
+              </a:ext>
+            </a:extLst>
+          </p:cNvPr>
+          <p:cNvSpPr>
+            <a:spLocks noGrp="1"/>
+          </p:cNvSpPr>
+          <p:nvPr>
+            <p:ph idx="1"/>
+          </p:nvPr>
+        </p:nvSpPr>
+        <p:spPr>
+          <a:xfrm>
+            <a:off x="1371599" y="2318197"/>
+            <a:ext cx="9724031" cy="3683358"/>
+          </a:xfrm>
+        </p:spPr>
+        <p:txBody>
+          <a:bodyPr anchor="ctr">
+            <a:normAutofit/>
+          </a:bodyPr>
+          <a:lstStyle/>
+          <a:p>
+            <a:r>
+              <a:rPr lang="en-US" sz="2000" dirty="0"/>
+              <a:t>The text-shadow property in CSS is used to add a shadow effect to text. It is used to create a visual depth to text and add emphasis to it.</a:t>
+            </a:r>
+          </a:p>
+          <a:p>
+            <a:r>
+              <a:rPr lang="en-US" sz="2000" dirty="0"/>
+              <a:t>The text-shadow property takes several values, the first value is the horizontal offset of the shadow, the second value is the vertical offset of the shadow, the third value is the blur radius, and the fourth value is the color of the shadow. The horizontal and vertical offset values can be positive or negative, with positive values moving the shadow to the right and down, and negative values moving the shadow to the left and up. The blur radius value determines the spread of the shadow, with higher values creating a more diffuse shadow.</a:t>
+            </a:r>
+          </a:p>
+          <a:p>
+            <a:endParaRPr lang="en-IL" sz="2000" dirty="0"/>
+          </a:p>
+        </p:txBody>
+      </p:sp>
+    </p:spTree>
+    <p:extLst>
+      <p:ext uri="{BB962C8B-B14F-4D97-AF65-F5344CB8AC3E}">
+        <p14:creationId xmlns:p14="http://schemas.microsoft.com/office/powerpoint/2010/main" val="3766549134"/>
+      </p:ext>
+    </p:extLst>
+  </p:cSld>
+  <p:clrMapOvr>
+    <a:masterClrMapping/>
+  </p:clrMapOvr>
+  <mc:AlternateContent xmlns:mc="http://schemas.openxmlformats.org/markup-compatibility/2006" xmlns:p14="http://schemas.microsoft.com/office/powerpoint/2010/main">
+    <mc:Choice Requires="p14">
+      <p:transition spd="med" p14:dur="700">
+        <p:fade/>
+      </p:transition>
+    </mc:Choice>
+    <mc:Fallback xmlns="">
+      <p:transition spd="med">
+        <p:fade/>
+      </p:transition>
+    </mc:Fallback>
+  </mc:AlternateContent>
+</p:sld>
+</file>
+
+<file path=ppt/slides/slide26.xml><?xml version="1.0" encoding="utf-8"?>
+<p:sld xmlns:a="http://schemas.openxmlformats.org/drawingml/2006/main" xmlns:r="http://schemas.openxmlformats.org/officeDocument/2006/relationships" xmlns:p="http://schemas.openxmlformats.org/presentationml/2006/main">
+  <p:cSld>
+    <p:bg>
+      <p:bgPr>
+        <a:solidFill>
+          <a:schemeClr val="bg1"/>
+        </a:solidFill>
+        <a:effectLst/>
+      </p:bgPr>
+    </p:bg>
+    <p:spTree>
+      <p:nvGrpSpPr>
+        <p:cNvPr id="1" name=""/>
+        <p:cNvGrpSpPr/>
+        <p:nvPr/>
+      </p:nvGrpSpPr>
+      <p:grpSpPr>
+        <a:xfrm>
+          <a:off x="0" y="0"/>
+          <a:ext cx="0" cy="0"/>
+          <a:chOff x="0" y="0"/>
+          <a:chExt cx="0" cy="0"/>
+        </a:xfrm>
+      </p:grpSpPr>
+      <p:sp useBgFill="1">
+        <p:nvSpPr>
+          <p:cNvPr id="8" name="Rectangle 7">
+            <a:extLst>
+              <a:ext uri="{FF2B5EF4-FFF2-40B4-BE49-F238E27FC236}">
+                <a16:creationId xmlns:a16="http://schemas.microsoft.com/office/drawing/2014/main" id="{1B15ED52-F352-441B-82BF-E0EA34836D08}"/>
+              </a:ext>
+              <a:ext uri="{C183D7F6-B498-43B3-948B-1728B52AA6E4}">
+                <adec:decorative xmlns:adec="http://schemas.microsoft.com/office/drawing/2017/decorative" val="1"/>
+              </a:ext>
+            </a:extLst>
+          </p:cNvPr>
+          <p:cNvSpPr>
+            <a:spLocks noGrp="1" noRot="1" noChangeAspect="1" noMove="1" noResize="1" noEditPoints="1" noAdjustHandles="1" noChangeArrowheads="1" noChangeShapeType="1" noTextEdit="1"/>
+          </p:cNvSpPr>
+          <p:nvPr>
+            <p:extLst>
+              <p:ext uri="{386F3935-93C4-4BCD-93E2-E3B085C9AB24}">
+                <p16:designElem xmlns:p16="http://schemas.microsoft.com/office/powerpoint/2015/main" val="1"/>
+              </p:ext>
+            </p:extLst>
+          </p:nvPr>
+        </p:nvSpPr>
+        <p:spPr>
+          <a:xfrm>
+            <a:off x="0" y="0"/>
+            <a:ext cx="12192000" cy="6858000"/>
+          </a:xfrm>
+          <a:prstGeom prst="rect">
+            <a:avLst/>
+          </a:prstGeom>
+          <a:ln w="12700" cap="flat" cmpd="sng" algn="ctr">
+            <a:noFill/>
+            <a:prstDash val="solid"/>
+            <a:miter lim="800000"/>
+          </a:ln>
+          <a:effectLst/>
+          <a:extLst>
+            <a:ext uri="{91240B29-F687-4F45-9708-019B960494DF}">
+              <a14:hiddenLine xmlns:a14="http://schemas.microsoft.com/office/drawing/2010/main" w="12700" cap="flat" cmpd="sng" algn="ctr">
+                <a:solidFill>
+                  <a:schemeClr val="accent1">
+                    <a:shade val="50000"/>
+                  </a:schemeClr>
+                </a:solidFill>
+                <a:prstDash val="solid"/>
+                <a:miter lim="800000"/>
+              </a14:hiddenLine>
+            </a:ext>
+          </a:extLst>
+        </p:spPr>
+        <p:style>
+          <a:lnRef idx="2">
+            <a:schemeClr val="accent1">
+              <a:shade val="50000"/>
+            </a:schemeClr>
+          </a:lnRef>
+          <a:fillRef idx="1">
+            <a:schemeClr val="accent1"/>
+          </a:fillRef>
+          <a:effectRef idx="0">
+            <a:schemeClr val="accent1"/>
+          </a:effectRef>
+          <a:fontRef idx="minor">
+            <a:schemeClr val="lt1"/>
+          </a:fontRef>
+        </p:style>
+        <p:txBody>
+          <a:bodyPr rtlCol="0" anchor="ctr"/>
+          <a:lstStyle/>
+          <a:p>
+            <a:pPr algn="ctr"/>
+            <a:endParaRPr lang="en-US"/>
+          </a:p>
+        </p:txBody>
+      </p:sp>
+      <p:sp>
+        <p:nvSpPr>
+          <p:cNvPr id="10" name="Rectangle 9">
+            <a:extLst>
+              <a:ext uri="{FF2B5EF4-FFF2-40B4-BE49-F238E27FC236}">
+                <a16:creationId xmlns:a16="http://schemas.microsoft.com/office/drawing/2014/main" id="{3B2E3793-BFE6-45A2-9B7B-E18844431C99}"/>
+              </a:ext>
+              <a:ext uri="{C183D7F6-B498-43B3-948B-1728B52AA6E4}">
+                <adec:decorative xmlns:adec="http://schemas.microsoft.com/office/drawing/2017/decorative" val="1"/>
+              </a:ext>
+            </a:extLst>
+          </p:cNvPr>
+          <p:cNvSpPr>
+            <a:spLocks noGrp="1" noRot="1" noChangeAspect="1" noMove="1" noResize="1" noEditPoints="1" noAdjustHandles="1" noChangeArrowheads="1" noChangeShapeType="1" noTextEdit="1"/>
+          </p:cNvSpPr>
+          <p:nvPr>
+            <p:extLst>
+              <p:ext uri="{386F3935-93C4-4BCD-93E2-E3B085C9AB24}">
+                <p16:designElem xmlns:p16="http://schemas.microsoft.com/office/powerpoint/2015/main" val="1"/>
+              </p:ext>
+            </p:extLst>
+          </p:nvPr>
+        </p:nvSpPr>
+        <p:spPr>
+          <a:xfrm flipH="1">
+            <a:off x="-1" y="-1"/>
+            <a:ext cx="12191998" cy="1590742"/>
+          </a:xfrm>
+          <a:prstGeom prst="rect">
+            <a:avLst/>
+          </a:prstGeom>
+          <a:gradFill>
+            <a:gsLst>
+              <a:gs pos="0">
+                <a:srgbClr val="000000"/>
+              </a:gs>
+              <a:gs pos="100000">
+                <a:schemeClr val="accent1">
+                  <a:lumMod val="75000"/>
+                </a:schemeClr>
+              </a:gs>
+            </a:gsLst>
+            <a:lin ang="8400000" scaled="0"/>
+          </a:gradFill>
+          <a:ln>
+            <a:noFill/>
+          </a:ln>
+        </p:spPr>
+        <p:style>
+          <a:lnRef idx="2">
+            <a:schemeClr val="accent1">
+              <a:shade val="50000"/>
+            </a:schemeClr>
+          </a:lnRef>
+          <a:fillRef idx="1">
+            <a:schemeClr val="accent1"/>
+          </a:fillRef>
+          <a:effectRef idx="0">
+            <a:schemeClr val="accent1"/>
+          </a:effectRef>
+          <a:fontRef idx="minor">
+            <a:schemeClr val="lt1"/>
+          </a:fontRef>
+        </p:style>
+        <p:txBody>
+          <a:bodyPr rtlCol="0" anchor="ctr"/>
+          <a:lstStyle/>
+          <a:p>
+            <a:pPr algn="ctr"/>
+            <a:endParaRPr lang="en-US"/>
+          </a:p>
+        </p:txBody>
+      </p:sp>
+      <p:sp>
+        <p:nvSpPr>
+          <p:cNvPr id="12" name="Rectangle 11">
+            <a:extLst>
+              <a:ext uri="{FF2B5EF4-FFF2-40B4-BE49-F238E27FC236}">
+                <a16:creationId xmlns:a16="http://schemas.microsoft.com/office/drawing/2014/main" id="{BC4C4868-CB8F-4AF9-9CDB-8108F2C19B67}"/>
+              </a:ext>
+              <a:ext uri="{C183D7F6-B498-43B3-948B-1728B52AA6E4}">
+                <adec:decorative xmlns:adec="http://schemas.microsoft.com/office/drawing/2017/decorative" val="1"/>
+              </a:ext>
+            </a:extLst>
+          </p:cNvPr>
+          <p:cNvSpPr>
+            <a:spLocks noGrp="1" noRot="1" noChangeAspect="1" noMove="1" noResize="1" noEditPoints="1" noAdjustHandles="1" noChangeArrowheads="1" noChangeShapeType="1" noTextEdit="1"/>
+          </p:cNvSpPr>
+          <p:nvPr>
+            <p:extLst>
+              <p:ext uri="{386F3935-93C4-4BCD-93E2-E3B085C9AB24}">
+                <p16:designElem xmlns:p16="http://schemas.microsoft.com/office/powerpoint/2015/main" val="1"/>
+              </p:ext>
+            </p:extLst>
+          </p:nvPr>
+        </p:nvSpPr>
+        <p:spPr>
+          <a:xfrm rot="10800000" flipH="1">
+            <a:off x="-3" y="0"/>
+            <a:ext cx="8115306" cy="1590742"/>
+          </a:xfrm>
+          <a:prstGeom prst="rect">
+            <a:avLst/>
+          </a:prstGeom>
+          <a:gradFill>
+            <a:gsLst>
+              <a:gs pos="20000">
+                <a:schemeClr val="accent1">
+                  <a:alpha val="0"/>
+                </a:schemeClr>
+              </a:gs>
+              <a:gs pos="100000">
+                <a:schemeClr val="accent1">
+                  <a:lumMod val="50000"/>
+                  <a:alpha val="55000"/>
+                </a:schemeClr>
+              </a:gs>
+            </a:gsLst>
+            <a:lin ang="13800000" scaled="0"/>
+          </a:gradFill>
+          <a:ln>
+            <a:noFill/>
+          </a:ln>
+        </p:spPr>
+        <p:style>
+          <a:lnRef idx="2">
+            <a:schemeClr val="accent1">
+              <a:shade val="50000"/>
+            </a:schemeClr>
+          </a:lnRef>
+          <a:fillRef idx="1">
+            <a:schemeClr val="accent1"/>
+          </a:fillRef>
+          <a:effectRef idx="0">
+            <a:schemeClr val="accent1"/>
+          </a:effectRef>
+          <a:fontRef idx="minor">
+            <a:schemeClr val="lt1"/>
+          </a:fontRef>
+        </p:style>
+        <p:txBody>
+          <a:bodyPr rtlCol="0" anchor="ctr"/>
+          <a:lstStyle/>
+          <a:p>
+            <a:pPr algn="ctr"/>
+            <a:endParaRPr lang="en-US"/>
+          </a:p>
+        </p:txBody>
+      </p:sp>
+      <p:sp>
+        <p:nvSpPr>
+          <p:cNvPr id="14" name="Rectangle 13">
+            <a:extLst>
+              <a:ext uri="{FF2B5EF4-FFF2-40B4-BE49-F238E27FC236}">
+                <a16:creationId xmlns:a16="http://schemas.microsoft.com/office/drawing/2014/main" id="{375E0459-6403-40CD-989D-56A4407CA12E}"/>
+              </a:ext>
+              <a:ext uri="{C183D7F6-B498-43B3-948B-1728B52AA6E4}">
+                <adec:decorative xmlns:adec="http://schemas.microsoft.com/office/drawing/2017/decorative" val="1"/>
+              </a:ext>
+            </a:extLst>
+          </p:cNvPr>
+          <p:cNvSpPr>
+            <a:spLocks noGrp="1" noRot="1" noChangeAspect="1" noMove="1" noResize="1" noEditPoints="1" noAdjustHandles="1" noChangeArrowheads="1" noChangeShapeType="1" noTextEdit="1"/>
+          </p:cNvSpPr>
+          <p:nvPr>
+            <p:extLst>
+              <p:ext uri="{386F3935-93C4-4BCD-93E2-E3B085C9AB24}">
+                <p16:designElem xmlns:p16="http://schemas.microsoft.com/office/powerpoint/2015/main" val="1"/>
+              </p:ext>
+            </p:extLst>
+          </p:nvPr>
+        </p:nvSpPr>
+        <p:spPr>
+          <a:xfrm flipH="1">
+            <a:off x="8115299" y="-1"/>
+            <a:ext cx="4076698" cy="1590742"/>
+          </a:xfrm>
+          <a:prstGeom prst="rect">
+            <a:avLst/>
+          </a:prstGeom>
+          <a:gradFill>
+            <a:gsLst>
+              <a:gs pos="0">
+                <a:schemeClr val="accent1">
+                  <a:alpha val="66000"/>
+                </a:schemeClr>
+              </a:gs>
+              <a:gs pos="100000">
+                <a:srgbClr val="000000">
+                  <a:alpha val="30000"/>
+                </a:srgbClr>
+              </a:gs>
+            </a:gsLst>
+            <a:lin ang="13200000" scaled="0"/>
+          </a:gradFill>
+          <a:ln>
+            <a:noFill/>
+          </a:ln>
+        </p:spPr>
+        <p:style>
+          <a:lnRef idx="2">
+            <a:schemeClr val="accent1">
+              <a:shade val="50000"/>
+            </a:schemeClr>
+          </a:lnRef>
+          <a:fillRef idx="1">
+            <a:schemeClr val="accent1"/>
+          </a:fillRef>
+          <a:effectRef idx="0">
+            <a:schemeClr val="accent1"/>
+          </a:effectRef>
+          <a:fontRef idx="minor">
+            <a:schemeClr val="lt1"/>
+          </a:fontRef>
+        </p:style>
+        <p:txBody>
+          <a:bodyPr rtlCol="0" anchor="ctr"/>
+          <a:lstStyle/>
+          <a:p>
+            <a:pPr algn="ctr"/>
+            <a:endParaRPr lang="en-US"/>
+          </a:p>
+        </p:txBody>
+      </p:sp>
+      <p:sp>
+        <p:nvSpPr>
+          <p:cNvPr id="16" name="Rectangle 15">
+            <a:extLst>
+              <a:ext uri="{FF2B5EF4-FFF2-40B4-BE49-F238E27FC236}">
+                <a16:creationId xmlns:a16="http://schemas.microsoft.com/office/drawing/2014/main" id="{53E5B1A8-3AC9-4BD1-9BBC-78CA94F2D1BA}"/>
+              </a:ext>
+              <a:ext uri="{C183D7F6-B498-43B3-948B-1728B52AA6E4}">
+                <adec:decorative xmlns:adec="http://schemas.microsoft.com/office/drawing/2017/decorative" val="1"/>
+              </a:ext>
+            </a:extLst>
+          </p:cNvPr>
+          <p:cNvSpPr>
+            <a:spLocks noGrp="1" noRot="1" noChangeAspect="1" noMove="1" noResize="1" noEditPoints="1" noAdjustHandles="1" noChangeArrowheads="1" noChangeShapeType="1" noTextEdit="1"/>
+          </p:cNvSpPr>
+          <p:nvPr>
+            <p:extLst>
+              <p:ext uri="{386F3935-93C4-4BCD-93E2-E3B085C9AB24}">
+                <p16:designElem xmlns:p16="http://schemas.microsoft.com/office/powerpoint/2015/main" val="1"/>
+              </p:ext>
+            </p:extLst>
+          </p:nvPr>
+        </p:nvSpPr>
+        <p:spPr>
+          <a:xfrm>
+            <a:off x="459350" y="-1"/>
+            <a:ext cx="11732646" cy="1597433"/>
+          </a:xfrm>
+          <a:prstGeom prst="rect">
+            <a:avLst/>
+          </a:prstGeom>
+          <a:gradFill>
+            <a:gsLst>
+              <a:gs pos="50000">
+                <a:srgbClr val="000000">
+                  <a:alpha val="0"/>
+                </a:srgbClr>
+              </a:gs>
+              <a:gs pos="99000">
+                <a:schemeClr val="accent1">
+                  <a:lumMod val="50000"/>
+                  <a:alpha val="52000"/>
+                </a:schemeClr>
+              </a:gs>
+            </a:gsLst>
+            <a:lin ang="16800000" scaled="0"/>
+          </a:gradFill>
+          <a:ln>
+            <a:noFill/>
+          </a:ln>
+        </p:spPr>
+        <p:style>
+          <a:lnRef idx="2">
+            <a:schemeClr val="accent1">
+              <a:shade val="50000"/>
+            </a:schemeClr>
+          </a:lnRef>
+          <a:fillRef idx="1">
+            <a:schemeClr val="accent1"/>
+          </a:fillRef>
+          <a:effectRef idx="0">
+            <a:schemeClr val="accent1"/>
+          </a:effectRef>
+          <a:fontRef idx="minor">
+            <a:schemeClr val="lt1"/>
+          </a:fontRef>
+        </p:style>
+        <p:txBody>
+          <a:bodyPr rtlCol="0" anchor="ctr"/>
+          <a:lstStyle/>
+          <a:p>
+            <a:pPr algn="ctr"/>
+            <a:endParaRPr lang="en-US"/>
+          </a:p>
+        </p:txBody>
+      </p:sp>
+      <p:sp>
+        <p:nvSpPr>
+          <p:cNvPr id="2" name="Title 1">
+            <a:extLst>
+              <a:ext uri="{FF2B5EF4-FFF2-40B4-BE49-F238E27FC236}">
                 <a16:creationId xmlns:a16="http://schemas.microsoft.com/office/drawing/2014/main" id="{19D432D3-A3CE-A8AA-2FED-83C25616C3A0}"/>
               </a:ext>
             </a:extLst>
@@ -20521,10 +23871,22 @@
   <p:clrMapOvr>
     <a:masterClrMapping/>
   </p:clrMapOvr>
+  <mc:AlternateContent xmlns:mc="http://schemas.openxmlformats.org/markup-compatibility/2006" xmlns:p14="http://schemas.microsoft.com/office/powerpoint/2010/main">
+    <mc:Choice Requires="p14">
+      <p:transition spd="med" p14:dur="700">
+        <p:fade/>
+      </p:transition>
+    </mc:Choice>
+    <mc:Fallback xmlns="">
+      <p:transition spd="med">
+        <p:fade/>
+      </p:transition>
+    </mc:Fallback>
+  </mc:AlternateContent>
 </p:sld>
 </file>
 
-<file path=ppt/slides/slide26.xml><?xml version="1.0" encoding="utf-8"?>
+<file path=ppt/slides/slide27.xml><?xml version="1.0" encoding="utf-8"?>
 <p:sld xmlns:a="http://schemas.openxmlformats.org/drawingml/2006/main" xmlns:r="http://schemas.openxmlformats.org/officeDocument/2006/relationships" xmlns:p="http://schemas.openxmlformats.org/presentationml/2006/main">
   <p:cSld>
     <p:bg>
@@ -21821,6 +25183,18 @@
   <p:clrMapOvr>
     <a:masterClrMapping/>
   </p:clrMapOvr>
+  <mc:AlternateContent xmlns:mc="http://schemas.openxmlformats.org/markup-compatibility/2006" xmlns:p14="http://schemas.microsoft.com/office/powerpoint/2010/main">
+    <mc:Choice Requires="p14">
+      <p:transition spd="med" p14:dur="700">
+        <p:fade/>
+      </p:transition>
+    </mc:Choice>
+    <mc:Fallback xmlns="">
+      <p:transition spd="med">
+        <p:fade/>
+      </p:transition>
+    </mc:Fallback>
+  </mc:AlternateContent>
   <p:timing>
     <p:tnLst>
       <p:par>
@@ -21916,7 +25290,7 @@
 </p:sld>
 </file>
 
-<file path=ppt/slides/slide27.xml><?xml version="1.0" encoding="utf-8"?>
+<file path=ppt/slides/slide28.xml><?xml version="1.0" encoding="utf-8"?>
 <p:sld xmlns:a="http://schemas.openxmlformats.org/drawingml/2006/main" xmlns:r="http://schemas.openxmlformats.org/officeDocument/2006/relationships" xmlns:p="http://schemas.openxmlformats.org/presentationml/2006/main">
   <p:cSld>
     <p:bg>
@@ -22586,10 +25960,22 @@
   <p:clrMapOvr>
     <a:masterClrMapping/>
   </p:clrMapOvr>
+  <mc:AlternateContent xmlns:mc="http://schemas.openxmlformats.org/markup-compatibility/2006" xmlns:p14="http://schemas.microsoft.com/office/powerpoint/2010/main">
+    <mc:Choice Requires="p14">
+      <p:transition spd="med" p14:dur="700">
+        <p:fade/>
+      </p:transition>
+    </mc:Choice>
+    <mc:Fallback xmlns="">
+      <p:transition spd="med">
+        <p:fade/>
+      </p:transition>
+    </mc:Fallback>
+  </mc:AlternateContent>
 </p:sld>
 </file>
 
-<file path=ppt/slides/slide28.xml><?xml version="1.0" encoding="utf-8"?>
+<file path=ppt/slides/slide29.xml><?xml version="1.0" encoding="utf-8"?>
 <p:sld xmlns:a="http://schemas.openxmlformats.org/drawingml/2006/main" xmlns:r="http://schemas.openxmlformats.org/officeDocument/2006/relationships" xmlns:p="http://schemas.openxmlformats.org/presentationml/2006/main">
   <p:cSld>
     <p:bg>
@@ -23046,635 +26432,18 @@
   <p:clrMapOvr>
     <a:masterClrMapping/>
   </p:clrMapOvr>
-</p:sld>
-</file>
-
-<file path=ppt/slides/slide29.xml><?xml version="1.0" encoding="utf-8"?>
-<p:sld xmlns:a="http://schemas.openxmlformats.org/drawingml/2006/main" xmlns:r="http://schemas.openxmlformats.org/officeDocument/2006/relationships" xmlns:p="http://schemas.openxmlformats.org/presentationml/2006/main">
-  <p:cSld>
-    <p:bg>
-      <p:bgPr>
-        <a:solidFill>
-          <a:schemeClr val="bg1"/>
-        </a:solidFill>
-        <a:effectLst/>
-      </p:bgPr>
-    </p:bg>
-    <p:spTree>
-      <p:nvGrpSpPr>
-        <p:cNvPr id="1" name=""/>
-        <p:cNvGrpSpPr/>
-        <p:nvPr/>
-      </p:nvGrpSpPr>
-      <p:grpSpPr>
-        <a:xfrm>
-          <a:off x="0" y="0"/>
-          <a:ext cx="0" cy="0"/>
-          <a:chOff x="0" y="0"/>
-          <a:chExt cx="0" cy="0"/>
-        </a:xfrm>
-      </p:grpSpPr>
-      <p:sp useBgFill="1">
-        <p:nvSpPr>
-          <p:cNvPr id="8" name="Rectangle 7">
-            <a:extLst>
-              <a:ext uri="{FF2B5EF4-FFF2-40B4-BE49-F238E27FC236}">
-                <a16:creationId xmlns:a16="http://schemas.microsoft.com/office/drawing/2014/main" id="{C7FA33FF-088D-4F16-95A2-2C64D353DEA8}"/>
-              </a:ext>
-              <a:ext uri="{C183D7F6-B498-43B3-948B-1728B52AA6E4}">
-                <adec:decorative xmlns:adec="http://schemas.microsoft.com/office/drawing/2017/decorative" val="1"/>
-              </a:ext>
-            </a:extLst>
-          </p:cNvPr>
-          <p:cNvSpPr>
-            <a:spLocks noGrp="1" noRot="1" noChangeAspect="1" noMove="1" noResize="1" noEditPoints="1" noAdjustHandles="1" noChangeArrowheads="1" noChangeShapeType="1" noTextEdit="1"/>
-          </p:cNvSpPr>
-          <p:nvPr>
-            <p:extLst>
-              <p:ext uri="{386F3935-93C4-4BCD-93E2-E3B085C9AB24}">
-                <p16:designElem xmlns:p16="http://schemas.microsoft.com/office/powerpoint/2015/main" val="1"/>
-              </p:ext>
-            </p:extLst>
-          </p:nvPr>
-        </p:nvSpPr>
-        <p:spPr>
-          <a:xfrm>
-            <a:off x="1524" y="0"/>
-            <a:ext cx="12188952" cy="6858000"/>
-          </a:xfrm>
-          <a:prstGeom prst="rect">
-            <a:avLst/>
-          </a:prstGeom>
-          <a:ln>
-            <a:noFill/>
-          </a:ln>
-        </p:spPr>
-        <p:style>
-          <a:lnRef idx="2">
-            <a:schemeClr val="accent1">
-              <a:shade val="50000"/>
-            </a:schemeClr>
-          </a:lnRef>
-          <a:fillRef idx="1">
-            <a:schemeClr val="accent1"/>
-          </a:fillRef>
-          <a:effectRef idx="0">
-            <a:schemeClr val="accent1"/>
-          </a:effectRef>
-          <a:fontRef idx="minor">
-            <a:schemeClr val="lt1"/>
-          </a:fontRef>
-        </p:style>
-        <p:txBody>
-          <a:bodyPr rtlCol="0" anchor="ctr"/>
-          <a:lstStyle/>
-          <a:p>
-            <a:pPr marL="0" marR="0" lvl="0" indent="0" algn="ctr" defTabSz="914400" rtl="0" eaLnBrk="1" fontAlgn="auto" latinLnBrk="0" hangingPunct="1">
-              <a:lnSpc>
-                <a:spcPct val="100000"/>
-              </a:lnSpc>
-              <a:spcBef>
-                <a:spcPts val="0"/>
-              </a:spcBef>
-              <a:spcAft>
-                <a:spcPts val="0"/>
-              </a:spcAft>
-              <a:buClrTx/>
-              <a:buSzTx/>
-              <a:buFontTx/>
-              <a:buNone/>
-              <a:tabLst/>
-              <a:defRPr/>
-            </a:pPr>
-            <a:endParaRPr kumimoji="0" lang="en-US" sz="1800" b="0" i="0" u="none" strike="noStrike" kern="1200" cap="none" spc="0" normalizeH="0" baseline="0" noProof="0">
-              <a:ln>
-                <a:noFill/>
-              </a:ln>
-              <a:solidFill>
-                <a:prstClr val="white"/>
-              </a:solidFill>
-              <a:effectLst/>
-              <a:uLnTx/>
-              <a:uFillTx/>
-              <a:latin typeface="Calibri" panose="020F0502020204030204"/>
-              <a:ea typeface="+mn-ea"/>
-              <a:cs typeface="+mn-cs"/>
-            </a:endParaRPr>
-          </a:p>
-        </p:txBody>
-      </p:sp>
-      <p:sp>
-        <p:nvSpPr>
-          <p:cNvPr id="10" name="Rectangle 9">
-            <a:extLst>
-              <a:ext uri="{FF2B5EF4-FFF2-40B4-BE49-F238E27FC236}">
-                <a16:creationId xmlns:a16="http://schemas.microsoft.com/office/drawing/2014/main" id="{A376EFB1-01CF-419F-ABF1-2AF02BBFCBD1}"/>
-              </a:ext>
-              <a:ext uri="{C183D7F6-B498-43B3-948B-1728B52AA6E4}">
-                <adec:decorative xmlns:adec="http://schemas.microsoft.com/office/drawing/2017/decorative" val="1"/>
-              </a:ext>
-            </a:extLst>
-          </p:cNvPr>
-          <p:cNvSpPr>
-            <a:spLocks noGrp="1" noRot="1" noChangeAspect="1" noMove="1" noResize="1" noEditPoints="1" noAdjustHandles="1" noChangeArrowheads="1" noChangeShapeType="1" noTextEdit="1"/>
-          </p:cNvSpPr>
-          <p:nvPr>
-            <p:extLst>
-              <p:ext uri="{386F3935-93C4-4BCD-93E2-E3B085C9AB24}">
-                <p16:designElem xmlns:p16="http://schemas.microsoft.com/office/powerpoint/2015/main" val="1"/>
-              </p:ext>
-            </p:extLst>
-          </p:nvPr>
-        </p:nvSpPr>
-        <p:spPr>
-          <a:xfrm>
-            <a:off x="0" y="0"/>
-            <a:ext cx="4709160" cy="6858000"/>
-          </a:xfrm>
-          <a:prstGeom prst="rect">
-            <a:avLst/>
-          </a:prstGeom>
-          <a:solidFill>
-            <a:schemeClr val="tx1">
-              <a:alpha val="81000"/>
-            </a:schemeClr>
-          </a:solidFill>
-          <a:ln>
-            <a:noFill/>
-          </a:ln>
-        </p:spPr>
-        <p:style>
-          <a:lnRef idx="2">
-            <a:schemeClr val="accent1">
-              <a:shade val="50000"/>
-            </a:schemeClr>
-          </a:lnRef>
-          <a:fillRef idx="1">
-            <a:schemeClr val="accent1"/>
-          </a:fillRef>
-          <a:effectRef idx="0">
-            <a:schemeClr val="accent1"/>
-          </a:effectRef>
-          <a:fontRef idx="minor">
-            <a:schemeClr val="lt1"/>
-          </a:fontRef>
-        </p:style>
-        <p:txBody>
-          <a:bodyPr rtlCol="0" anchor="ctr"/>
-          <a:lstStyle/>
-          <a:p>
-            <a:pPr marL="0" marR="0" lvl="0" indent="0" algn="ctr" defTabSz="914400" rtl="0" eaLnBrk="1" fontAlgn="auto" latinLnBrk="0" hangingPunct="1">
-              <a:lnSpc>
-                <a:spcPct val="100000"/>
-              </a:lnSpc>
-              <a:spcBef>
-                <a:spcPts val="0"/>
-              </a:spcBef>
-              <a:spcAft>
-                <a:spcPts val="0"/>
-              </a:spcAft>
-              <a:buClrTx/>
-              <a:buSzTx/>
-              <a:buFontTx/>
-              <a:buNone/>
-              <a:tabLst/>
-              <a:defRPr/>
-            </a:pPr>
-            <a:endParaRPr kumimoji="0" lang="en-US" sz="1800" b="0" i="0" u="none" strike="noStrike" kern="1200" cap="none" spc="0" normalizeH="0" baseline="0" noProof="0">
-              <a:ln>
-                <a:noFill/>
-              </a:ln>
-              <a:solidFill>
-                <a:prstClr val="white"/>
-              </a:solidFill>
-              <a:effectLst/>
-              <a:uLnTx/>
-              <a:uFillTx/>
-              <a:latin typeface="Calibri" panose="020F0502020204030204"/>
-              <a:ea typeface="+mn-ea"/>
-              <a:cs typeface="+mn-cs"/>
-            </a:endParaRPr>
-          </a:p>
-        </p:txBody>
-      </p:sp>
-      <p:sp>
-        <p:nvSpPr>
-          <p:cNvPr id="12" name="Freeform: Shape 11">
-            <a:extLst>
-              <a:ext uri="{FF2B5EF4-FFF2-40B4-BE49-F238E27FC236}">
-                <a16:creationId xmlns:a16="http://schemas.microsoft.com/office/drawing/2014/main" id="{FF9DEA15-78BD-4750-AA18-B9F28A6D5AB8}"/>
-              </a:ext>
-              <a:ext uri="{C183D7F6-B498-43B3-948B-1728B52AA6E4}">
-                <adec:decorative xmlns:adec="http://schemas.microsoft.com/office/drawing/2017/decorative" val="1"/>
-              </a:ext>
-            </a:extLst>
-          </p:cNvPr>
-          <p:cNvSpPr>
-            <a:spLocks noGrp="1" noRot="1" noChangeAspect="1" noMove="1" noResize="1" noEditPoints="1" noAdjustHandles="1" noChangeArrowheads="1" noChangeShapeType="1" noTextEdit="1"/>
-          </p:cNvSpPr>
-          <p:nvPr>
-            <p:extLst>
-              <p:ext uri="{386F3935-93C4-4BCD-93E2-E3B085C9AB24}">
-                <p16:designElem xmlns:p16="http://schemas.microsoft.com/office/powerpoint/2015/main" val="1"/>
-              </p:ext>
-            </p:extLst>
-          </p:nvPr>
-        </p:nvSpPr>
-        <p:spPr>
-          <a:xfrm>
-            <a:off x="0" y="0"/>
-            <a:ext cx="3284331" cy="6858000"/>
-          </a:xfrm>
-          <a:custGeom>
-            <a:avLst/>
-            <a:gdLst>
-              <a:gd name="connsiteX0" fmla="*/ 0 w 4319042"/>
-              <a:gd name="connsiteY0" fmla="*/ 0 h 6858000"/>
-              <a:gd name="connsiteX1" fmla="*/ 1142888 w 4319042"/>
-              <a:gd name="connsiteY1" fmla="*/ 0 h 6858000"/>
-              <a:gd name="connsiteX2" fmla="*/ 4319042 w 4319042"/>
-              <a:gd name="connsiteY2" fmla="*/ 6858000 h 6858000"/>
-              <a:gd name="connsiteX3" fmla="*/ 0 w 4319042"/>
-              <a:gd name="connsiteY3" fmla="*/ 6858000 h 6858000"/>
-            </a:gdLst>
-            <a:ahLst/>
-            <a:cxnLst>
-              <a:cxn ang="0">
-                <a:pos x="connsiteX0" y="connsiteY0"/>
-              </a:cxn>
-              <a:cxn ang="0">
-                <a:pos x="connsiteX1" y="connsiteY1"/>
-              </a:cxn>
-              <a:cxn ang="0">
-                <a:pos x="connsiteX2" y="connsiteY2"/>
-              </a:cxn>
-              <a:cxn ang="0">
-                <a:pos x="connsiteX3" y="connsiteY3"/>
-              </a:cxn>
-            </a:cxnLst>
-            <a:rect l="l" t="t" r="r" b="b"/>
-            <a:pathLst>
-              <a:path w="4319042" h="6858000">
-                <a:moveTo>
-                  <a:pt x="0" y="0"/>
-                </a:moveTo>
-                <a:lnTo>
-                  <a:pt x="1142888" y="0"/>
-                </a:lnTo>
-                <a:lnTo>
-                  <a:pt x="4319042" y="6858000"/>
-                </a:lnTo>
-                <a:lnTo>
-                  <a:pt x="0" y="6858000"/>
-                </a:lnTo>
-                <a:close/>
-              </a:path>
-            </a:pathLst>
-          </a:custGeom>
-          <a:solidFill>
-            <a:schemeClr val="tx1">
-              <a:alpha val="35000"/>
-            </a:schemeClr>
-          </a:solidFill>
-          <a:ln>
-            <a:noFill/>
-          </a:ln>
-        </p:spPr>
-        <p:style>
-          <a:lnRef idx="2">
-            <a:schemeClr val="accent1">
-              <a:shade val="50000"/>
-            </a:schemeClr>
-          </a:lnRef>
-          <a:fillRef idx="1">
-            <a:schemeClr val="accent1"/>
-          </a:fillRef>
-          <a:effectRef idx="0">
-            <a:schemeClr val="accent1"/>
-          </a:effectRef>
-          <a:fontRef idx="minor">
-            <a:schemeClr val="lt1"/>
-          </a:fontRef>
-        </p:style>
-        <p:txBody>
-          <a:bodyPr wrap="square" rtlCol="0" anchor="ctr">
-            <a:noAutofit/>
-          </a:bodyPr>
-          <a:lstStyle/>
-          <a:p>
-            <a:pPr marL="0" marR="0" lvl="0" indent="0" algn="ctr" defTabSz="914400" rtl="0" eaLnBrk="1" fontAlgn="auto" latinLnBrk="0" hangingPunct="1">
-              <a:lnSpc>
-                <a:spcPct val="100000"/>
-              </a:lnSpc>
-              <a:spcBef>
-                <a:spcPts val="0"/>
-              </a:spcBef>
-              <a:spcAft>
-                <a:spcPts val="0"/>
-              </a:spcAft>
-              <a:buClrTx/>
-              <a:buSzTx/>
-              <a:buFontTx/>
-              <a:buNone/>
-              <a:tabLst/>
-              <a:defRPr/>
-            </a:pPr>
-            <a:endParaRPr kumimoji="0" lang="en-US" sz="1800" b="0" i="0" u="none" strike="noStrike" kern="1200" cap="none" spc="0" normalizeH="0" baseline="0" noProof="0">
-              <a:ln>
-                <a:noFill/>
-              </a:ln>
-              <a:solidFill>
-                <a:prstClr val="white"/>
-              </a:solidFill>
-              <a:effectLst/>
-              <a:uLnTx/>
-              <a:uFillTx/>
-              <a:latin typeface="Calibri" panose="020F0502020204030204"/>
-              <a:ea typeface="+mn-ea"/>
-              <a:cs typeface="+mn-cs"/>
-            </a:endParaRPr>
-          </a:p>
-        </p:txBody>
-      </p:sp>
-      <p:sp>
-        <p:nvSpPr>
-          <p:cNvPr id="2" name="Title 1">
-            <a:extLst>
-              <a:ext uri="{FF2B5EF4-FFF2-40B4-BE49-F238E27FC236}">
-                <a16:creationId xmlns:a16="http://schemas.microsoft.com/office/drawing/2014/main" id="{9FCA7220-D7B3-32FD-EB6A-86B9B5DE97A9}"/>
-              </a:ext>
-            </a:extLst>
-          </p:cNvPr>
-          <p:cNvSpPr>
-            <a:spLocks noGrp="1"/>
-          </p:cNvSpPr>
-          <p:nvPr>
-            <p:ph type="title"/>
-          </p:nvPr>
-        </p:nvSpPr>
-        <p:spPr>
-          <a:xfrm>
-            <a:off x="804672" y="640080"/>
-            <a:ext cx="3282696" cy="5257800"/>
-          </a:xfrm>
-        </p:spPr>
-        <p:txBody>
-          <a:bodyPr>
-            <a:normAutofit/>
-          </a:bodyPr>
-          <a:lstStyle/>
-          <a:p>
-            <a:r>
-              <a:rPr lang="en-US">
-                <a:solidFill>
-                  <a:schemeClr val="bg1"/>
-                </a:solidFill>
-              </a:rPr>
-              <a:t>T</a:t>
-            </a:r>
-            <a:r>
-              <a:rPr lang="en-IL">
-                <a:solidFill>
-                  <a:schemeClr val="bg1"/>
-                </a:solidFill>
-              </a:rPr>
-              <a:t>ry it!</a:t>
-            </a:r>
-          </a:p>
-        </p:txBody>
-      </p:sp>
-      <p:sp>
-        <p:nvSpPr>
-          <p:cNvPr id="3" name="Content Placeholder 2">
-            <a:extLst>
-              <a:ext uri="{FF2B5EF4-FFF2-40B4-BE49-F238E27FC236}">
-                <a16:creationId xmlns:a16="http://schemas.microsoft.com/office/drawing/2014/main" id="{F5DD78D8-C517-49DB-A038-2B923B1BA018}"/>
-              </a:ext>
-            </a:extLst>
-          </p:cNvPr>
-          <p:cNvSpPr>
-            <a:spLocks noGrp="1"/>
-          </p:cNvSpPr>
-          <p:nvPr>
-            <p:ph idx="1"/>
-          </p:nvPr>
-        </p:nvSpPr>
-        <p:spPr>
-          <a:xfrm>
-            <a:off x="5358384" y="640081"/>
-            <a:ext cx="6024654" cy="5257800"/>
-          </a:xfrm>
-        </p:spPr>
-        <p:txBody>
-          <a:bodyPr anchor="ctr">
-            <a:normAutofit/>
-          </a:bodyPr>
-          <a:lstStyle/>
-          <a:p>
-            <a:r>
-              <a:rPr lang="en-US" sz="1100" b="0" i="0">
-                <a:effectLst/>
-                <a:latin typeface="Söhne"/>
-              </a:rPr>
-              <a:t>Task: Create a webpage that demonstrates the use of CSS variables, box shadow, text-align and child selectors</a:t>
-            </a:r>
-          </a:p>
-          <a:p>
-            <a:r>
-              <a:rPr lang="en-US" sz="1100" b="0" i="0">
-                <a:effectLst/>
-                <a:latin typeface="Söhne"/>
-              </a:rPr>
-              <a:t>Instructions:</a:t>
-            </a:r>
-          </a:p>
-          <a:p>
-            <a:pPr>
-              <a:buFont typeface="+mj-lt"/>
-              <a:buAutoNum type="arabicPeriod"/>
-            </a:pPr>
-            <a:r>
-              <a:rPr lang="en-US" sz="1100" b="0" i="0">
-                <a:effectLst/>
-                <a:latin typeface="Söhne"/>
-              </a:rPr>
-              <a:t>Create a new HTML file and a new CSS file.</a:t>
-            </a:r>
-          </a:p>
-          <a:p>
-            <a:pPr>
-              <a:buFont typeface="+mj-lt"/>
-              <a:buAutoNum type="arabicPeriod"/>
-            </a:pPr>
-            <a:r>
-              <a:rPr lang="en-US" sz="1100" b="0" i="0">
-                <a:effectLst/>
-                <a:latin typeface="Söhne"/>
-              </a:rPr>
-              <a:t>In the CSS file, create three CSS variables --main-color, --shadow-size, and --padding-size</a:t>
-            </a:r>
-          </a:p>
-          <a:p>
-            <a:pPr>
-              <a:buFont typeface="+mj-lt"/>
-              <a:buAutoNum type="arabicPeriod"/>
-            </a:pPr>
-            <a:r>
-              <a:rPr lang="en-US" sz="1100" b="0" i="0">
-                <a:effectLst/>
-                <a:latin typeface="Söhne"/>
-              </a:rPr>
-              <a:t>In the HTML file, create a div element with the class "container" to act as the parent element.</a:t>
-            </a:r>
-          </a:p>
-          <a:p>
-            <a:pPr>
-              <a:buFont typeface="+mj-lt"/>
-              <a:buAutoNum type="arabicPeriod"/>
-            </a:pPr>
-            <a:r>
-              <a:rPr lang="en-US" sz="1100" b="0" i="0">
-                <a:effectLst/>
-                <a:latin typeface="Söhne"/>
-              </a:rPr>
-              <a:t>Inside the "container" div, create 3 div elements with the classes "box1", "box2" and "box3" respectively.</a:t>
-            </a:r>
-          </a:p>
-          <a:p>
-            <a:pPr>
-              <a:buFont typeface="+mj-lt"/>
-              <a:buAutoNum type="arabicPeriod"/>
-            </a:pPr>
-            <a:r>
-              <a:rPr lang="en-US" sz="1100" b="0" i="0">
-                <a:effectLst/>
-                <a:latin typeface="Söhne"/>
-              </a:rPr>
-              <a:t>In the CSS file, apply the following styles to the 3 div elements:</a:t>
-            </a:r>
-          </a:p>
-          <a:p>
-            <a:pPr>
-              <a:buFont typeface="Arial" panose="020B0604020202020204" pitchFamily="34" charset="0"/>
-              <a:buChar char="•"/>
-            </a:pPr>
-            <a:r>
-              <a:rPr lang="en-US" sz="1100" b="0" i="0">
-                <a:effectLst/>
-                <a:latin typeface="Söhne"/>
-              </a:rPr>
-              <a:t>Use the CSS variable --main-color to set the background color of each div element.</a:t>
-            </a:r>
-          </a:p>
-          <a:p>
-            <a:pPr>
-              <a:buFont typeface="Arial" panose="020B0604020202020204" pitchFamily="34" charset="0"/>
-              <a:buChar char="•"/>
-            </a:pPr>
-            <a:r>
-              <a:rPr lang="en-US" sz="1100" b="0" i="0">
-                <a:effectLst/>
-                <a:latin typeface="Söhne"/>
-              </a:rPr>
-              <a:t>Use the CSS variable --shadow-size to set the box-shadow property of each div element.</a:t>
-            </a:r>
-          </a:p>
-          <a:p>
-            <a:pPr>
-              <a:buFont typeface="Arial" panose="020B0604020202020204" pitchFamily="34" charset="0"/>
-              <a:buChar char="•"/>
-            </a:pPr>
-            <a:r>
-              <a:rPr lang="en-US" sz="1100" b="0" i="0">
-                <a:effectLst/>
-                <a:latin typeface="Söhne"/>
-              </a:rPr>
-              <a:t>Use the CSS variable --padding-size to set the padding property of each div element.</a:t>
-            </a:r>
-          </a:p>
-          <a:p>
-            <a:pPr>
-              <a:buFont typeface="Arial" panose="020B0604020202020204" pitchFamily="34" charset="0"/>
-              <a:buChar char="•"/>
-            </a:pPr>
-            <a:r>
-              <a:rPr lang="en-US" sz="1100" b="0" i="0">
-                <a:effectLst/>
-                <a:latin typeface="Söhne"/>
-              </a:rPr>
-              <a:t>Use the text-align property to center the text inside each div element.</a:t>
-            </a:r>
-          </a:p>
-          <a:p>
-            <a:pPr>
-              <a:buFont typeface="Arial" panose="020B0604020202020204" pitchFamily="34" charset="0"/>
-              <a:buChar char="•"/>
-            </a:pPr>
-            <a:r>
-              <a:rPr lang="en-US" sz="1100" b="0" i="0">
-                <a:effectLst/>
-                <a:latin typeface="Söhne"/>
-              </a:rPr>
-              <a:t>Use the child selectors to apply different styles to the first and second div elements, such as different font-size, font-weight, and text-transform.</a:t>
-            </a:r>
-          </a:p>
-          <a:p>
-            <a:pPr>
-              <a:buFont typeface="Arial" panose="020B0604020202020204" pitchFamily="34" charset="0"/>
-              <a:buChar char="•"/>
-            </a:pPr>
-            <a:r>
-              <a:rPr lang="en-US" sz="1100" b="0" i="0">
-                <a:effectLst/>
-                <a:latin typeface="Söhne"/>
-              </a:rPr>
-              <a:t>Use the :hover pseudo-class to change the background color of each div element when the user hovers over it.</a:t>
-            </a:r>
-          </a:p>
-          <a:p>
-            <a:pPr>
-              <a:buFont typeface="+mj-lt"/>
-              <a:buAutoNum type="arabicPeriod" startAt="6"/>
-            </a:pPr>
-            <a:r>
-              <a:rPr lang="en-US" sz="1100" b="0" i="0">
-                <a:effectLst/>
-                <a:latin typeface="Söhne"/>
-              </a:rPr>
-              <a:t>Test your webpage in a browser, and make sure that the styles you have applied are working correctly. </a:t>
-            </a:r>
-          </a:p>
-          <a:p>
-            <a:pPr>
-              <a:buFont typeface="+mj-lt"/>
-              <a:buAutoNum type="arabicPeriod" startAt="6"/>
-            </a:pPr>
-            <a:r>
-              <a:rPr lang="en-US" sz="1100" b="0" i="0">
-                <a:effectLst/>
-                <a:latin typeface="Söhne"/>
-              </a:rPr>
-              <a:t>Add some additional styles to make the webpage more visually appealing and interactive, such as hover effect, transitions or animations.</a:t>
-            </a:r>
-          </a:p>
-          <a:p>
-            <a:pPr marL="0" indent="0">
-              <a:buNone/>
-            </a:pPr>
-            <a:endParaRPr lang="en-IL" sz="1100"/>
-          </a:p>
-        </p:txBody>
-      </p:sp>
-    </p:spTree>
-    <p:extLst>
-      <p:ext uri="{BB962C8B-B14F-4D97-AF65-F5344CB8AC3E}">
-        <p14:creationId xmlns:p14="http://schemas.microsoft.com/office/powerpoint/2010/main" val="3722423196"/>
-      </p:ext>
-    </p:extLst>
-  </p:cSld>
-  <p:clrMapOvr>
-    <a:masterClrMapping/>
-  </p:clrMapOvr>
+  <mc:AlternateContent xmlns:mc="http://schemas.openxmlformats.org/markup-compatibility/2006" xmlns:p14="http://schemas.microsoft.com/office/powerpoint/2010/main">
+    <mc:Choice Requires="p14">
+      <p:transition spd="med" p14:dur="700">
+        <p:fade/>
+      </p:transition>
+    </mc:Choice>
+    <mc:Fallback xmlns="">
+      <p:transition spd="med">
+        <p:fade/>
+      </p:transition>
+    </mc:Fallback>
+  </mc:AlternateContent>
 </p:sld>
 </file>
 
@@ -27226,12 +29995,12 @@
   </p:clrMapOvr>
   <mc:AlternateContent xmlns:mc="http://schemas.openxmlformats.org/markup-compatibility/2006" xmlns:p14="http://schemas.microsoft.com/office/powerpoint/2010/main">
     <mc:Choice Requires="p14">
-      <p:transition spd="slow" p14:dur="800">
-        <p14:flythrough/>
+      <p:transition spd="med" p14:dur="700">
+        <p:fade/>
       </p:transition>
     </mc:Choice>
     <mc:Fallback xmlns="">
-      <p:transition spd="slow">
+      <p:transition spd="med">
         <p:fade/>
       </p:transition>
     </mc:Fallback>
@@ -27240,6 +30009,647 @@
 </file>
 
 <file path=ppt/slides/slide30.xml><?xml version="1.0" encoding="utf-8"?>
+<p:sld xmlns:a="http://schemas.openxmlformats.org/drawingml/2006/main" xmlns:r="http://schemas.openxmlformats.org/officeDocument/2006/relationships" xmlns:p="http://schemas.openxmlformats.org/presentationml/2006/main">
+  <p:cSld>
+    <p:bg>
+      <p:bgPr>
+        <a:solidFill>
+          <a:schemeClr val="bg1"/>
+        </a:solidFill>
+        <a:effectLst/>
+      </p:bgPr>
+    </p:bg>
+    <p:spTree>
+      <p:nvGrpSpPr>
+        <p:cNvPr id="1" name=""/>
+        <p:cNvGrpSpPr/>
+        <p:nvPr/>
+      </p:nvGrpSpPr>
+      <p:grpSpPr>
+        <a:xfrm>
+          <a:off x="0" y="0"/>
+          <a:ext cx="0" cy="0"/>
+          <a:chOff x="0" y="0"/>
+          <a:chExt cx="0" cy="0"/>
+        </a:xfrm>
+      </p:grpSpPr>
+      <p:sp useBgFill="1">
+        <p:nvSpPr>
+          <p:cNvPr id="8" name="Rectangle 7">
+            <a:extLst>
+              <a:ext uri="{FF2B5EF4-FFF2-40B4-BE49-F238E27FC236}">
+                <a16:creationId xmlns:a16="http://schemas.microsoft.com/office/drawing/2014/main" id="{C7FA33FF-088D-4F16-95A2-2C64D353DEA8}"/>
+              </a:ext>
+              <a:ext uri="{C183D7F6-B498-43B3-948B-1728B52AA6E4}">
+                <adec:decorative xmlns:adec="http://schemas.microsoft.com/office/drawing/2017/decorative" val="1"/>
+              </a:ext>
+            </a:extLst>
+          </p:cNvPr>
+          <p:cNvSpPr>
+            <a:spLocks noGrp="1" noRot="1" noChangeAspect="1" noMove="1" noResize="1" noEditPoints="1" noAdjustHandles="1" noChangeArrowheads="1" noChangeShapeType="1" noTextEdit="1"/>
+          </p:cNvSpPr>
+          <p:nvPr>
+            <p:extLst>
+              <p:ext uri="{386F3935-93C4-4BCD-93E2-E3B085C9AB24}">
+                <p16:designElem xmlns:p16="http://schemas.microsoft.com/office/powerpoint/2015/main" val="1"/>
+              </p:ext>
+            </p:extLst>
+          </p:nvPr>
+        </p:nvSpPr>
+        <p:spPr>
+          <a:xfrm>
+            <a:off x="1524" y="0"/>
+            <a:ext cx="12188952" cy="6858000"/>
+          </a:xfrm>
+          <a:prstGeom prst="rect">
+            <a:avLst/>
+          </a:prstGeom>
+          <a:ln>
+            <a:noFill/>
+          </a:ln>
+        </p:spPr>
+        <p:style>
+          <a:lnRef idx="2">
+            <a:schemeClr val="accent1">
+              <a:shade val="50000"/>
+            </a:schemeClr>
+          </a:lnRef>
+          <a:fillRef idx="1">
+            <a:schemeClr val="accent1"/>
+          </a:fillRef>
+          <a:effectRef idx="0">
+            <a:schemeClr val="accent1"/>
+          </a:effectRef>
+          <a:fontRef idx="minor">
+            <a:schemeClr val="lt1"/>
+          </a:fontRef>
+        </p:style>
+        <p:txBody>
+          <a:bodyPr rtlCol="0" anchor="ctr"/>
+          <a:lstStyle/>
+          <a:p>
+            <a:pPr marL="0" marR="0" lvl="0" indent="0" algn="ctr" defTabSz="914400" rtl="0" eaLnBrk="1" fontAlgn="auto" latinLnBrk="0" hangingPunct="1">
+              <a:lnSpc>
+                <a:spcPct val="100000"/>
+              </a:lnSpc>
+              <a:spcBef>
+                <a:spcPts val="0"/>
+              </a:spcBef>
+              <a:spcAft>
+                <a:spcPts val="0"/>
+              </a:spcAft>
+              <a:buClrTx/>
+              <a:buSzTx/>
+              <a:buFontTx/>
+              <a:buNone/>
+              <a:tabLst/>
+              <a:defRPr/>
+            </a:pPr>
+            <a:endParaRPr kumimoji="0" lang="en-US" sz="1800" b="0" i="0" u="none" strike="noStrike" kern="1200" cap="none" spc="0" normalizeH="0" baseline="0" noProof="0">
+              <a:ln>
+                <a:noFill/>
+              </a:ln>
+              <a:solidFill>
+                <a:prstClr val="white"/>
+              </a:solidFill>
+              <a:effectLst/>
+              <a:uLnTx/>
+              <a:uFillTx/>
+              <a:latin typeface="Calibri" panose="020F0502020204030204"/>
+              <a:ea typeface="+mn-ea"/>
+              <a:cs typeface="+mn-cs"/>
+            </a:endParaRPr>
+          </a:p>
+        </p:txBody>
+      </p:sp>
+      <p:sp>
+        <p:nvSpPr>
+          <p:cNvPr id="10" name="Rectangle 9">
+            <a:extLst>
+              <a:ext uri="{FF2B5EF4-FFF2-40B4-BE49-F238E27FC236}">
+                <a16:creationId xmlns:a16="http://schemas.microsoft.com/office/drawing/2014/main" id="{A376EFB1-01CF-419F-ABF1-2AF02BBFCBD1}"/>
+              </a:ext>
+              <a:ext uri="{C183D7F6-B498-43B3-948B-1728B52AA6E4}">
+                <adec:decorative xmlns:adec="http://schemas.microsoft.com/office/drawing/2017/decorative" val="1"/>
+              </a:ext>
+            </a:extLst>
+          </p:cNvPr>
+          <p:cNvSpPr>
+            <a:spLocks noGrp="1" noRot="1" noChangeAspect="1" noMove="1" noResize="1" noEditPoints="1" noAdjustHandles="1" noChangeArrowheads="1" noChangeShapeType="1" noTextEdit="1"/>
+          </p:cNvSpPr>
+          <p:nvPr>
+            <p:extLst>
+              <p:ext uri="{386F3935-93C4-4BCD-93E2-E3B085C9AB24}">
+                <p16:designElem xmlns:p16="http://schemas.microsoft.com/office/powerpoint/2015/main" val="1"/>
+              </p:ext>
+            </p:extLst>
+          </p:nvPr>
+        </p:nvSpPr>
+        <p:spPr>
+          <a:xfrm>
+            <a:off x="0" y="0"/>
+            <a:ext cx="4709160" cy="6858000"/>
+          </a:xfrm>
+          <a:prstGeom prst="rect">
+            <a:avLst/>
+          </a:prstGeom>
+          <a:solidFill>
+            <a:schemeClr val="tx1">
+              <a:alpha val="81000"/>
+            </a:schemeClr>
+          </a:solidFill>
+          <a:ln>
+            <a:noFill/>
+          </a:ln>
+        </p:spPr>
+        <p:style>
+          <a:lnRef idx="2">
+            <a:schemeClr val="accent1">
+              <a:shade val="50000"/>
+            </a:schemeClr>
+          </a:lnRef>
+          <a:fillRef idx="1">
+            <a:schemeClr val="accent1"/>
+          </a:fillRef>
+          <a:effectRef idx="0">
+            <a:schemeClr val="accent1"/>
+          </a:effectRef>
+          <a:fontRef idx="minor">
+            <a:schemeClr val="lt1"/>
+          </a:fontRef>
+        </p:style>
+        <p:txBody>
+          <a:bodyPr rtlCol="0" anchor="ctr"/>
+          <a:lstStyle/>
+          <a:p>
+            <a:pPr marL="0" marR="0" lvl="0" indent="0" algn="ctr" defTabSz="914400" rtl="0" eaLnBrk="1" fontAlgn="auto" latinLnBrk="0" hangingPunct="1">
+              <a:lnSpc>
+                <a:spcPct val="100000"/>
+              </a:lnSpc>
+              <a:spcBef>
+                <a:spcPts val="0"/>
+              </a:spcBef>
+              <a:spcAft>
+                <a:spcPts val="0"/>
+              </a:spcAft>
+              <a:buClrTx/>
+              <a:buSzTx/>
+              <a:buFontTx/>
+              <a:buNone/>
+              <a:tabLst/>
+              <a:defRPr/>
+            </a:pPr>
+            <a:endParaRPr kumimoji="0" lang="en-US" sz="1800" b="0" i="0" u="none" strike="noStrike" kern="1200" cap="none" spc="0" normalizeH="0" baseline="0" noProof="0">
+              <a:ln>
+                <a:noFill/>
+              </a:ln>
+              <a:solidFill>
+                <a:prstClr val="white"/>
+              </a:solidFill>
+              <a:effectLst/>
+              <a:uLnTx/>
+              <a:uFillTx/>
+              <a:latin typeface="Calibri" panose="020F0502020204030204"/>
+              <a:ea typeface="+mn-ea"/>
+              <a:cs typeface="+mn-cs"/>
+            </a:endParaRPr>
+          </a:p>
+        </p:txBody>
+      </p:sp>
+      <p:sp>
+        <p:nvSpPr>
+          <p:cNvPr id="12" name="Freeform: Shape 11">
+            <a:extLst>
+              <a:ext uri="{FF2B5EF4-FFF2-40B4-BE49-F238E27FC236}">
+                <a16:creationId xmlns:a16="http://schemas.microsoft.com/office/drawing/2014/main" id="{FF9DEA15-78BD-4750-AA18-B9F28A6D5AB8}"/>
+              </a:ext>
+              <a:ext uri="{C183D7F6-B498-43B3-948B-1728B52AA6E4}">
+                <adec:decorative xmlns:adec="http://schemas.microsoft.com/office/drawing/2017/decorative" val="1"/>
+              </a:ext>
+            </a:extLst>
+          </p:cNvPr>
+          <p:cNvSpPr>
+            <a:spLocks noGrp="1" noRot="1" noChangeAspect="1" noMove="1" noResize="1" noEditPoints="1" noAdjustHandles="1" noChangeArrowheads="1" noChangeShapeType="1" noTextEdit="1"/>
+          </p:cNvSpPr>
+          <p:nvPr>
+            <p:extLst>
+              <p:ext uri="{386F3935-93C4-4BCD-93E2-E3B085C9AB24}">
+                <p16:designElem xmlns:p16="http://schemas.microsoft.com/office/powerpoint/2015/main" val="1"/>
+              </p:ext>
+            </p:extLst>
+          </p:nvPr>
+        </p:nvSpPr>
+        <p:spPr>
+          <a:xfrm>
+            <a:off x="0" y="0"/>
+            <a:ext cx="3284331" cy="6858000"/>
+          </a:xfrm>
+          <a:custGeom>
+            <a:avLst/>
+            <a:gdLst>
+              <a:gd name="connsiteX0" fmla="*/ 0 w 4319042"/>
+              <a:gd name="connsiteY0" fmla="*/ 0 h 6858000"/>
+              <a:gd name="connsiteX1" fmla="*/ 1142888 w 4319042"/>
+              <a:gd name="connsiteY1" fmla="*/ 0 h 6858000"/>
+              <a:gd name="connsiteX2" fmla="*/ 4319042 w 4319042"/>
+              <a:gd name="connsiteY2" fmla="*/ 6858000 h 6858000"/>
+              <a:gd name="connsiteX3" fmla="*/ 0 w 4319042"/>
+              <a:gd name="connsiteY3" fmla="*/ 6858000 h 6858000"/>
+            </a:gdLst>
+            <a:ahLst/>
+            <a:cxnLst>
+              <a:cxn ang="0">
+                <a:pos x="connsiteX0" y="connsiteY0"/>
+              </a:cxn>
+              <a:cxn ang="0">
+                <a:pos x="connsiteX1" y="connsiteY1"/>
+              </a:cxn>
+              <a:cxn ang="0">
+                <a:pos x="connsiteX2" y="connsiteY2"/>
+              </a:cxn>
+              <a:cxn ang="0">
+                <a:pos x="connsiteX3" y="connsiteY3"/>
+              </a:cxn>
+            </a:cxnLst>
+            <a:rect l="l" t="t" r="r" b="b"/>
+            <a:pathLst>
+              <a:path w="4319042" h="6858000">
+                <a:moveTo>
+                  <a:pt x="0" y="0"/>
+                </a:moveTo>
+                <a:lnTo>
+                  <a:pt x="1142888" y="0"/>
+                </a:lnTo>
+                <a:lnTo>
+                  <a:pt x="4319042" y="6858000"/>
+                </a:lnTo>
+                <a:lnTo>
+                  <a:pt x="0" y="6858000"/>
+                </a:lnTo>
+                <a:close/>
+              </a:path>
+            </a:pathLst>
+          </a:custGeom>
+          <a:solidFill>
+            <a:schemeClr val="tx1">
+              <a:alpha val="35000"/>
+            </a:schemeClr>
+          </a:solidFill>
+          <a:ln>
+            <a:noFill/>
+          </a:ln>
+        </p:spPr>
+        <p:style>
+          <a:lnRef idx="2">
+            <a:schemeClr val="accent1">
+              <a:shade val="50000"/>
+            </a:schemeClr>
+          </a:lnRef>
+          <a:fillRef idx="1">
+            <a:schemeClr val="accent1"/>
+          </a:fillRef>
+          <a:effectRef idx="0">
+            <a:schemeClr val="accent1"/>
+          </a:effectRef>
+          <a:fontRef idx="minor">
+            <a:schemeClr val="lt1"/>
+          </a:fontRef>
+        </p:style>
+        <p:txBody>
+          <a:bodyPr wrap="square" rtlCol="0" anchor="ctr">
+            <a:noAutofit/>
+          </a:bodyPr>
+          <a:lstStyle/>
+          <a:p>
+            <a:pPr marL="0" marR="0" lvl="0" indent="0" algn="ctr" defTabSz="914400" rtl="0" eaLnBrk="1" fontAlgn="auto" latinLnBrk="0" hangingPunct="1">
+              <a:lnSpc>
+                <a:spcPct val="100000"/>
+              </a:lnSpc>
+              <a:spcBef>
+                <a:spcPts val="0"/>
+              </a:spcBef>
+              <a:spcAft>
+                <a:spcPts val="0"/>
+              </a:spcAft>
+              <a:buClrTx/>
+              <a:buSzTx/>
+              <a:buFontTx/>
+              <a:buNone/>
+              <a:tabLst/>
+              <a:defRPr/>
+            </a:pPr>
+            <a:endParaRPr kumimoji="0" lang="en-US" sz="1800" b="0" i="0" u="none" strike="noStrike" kern="1200" cap="none" spc="0" normalizeH="0" baseline="0" noProof="0">
+              <a:ln>
+                <a:noFill/>
+              </a:ln>
+              <a:solidFill>
+                <a:prstClr val="white"/>
+              </a:solidFill>
+              <a:effectLst/>
+              <a:uLnTx/>
+              <a:uFillTx/>
+              <a:latin typeface="Calibri" panose="020F0502020204030204"/>
+              <a:ea typeface="+mn-ea"/>
+              <a:cs typeface="+mn-cs"/>
+            </a:endParaRPr>
+          </a:p>
+        </p:txBody>
+      </p:sp>
+      <p:sp>
+        <p:nvSpPr>
+          <p:cNvPr id="2" name="Title 1">
+            <a:extLst>
+              <a:ext uri="{FF2B5EF4-FFF2-40B4-BE49-F238E27FC236}">
+                <a16:creationId xmlns:a16="http://schemas.microsoft.com/office/drawing/2014/main" id="{9FCA7220-D7B3-32FD-EB6A-86B9B5DE97A9}"/>
+              </a:ext>
+            </a:extLst>
+          </p:cNvPr>
+          <p:cNvSpPr>
+            <a:spLocks noGrp="1"/>
+          </p:cNvSpPr>
+          <p:nvPr>
+            <p:ph type="title"/>
+          </p:nvPr>
+        </p:nvSpPr>
+        <p:spPr>
+          <a:xfrm>
+            <a:off x="804672" y="640080"/>
+            <a:ext cx="3282696" cy="5257800"/>
+          </a:xfrm>
+        </p:spPr>
+        <p:txBody>
+          <a:bodyPr>
+            <a:normAutofit/>
+          </a:bodyPr>
+          <a:lstStyle/>
+          <a:p>
+            <a:r>
+              <a:rPr lang="en-US">
+                <a:solidFill>
+                  <a:schemeClr val="bg1"/>
+                </a:solidFill>
+              </a:rPr>
+              <a:t>T</a:t>
+            </a:r>
+            <a:r>
+              <a:rPr lang="en-IL">
+                <a:solidFill>
+                  <a:schemeClr val="bg1"/>
+                </a:solidFill>
+              </a:rPr>
+              <a:t>ry it!</a:t>
+            </a:r>
+          </a:p>
+        </p:txBody>
+      </p:sp>
+      <p:sp>
+        <p:nvSpPr>
+          <p:cNvPr id="3" name="Content Placeholder 2">
+            <a:extLst>
+              <a:ext uri="{FF2B5EF4-FFF2-40B4-BE49-F238E27FC236}">
+                <a16:creationId xmlns:a16="http://schemas.microsoft.com/office/drawing/2014/main" id="{F5DD78D8-C517-49DB-A038-2B923B1BA018}"/>
+              </a:ext>
+            </a:extLst>
+          </p:cNvPr>
+          <p:cNvSpPr>
+            <a:spLocks noGrp="1"/>
+          </p:cNvSpPr>
+          <p:nvPr>
+            <p:ph idx="1"/>
+          </p:nvPr>
+        </p:nvSpPr>
+        <p:spPr>
+          <a:xfrm>
+            <a:off x="5358384" y="640081"/>
+            <a:ext cx="6024654" cy="5257800"/>
+          </a:xfrm>
+        </p:spPr>
+        <p:txBody>
+          <a:bodyPr anchor="ctr">
+            <a:normAutofit/>
+          </a:bodyPr>
+          <a:lstStyle/>
+          <a:p>
+            <a:r>
+              <a:rPr lang="en-US" sz="1100" b="0" i="0">
+                <a:effectLst/>
+                <a:latin typeface="Söhne"/>
+              </a:rPr>
+              <a:t>Task: Create a webpage that demonstrates the use of CSS variables, box shadow, text-align and child selectors</a:t>
+            </a:r>
+          </a:p>
+          <a:p>
+            <a:r>
+              <a:rPr lang="en-US" sz="1100" b="0" i="0">
+                <a:effectLst/>
+                <a:latin typeface="Söhne"/>
+              </a:rPr>
+              <a:t>Instructions:</a:t>
+            </a:r>
+          </a:p>
+          <a:p>
+            <a:pPr>
+              <a:buFont typeface="+mj-lt"/>
+              <a:buAutoNum type="arabicPeriod"/>
+            </a:pPr>
+            <a:r>
+              <a:rPr lang="en-US" sz="1100" b="0" i="0">
+                <a:effectLst/>
+                <a:latin typeface="Söhne"/>
+              </a:rPr>
+              <a:t>Create a new HTML file and a new CSS file.</a:t>
+            </a:r>
+          </a:p>
+          <a:p>
+            <a:pPr>
+              <a:buFont typeface="+mj-lt"/>
+              <a:buAutoNum type="arabicPeriod"/>
+            </a:pPr>
+            <a:r>
+              <a:rPr lang="en-US" sz="1100" b="0" i="0">
+                <a:effectLst/>
+                <a:latin typeface="Söhne"/>
+              </a:rPr>
+              <a:t>In the CSS file, create three CSS variables --main-color, --shadow-size, and --padding-size</a:t>
+            </a:r>
+          </a:p>
+          <a:p>
+            <a:pPr>
+              <a:buFont typeface="+mj-lt"/>
+              <a:buAutoNum type="arabicPeriod"/>
+            </a:pPr>
+            <a:r>
+              <a:rPr lang="en-US" sz="1100" b="0" i="0">
+                <a:effectLst/>
+                <a:latin typeface="Söhne"/>
+              </a:rPr>
+              <a:t>In the HTML file, create a div element with the class "container" to act as the parent element.</a:t>
+            </a:r>
+          </a:p>
+          <a:p>
+            <a:pPr>
+              <a:buFont typeface="+mj-lt"/>
+              <a:buAutoNum type="arabicPeriod"/>
+            </a:pPr>
+            <a:r>
+              <a:rPr lang="en-US" sz="1100" b="0" i="0">
+                <a:effectLst/>
+                <a:latin typeface="Söhne"/>
+              </a:rPr>
+              <a:t>Inside the "container" div, create 3 div elements with the classes "box1", "box2" and "box3" respectively.</a:t>
+            </a:r>
+          </a:p>
+          <a:p>
+            <a:pPr>
+              <a:buFont typeface="+mj-lt"/>
+              <a:buAutoNum type="arabicPeriod"/>
+            </a:pPr>
+            <a:r>
+              <a:rPr lang="en-US" sz="1100" b="0" i="0">
+                <a:effectLst/>
+                <a:latin typeface="Söhne"/>
+              </a:rPr>
+              <a:t>In the CSS file, apply the following styles to the 3 div elements:</a:t>
+            </a:r>
+          </a:p>
+          <a:p>
+            <a:pPr>
+              <a:buFont typeface="Arial" panose="020B0604020202020204" pitchFamily="34" charset="0"/>
+              <a:buChar char="•"/>
+            </a:pPr>
+            <a:r>
+              <a:rPr lang="en-US" sz="1100" b="0" i="0">
+                <a:effectLst/>
+                <a:latin typeface="Söhne"/>
+              </a:rPr>
+              <a:t>Use the CSS variable --main-color to set the background color of each div element.</a:t>
+            </a:r>
+          </a:p>
+          <a:p>
+            <a:pPr>
+              <a:buFont typeface="Arial" panose="020B0604020202020204" pitchFamily="34" charset="0"/>
+              <a:buChar char="•"/>
+            </a:pPr>
+            <a:r>
+              <a:rPr lang="en-US" sz="1100" b="0" i="0">
+                <a:effectLst/>
+                <a:latin typeface="Söhne"/>
+              </a:rPr>
+              <a:t>Use the CSS variable --shadow-size to set the box-shadow property of each div element.</a:t>
+            </a:r>
+          </a:p>
+          <a:p>
+            <a:pPr>
+              <a:buFont typeface="Arial" panose="020B0604020202020204" pitchFamily="34" charset="0"/>
+              <a:buChar char="•"/>
+            </a:pPr>
+            <a:r>
+              <a:rPr lang="en-US" sz="1100" b="0" i="0">
+                <a:effectLst/>
+                <a:latin typeface="Söhne"/>
+              </a:rPr>
+              <a:t>Use the CSS variable --padding-size to set the padding property of each div element.</a:t>
+            </a:r>
+          </a:p>
+          <a:p>
+            <a:pPr>
+              <a:buFont typeface="Arial" panose="020B0604020202020204" pitchFamily="34" charset="0"/>
+              <a:buChar char="•"/>
+            </a:pPr>
+            <a:r>
+              <a:rPr lang="en-US" sz="1100" b="0" i="0">
+                <a:effectLst/>
+                <a:latin typeface="Söhne"/>
+              </a:rPr>
+              <a:t>Use the text-align property to center the text inside each div element.</a:t>
+            </a:r>
+          </a:p>
+          <a:p>
+            <a:pPr>
+              <a:buFont typeface="Arial" panose="020B0604020202020204" pitchFamily="34" charset="0"/>
+              <a:buChar char="•"/>
+            </a:pPr>
+            <a:r>
+              <a:rPr lang="en-US" sz="1100" b="0" i="0">
+                <a:effectLst/>
+                <a:latin typeface="Söhne"/>
+              </a:rPr>
+              <a:t>Use the child selectors to apply different styles to the first and second div elements, such as different font-size, font-weight, and text-transform.</a:t>
+            </a:r>
+          </a:p>
+          <a:p>
+            <a:pPr>
+              <a:buFont typeface="Arial" panose="020B0604020202020204" pitchFamily="34" charset="0"/>
+              <a:buChar char="•"/>
+            </a:pPr>
+            <a:r>
+              <a:rPr lang="en-US" sz="1100" b="0" i="0">
+                <a:effectLst/>
+                <a:latin typeface="Söhne"/>
+              </a:rPr>
+              <a:t>Use the :hover pseudo-class to change the background color of each div element when the user hovers over it.</a:t>
+            </a:r>
+          </a:p>
+          <a:p>
+            <a:pPr>
+              <a:buFont typeface="+mj-lt"/>
+              <a:buAutoNum type="arabicPeriod" startAt="6"/>
+            </a:pPr>
+            <a:r>
+              <a:rPr lang="en-US" sz="1100" b="0" i="0">
+                <a:effectLst/>
+                <a:latin typeface="Söhne"/>
+              </a:rPr>
+              <a:t>Test your webpage in a browser, and make sure that the styles you have applied are working correctly. </a:t>
+            </a:r>
+          </a:p>
+          <a:p>
+            <a:pPr>
+              <a:buFont typeface="+mj-lt"/>
+              <a:buAutoNum type="arabicPeriod" startAt="6"/>
+            </a:pPr>
+            <a:r>
+              <a:rPr lang="en-US" sz="1100" b="0" i="0">
+                <a:effectLst/>
+                <a:latin typeface="Söhne"/>
+              </a:rPr>
+              <a:t>Add some additional styles to make the webpage more visually appealing and interactive, such as hover effect, transitions or animations.</a:t>
+            </a:r>
+          </a:p>
+          <a:p>
+            <a:pPr marL="0" indent="0">
+              <a:buNone/>
+            </a:pPr>
+            <a:endParaRPr lang="en-IL" sz="1100"/>
+          </a:p>
+        </p:txBody>
+      </p:sp>
+    </p:spTree>
+    <p:extLst>
+      <p:ext uri="{BB962C8B-B14F-4D97-AF65-F5344CB8AC3E}">
+        <p14:creationId xmlns:p14="http://schemas.microsoft.com/office/powerpoint/2010/main" val="3722423196"/>
+      </p:ext>
+    </p:extLst>
+  </p:cSld>
+  <p:clrMapOvr>
+    <a:masterClrMapping/>
+  </p:clrMapOvr>
+  <mc:AlternateContent xmlns:mc="http://schemas.openxmlformats.org/markup-compatibility/2006" xmlns:p14="http://schemas.microsoft.com/office/powerpoint/2010/main">
+    <mc:Choice Requires="p14">
+      <p:transition spd="med" p14:dur="700">
+        <p:fade/>
+      </p:transition>
+    </mc:Choice>
+    <mc:Fallback xmlns="">
+      <p:transition spd="med">
+        <p:fade/>
+      </p:transition>
+    </mc:Fallback>
+  </mc:AlternateContent>
+</p:sld>
+</file>
+
+<file path=ppt/slides/slide31.xml><?xml version="1.0" encoding="utf-8"?>
 <p:sld xmlns:a="http://schemas.openxmlformats.org/drawingml/2006/main" xmlns:r="http://schemas.openxmlformats.org/officeDocument/2006/relationships" xmlns:p="http://schemas.openxmlformats.org/presentationml/2006/main">
   <p:cSld>
     <p:bg>
@@ -27677,10 +31087,22 @@
   <p:clrMapOvr>
     <a:masterClrMapping/>
   </p:clrMapOvr>
+  <mc:AlternateContent xmlns:mc="http://schemas.openxmlformats.org/markup-compatibility/2006" xmlns:p14="http://schemas.microsoft.com/office/powerpoint/2010/main">
+    <mc:Choice Requires="p14">
+      <p:transition spd="med" p14:dur="700">
+        <p:fade/>
+      </p:transition>
+    </mc:Choice>
+    <mc:Fallback xmlns="">
+      <p:transition spd="med">
+        <p:fade/>
+      </p:transition>
+    </mc:Fallback>
+  </mc:AlternateContent>
 </p:sld>
 </file>
 
-<file path=ppt/slides/slide31.xml><?xml version="1.0" encoding="utf-8"?>
+<file path=ppt/slides/slide32.xml><?xml version="1.0" encoding="utf-8"?>
 <p:sld xmlns:a="http://schemas.openxmlformats.org/drawingml/2006/main" xmlns:r="http://schemas.openxmlformats.org/officeDocument/2006/relationships" xmlns:p="http://schemas.openxmlformats.org/presentationml/2006/main">
   <p:cSld>
     <p:bg>
@@ -27954,10 +31376,22 @@
   <p:clrMapOvr>
     <a:masterClrMapping/>
   </p:clrMapOvr>
+  <mc:AlternateContent xmlns:mc="http://schemas.openxmlformats.org/markup-compatibility/2006" xmlns:p14="http://schemas.microsoft.com/office/powerpoint/2010/main">
+    <mc:Choice Requires="p14">
+      <p:transition spd="med" p14:dur="700">
+        <p:fade/>
+      </p:transition>
+    </mc:Choice>
+    <mc:Fallback xmlns="">
+      <p:transition spd="med">
+        <p:fade/>
+      </p:transition>
+    </mc:Fallback>
+  </mc:AlternateContent>
 </p:sld>
 </file>
 
-<file path=ppt/slides/slide32.xml><?xml version="1.0" encoding="utf-8"?>
+<file path=ppt/slides/slide33.xml><?xml version="1.0" encoding="utf-8"?>
 <p:sld xmlns:a="http://schemas.openxmlformats.org/drawingml/2006/main" xmlns:r="http://schemas.openxmlformats.org/officeDocument/2006/relationships" xmlns:p="http://schemas.openxmlformats.org/presentationml/2006/main">
   <p:cSld>
     <p:bg>
@@ -28327,10 +31761,22 @@
   <p:clrMapOvr>
     <a:masterClrMapping/>
   </p:clrMapOvr>
+  <mc:AlternateContent xmlns:mc="http://schemas.openxmlformats.org/markup-compatibility/2006" xmlns:p14="http://schemas.microsoft.com/office/powerpoint/2010/main">
+    <mc:Choice Requires="p14">
+      <p:transition spd="med" p14:dur="700">
+        <p:fade/>
+      </p:transition>
+    </mc:Choice>
+    <mc:Fallback xmlns="">
+      <p:transition spd="med">
+        <p:fade/>
+      </p:transition>
+    </mc:Fallback>
+  </mc:AlternateContent>
 </p:sld>
 </file>
 
-<file path=ppt/slides/slide33.xml><?xml version="1.0" encoding="utf-8"?>
+<file path=ppt/slides/slide34.xml><?xml version="1.0" encoding="utf-8"?>
 <p:sld xmlns:a="http://schemas.openxmlformats.org/drawingml/2006/main" xmlns:r="http://schemas.openxmlformats.org/officeDocument/2006/relationships" xmlns:p="http://schemas.openxmlformats.org/presentationml/2006/main">
   <p:cSld>
     <p:bg>
@@ -28835,10 +32281,22 @@
   <p:clrMapOvr>
     <a:masterClrMapping/>
   </p:clrMapOvr>
+  <mc:AlternateContent xmlns:mc="http://schemas.openxmlformats.org/markup-compatibility/2006" xmlns:p14="http://schemas.microsoft.com/office/powerpoint/2010/main">
+    <mc:Choice Requires="p14">
+      <p:transition spd="med" p14:dur="700">
+        <p:fade/>
+      </p:transition>
+    </mc:Choice>
+    <mc:Fallback xmlns="">
+      <p:transition spd="med">
+        <p:fade/>
+      </p:transition>
+    </mc:Fallback>
+  </mc:AlternateContent>
 </p:sld>
 </file>
 
-<file path=ppt/slides/slide34.xml><?xml version="1.0" encoding="utf-8"?>
+<file path=ppt/slides/slide35.xml><?xml version="1.0" encoding="utf-8"?>
 <p:sld xmlns:a="http://schemas.openxmlformats.org/drawingml/2006/main" xmlns:r="http://schemas.openxmlformats.org/officeDocument/2006/relationships" xmlns:p="http://schemas.openxmlformats.org/presentationml/2006/main">
   <p:cSld>
     <p:bg>
@@ -29014,10 +32472,22 @@
   <p:clrMapOvr>
     <a:masterClrMapping/>
   </p:clrMapOvr>
+  <mc:AlternateContent xmlns:mc="http://schemas.openxmlformats.org/markup-compatibility/2006" xmlns:p14="http://schemas.microsoft.com/office/powerpoint/2010/main">
+    <mc:Choice Requires="p14">
+      <p:transition spd="med" p14:dur="700">
+        <p:fade/>
+      </p:transition>
+    </mc:Choice>
+    <mc:Fallback xmlns="">
+      <p:transition spd="med">
+        <p:fade/>
+      </p:transition>
+    </mc:Fallback>
+  </mc:AlternateContent>
 </p:sld>
 </file>
 
-<file path=ppt/slides/slide35.xml><?xml version="1.0" encoding="utf-8"?>
+<file path=ppt/slides/slide36.xml><?xml version="1.0" encoding="utf-8"?>
 <p:sld xmlns:a="http://schemas.openxmlformats.org/drawingml/2006/main" xmlns:r="http://schemas.openxmlformats.org/officeDocument/2006/relationships" xmlns:p="http://schemas.openxmlformats.org/presentationml/2006/main">
   <p:cSld>
     <p:bg>
@@ -29249,12 +32719,35 @@
   <p:clrMapOvr>
     <a:masterClrMapping/>
   </p:clrMapOvr>
+  <mc:AlternateContent xmlns:mc="http://schemas.openxmlformats.org/markup-compatibility/2006" xmlns:p14="http://schemas.microsoft.com/office/powerpoint/2010/main">
+    <mc:Choice Requires="p14">
+      <p:transition spd="med" p14:dur="700">
+        <p:fade/>
+      </p:transition>
+    </mc:Choice>
+    <mc:Fallback xmlns="">
+      <p:transition spd="med">
+        <p:fade/>
+      </p:transition>
+    </mc:Fallback>
+  </mc:AlternateContent>
 </p:sld>
 </file>
 
-<file path=ppt/slides/slide36.xml><?xml version="1.0" encoding="utf-8"?>
+<file path=ppt/slides/slide37.xml><?xml version="1.0" encoding="utf-8"?>
 <p:sld xmlns:a="http://schemas.openxmlformats.org/drawingml/2006/main" xmlns:r="http://schemas.openxmlformats.org/officeDocument/2006/relationships" xmlns:p="http://schemas.openxmlformats.org/presentationml/2006/main">
   <p:cSld>
+    <p:bg>
+      <p:bgPr>
+        <a:solidFill>
+          <a:schemeClr val="bg1">
+            <a:tint val="95000"/>
+            <a:satMod val="170000"/>
+          </a:schemeClr>
+        </a:solidFill>
+        <a:effectLst/>
+      </p:bgPr>
+    </p:bg>
     <p:spTree>
       <p:nvGrpSpPr>
         <p:cNvPr id="1" name=""/>
@@ -29269,6 +32762,66 @@
           <a:chExt cx="0" cy="0"/>
         </a:xfrm>
       </p:grpSpPr>
+      <p:sp useBgFill="1">
+        <p:nvSpPr>
+          <p:cNvPr id="8" name="Rectangle 7">
+            <a:extLst>
+              <a:ext uri="{FF2B5EF4-FFF2-40B4-BE49-F238E27FC236}">
+                <a16:creationId xmlns:a16="http://schemas.microsoft.com/office/drawing/2014/main" id="{AD72D4D1-076F-49D3-9889-EFC4F6D7CA66}"/>
+              </a:ext>
+              <a:ext uri="{C183D7F6-B498-43B3-948B-1728B52AA6E4}">
+                <adec:decorative xmlns:adec="http://schemas.microsoft.com/office/drawing/2017/decorative" val="1"/>
+              </a:ext>
+            </a:extLst>
+          </p:cNvPr>
+          <p:cNvSpPr>
+            <a:spLocks noGrp="1" noRot="1" noChangeAspect="1" noMove="1" noResize="1" noEditPoints="1" noAdjustHandles="1" noChangeArrowheads="1" noChangeShapeType="1" noTextEdit="1"/>
+          </p:cNvSpPr>
+          <p:nvPr>
+            <p:extLst>
+              <p:ext uri="{386F3935-93C4-4BCD-93E2-E3B085C9AB24}">
+                <p16:designElem xmlns:p16="http://schemas.microsoft.com/office/powerpoint/2015/main" val="1"/>
+              </p:ext>
+            </p:extLst>
+          </p:nvPr>
+        </p:nvSpPr>
+        <p:spPr>
+          <a:xfrm>
+            <a:off x="0" y="0"/>
+            <a:ext cx="12188952" cy="6858000"/>
+          </a:xfrm>
+          <a:prstGeom prst="rect">
+            <a:avLst/>
+          </a:prstGeom>
+          <a:ln>
+            <a:noFill/>
+          </a:ln>
+        </p:spPr>
+        <p:style>
+          <a:lnRef idx="2">
+            <a:schemeClr val="accent1">
+              <a:shade val="50000"/>
+            </a:schemeClr>
+          </a:lnRef>
+          <a:fillRef idx="1">
+            <a:schemeClr val="accent1"/>
+          </a:fillRef>
+          <a:effectRef idx="0">
+            <a:schemeClr val="accent1"/>
+          </a:effectRef>
+          <a:fontRef idx="minor">
+            <a:schemeClr val="lt1"/>
+          </a:fontRef>
+        </p:style>
+        <p:txBody>
+          <a:bodyPr rtlCol="0" anchor="ctr"/>
+          <a:lstStyle/>
+          <a:p>
+            <a:pPr algn="ctr"/>
+            <a:endParaRPr lang="en-US"/>
+          </a:p>
+        </p:txBody>
+      </p:sp>
       <p:sp>
         <p:nvSpPr>
           <p:cNvPr id="2" name="Title 1">
@@ -29285,19 +32838,79 @@
             <p:ph type="title"/>
           </p:nvPr>
         </p:nvSpPr>
-        <p:spPr/>
+        <p:spPr>
+          <a:xfrm>
+            <a:off x="838200" y="963877"/>
+            <a:ext cx="3494362" cy="4930246"/>
+          </a:xfrm>
+        </p:spPr>
         <p:txBody>
-          <a:bodyPr/>
+          <a:bodyPr>
+            <a:normAutofit/>
+          </a:bodyPr>
           <a:lstStyle/>
           <a:p>
+            <a:pPr algn="r"/>
             <a:r>
               <a:rPr lang="en-US" dirty="0"/>
               <a:t>opacity</a:t>
             </a:r>
-            <a:endParaRPr lang="en-IL" dirty="0"/>
+            <a:endParaRPr lang="en-IL"/>
           </a:p>
         </p:txBody>
       </p:sp>
+      <p:cxnSp>
+        <p:nvCxnSpPr>
+          <p:cNvPr id="10" name="Straight Connector 9">
+            <a:extLst>
+              <a:ext uri="{FF2B5EF4-FFF2-40B4-BE49-F238E27FC236}">
+                <a16:creationId xmlns:a16="http://schemas.microsoft.com/office/drawing/2014/main" id="{2D72A2C9-F3CA-4216-8BAD-FA4C970C3C4E}"/>
+              </a:ext>
+              <a:ext uri="{C183D7F6-B498-43B3-948B-1728B52AA6E4}">
+                <adec:decorative xmlns:adec="http://schemas.microsoft.com/office/drawing/2017/decorative" val="1"/>
+              </a:ext>
+            </a:extLst>
+          </p:cNvPr>
+          <p:cNvCxnSpPr>
+            <a:cxnSpLocks noGrp="1" noRot="1" noChangeAspect="1" noMove="1" noResize="1" noEditPoints="1" noAdjustHandles="1" noChangeArrowheads="1" noChangeShapeType="1"/>
+          </p:cNvCxnSpPr>
+          <p:nvPr>
+            <p:extLst>
+              <p:ext uri="{386F3935-93C4-4BCD-93E2-E3B085C9AB24}">
+                <p16:designElem xmlns:p16="http://schemas.microsoft.com/office/powerpoint/2015/main" val="1"/>
+              </p:ext>
+            </p:extLst>
+          </p:nvPr>
+        </p:nvCxnSpPr>
+        <p:spPr>
+          <a:xfrm>
+            <a:off x="4654296" y="2057400"/>
+            <a:ext cx="0" cy="2743200"/>
+          </a:xfrm>
+          <a:prstGeom prst="line">
+            <a:avLst/>
+          </a:prstGeom>
+          <a:ln w="15875">
+            <a:solidFill>
+              <a:schemeClr val="tx1"/>
+            </a:solidFill>
+          </a:ln>
+        </p:spPr>
+        <p:style>
+          <a:lnRef idx="1">
+            <a:schemeClr val="accent1"/>
+          </a:lnRef>
+          <a:fillRef idx="0">
+            <a:schemeClr val="accent1"/>
+          </a:fillRef>
+          <a:effectRef idx="0">
+            <a:schemeClr val="accent1"/>
+          </a:effectRef>
+          <a:fontRef idx="minor">
+            <a:schemeClr val="tx1"/>
+          </a:fontRef>
+        </p:style>
+      </p:cxnSp>
       <p:sp>
         <p:nvSpPr>
           <p:cNvPr id="3" name="Content Placeholder 2">
@@ -29314,26 +32927,29 @@
             <p:ph idx="1"/>
           </p:nvPr>
         </p:nvSpPr>
-        <p:spPr/>
+        <p:spPr>
+          <a:xfrm>
+            <a:off x="4976031" y="963877"/>
+            <a:ext cx="6377769" cy="4930246"/>
+          </a:xfrm>
+        </p:spPr>
         <p:txBody>
-          <a:bodyPr/>
+          <a:bodyPr anchor="ctr">
+            <a:normAutofit/>
+          </a:bodyPr>
           <a:lstStyle/>
           <a:p>
-            <a:pPr algn="l"/>
             <a:r>
-              <a:rPr lang="en-US" b="0" i="0" dirty="0">
-                <a:solidFill>
-                  <a:srgbClr val="374151"/>
-                </a:solidFill>
+              <a:rPr lang="en-US" sz="2400" b="0" i="0">
                 <a:effectLst/>
                 <a:latin typeface="Söhne"/>
               </a:rPr>
               <a:t>The opacity property in CSS is used to set the transparency level of an element. The property takes a value between 0 and 1, with 0 being completely transparent and 1 being completely opaque.</a:t>
             </a:r>
             <a:br>
-              <a:rPr lang="en-US" dirty="0"/>
+              <a:rPr lang="en-US" sz="2400"/>
             </a:br>
-            <a:endParaRPr lang="en-IL" dirty="0"/>
+            <a:endParaRPr lang="en-IL" sz="2400"/>
           </a:p>
         </p:txBody>
       </p:sp>
@@ -29345,12 +32961,24 @@
     </p:extLst>
   </p:cSld>
   <p:clrMapOvr>
-    <a:masterClrMapping/>
+    <a:overrideClrMapping bg1="dk1" tx1="lt1" bg2="dk2" tx2="lt2" accent1="accent1" accent2="accent2" accent3="accent3" accent4="accent4" accent5="accent5" accent6="accent6" hlink="hlink" folHlink="folHlink"/>
   </p:clrMapOvr>
+  <mc:AlternateContent xmlns:mc="http://schemas.openxmlformats.org/markup-compatibility/2006" xmlns:p14="http://schemas.microsoft.com/office/powerpoint/2010/main">
+    <mc:Choice Requires="p14">
+      <p:transition spd="med" p14:dur="700">
+        <p:fade/>
+      </p:transition>
+    </mc:Choice>
+    <mc:Fallback xmlns="">
+      <p:transition spd="med">
+        <p:fade/>
+      </p:transition>
+    </mc:Fallback>
+  </mc:AlternateContent>
 </p:sld>
 </file>
 
-<file path=ppt/slides/slide37.xml><?xml version="1.0" encoding="utf-8"?>
+<file path=ppt/slides/slide38.xml><?xml version="1.0" encoding="utf-8"?>
 <p:sld xmlns:a="http://schemas.openxmlformats.org/drawingml/2006/main" xmlns:r="http://schemas.openxmlformats.org/officeDocument/2006/relationships" xmlns:p="http://schemas.openxmlformats.org/presentationml/2006/main">
   <p:cSld>
     <p:bg>
@@ -29856,6 +33484,134 @@
           </a:p>
         </p:txBody>
       </p:sp>
+      <p:sp>
+        <p:nvSpPr>
+          <p:cNvPr id="4" name="TextBox 3">
+            <a:extLst>
+              <a:ext uri="{FF2B5EF4-FFF2-40B4-BE49-F238E27FC236}">
+                <a16:creationId xmlns:a16="http://schemas.microsoft.com/office/drawing/2014/main" id="{B084DE06-8B0E-1033-D256-F970C97D6B54}"/>
+              </a:ext>
+            </a:extLst>
+          </p:cNvPr>
+          <p:cNvSpPr txBox="1"/>
+          <p:nvPr/>
+        </p:nvSpPr>
+        <p:spPr>
+          <a:xfrm>
+            <a:off x="3084576" y="5086134"/>
+            <a:ext cx="4525083" cy="1754326"/>
+          </a:xfrm>
+          <a:prstGeom prst="rect">
+            <a:avLst/>
+          </a:prstGeom>
+          <a:noFill/>
+        </p:spPr>
+        <p:txBody>
+          <a:bodyPr wrap="square" rtlCol="0">
+            <a:spAutoFit/>
+          </a:bodyPr>
+          <a:lstStyle/>
+          <a:p>
+            <a:r>
+              <a:rPr lang="en-US" b="0" i="0" dirty="0">
+                <a:solidFill>
+                  <a:srgbClr val="DF3079"/>
+                </a:solidFill>
+                <a:effectLst/>
+                <a:latin typeface="Söhne Mono"/>
+              </a:rPr>
+              <a:t>.center</a:t>
+            </a:r>
+            <a:r>
+              <a:rPr lang="en-US" b="0" i="0" dirty="0">
+                <a:solidFill>
+                  <a:srgbClr val="FFFFFF"/>
+                </a:solidFill>
+                <a:effectLst/>
+                <a:latin typeface="Söhne Mono"/>
+              </a:rPr>
+              <a:t> </a:t>
+            </a:r>
+            <a:r>
+              <a:rPr lang="en-US" b="0" i="0" dirty="0">
+                <a:effectLst/>
+                <a:latin typeface="Söhne Mono"/>
+              </a:rPr>
+              <a:t>{ </a:t>
+            </a:r>
+          </a:p>
+          <a:p>
+            <a:r>
+              <a:rPr lang="en-US" dirty="0">
+                <a:latin typeface="Söhne Mono"/>
+              </a:rPr>
+              <a:t>	</a:t>
+            </a:r>
+            <a:r>
+              <a:rPr lang="en-US" b="0" i="0" dirty="0">
+                <a:effectLst/>
+                <a:latin typeface="Söhne Mono"/>
+              </a:rPr>
+              <a:t>position: absolute; </a:t>
+            </a:r>
+          </a:p>
+          <a:p>
+            <a:r>
+              <a:rPr lang="en-US" dirty="0">
+                <a:latin typeface="Söhne Mono"/>
+              </a:rPr>
+              <a:t>	</a:t>
+            </a:r>
+            <a:r>
+              <a:rPr lang="en-US" b="0" i="0" dirty="0">
+                <a:effectLst/>
+                <a:latin typeface="Söhne Mono"/>
+              </a:rPr>
+              <a:t>top: 50%;</a:t>
+            </a:r>
+          </a:p>
+          <a:p>
+            <a:r>
+              <a:rPr lang="en-US" dirty="0">
+                <a:latin typeface="Söhne Mono"/>
+              </a:rPr>
+              <a:t>	</a:t>
+            </a:r>
+            <a:r>
+              <a:rPr lang="en-US" b="0" i="0" dirty="0">
+                <a:effectLst/>
+                <a:latin typeface="Söhne Mono"/>
+              </a:rPr>
+              <a:t> left: 50%; </a:t>
+            </a:r>
+          </a:p>
+          <a:p>
+            <a:r>
+              <a:rPr lang="en-US" dirty="0">
+                <a:latin typeface="Söhne Mono"/>
+              </a:rPr>
+              <a:t>	</a:t>
+            </a:r>
+            <a:r>
+              <a:rPr lang="en-US" b="0" i="0" dirty="0">
+                <a:effectLst/>
+                <a:latin typeface="Söhne Mono"/>
+              </a:rPr>
+              <a:t>transform: translate(-50%, -50%);</a:t>
+            </a:r>
+          </a:p>
+          <a:p>
+            <a:r>
+              <a:rPr lang="en-US" b="0" i="0" dirty="0">
+                <a:effectLst/>
+                <a:latin typeface="Söhne Mono"/>
+              </a:rPr>
+              <a:t> }</a:t>
+            </a:r>
+            <a:endParaRPr lang="en-IL" dirty="0"/>
+          </a:p>
+        </p:txBody>
+      </p:sp>
     </p:spTree>
     <p:extLst>
       <p:ext uri="{BB962C8B-B14F-4D97-AF65-F5344CB8AC3E}">
@@ -29866,11 +33622,654 @@
   <p:clrMapOvr>
     <a:masterClrMapping/>
   </p:clrMapOvr>
+  <mc:AlternateContent xmlns:mc="http://schemas.openxmlformats.org/markup-compatibility/2006" xmlns:p14="http://schemas.microsoft.com/office/powerpoint/2010/main">
+    <mc:Choice Requires="p14">
+      <p:transition spd="med" p14:dur="700">
+        <p:fade/>
+      </p:transition>
+    </mc:Choice>
+    <mc:Fallback xmlns="">
+      <p:transition spd="med">
+        <p:fade/>
+      </p:transition>
+    </mc:Fallback>
+  </mc:AlternateContent>
   <p:extLst>
     <p:ext uri="{6950BFC3-D8DA-4A85-94F7-54DA5524770B}">
       <p188:commentRel xmlns:p188="http://schemas.microsoft.com/office/powerpoint/2018/8/main" r:id="rId2"/>
     </p:ext>
   </p:extLst>
+</p:sld>
+</file>
+
+<file path=ppt/slides/slide39.xml><?xml version="1.0" encoding="utf-8"?>
+<p:sld xmlns:a="http://schemas.openxmlformats.org/drawingml/2006/main" xmlns:r="http://schemas.openxmlformats.org/officeDocument/2006/relationships" xmlns:p="http://schemas.openxmlformats.org/presentationml/2006/main">
+  <p:cSld>
+    <p:bg>
+      <p:bgPr>
+        <a:solidFill>
+          <a:schemeClr val="bg1"/>
+        </a:solidFill>
+        <a:effectLst/>
+      </p:bgPr>
+    </p:bg>
+    <p:spTree>
+      <p:nvGrpSpPr>
+        <p:cNvPr id="1" name=""/>
+        <p:cNvGrpSpPr/>
+        <p:nvPr/>
+      </p:nvGrpSpPr>
+      <p:grpSpPr>
+        <a:xfrm>
+          <a:off x="0" y="0"/>
+          <a:ext cx="0" cy="0"/>
+          <a:chOff x="0" y="0"/>
+          <a:chExt cx="0" cy="0"/>
+        </a:xfrm>
+      </p:grpSpPr>
+      <p:sp>
+        <p:nvSpPr>
+          <p:cNvPr id="22" name="Rectangle 11">
+            <a:extLst>
+              <a:ext uri="{FF2B5EF4-FFF2-40B4-BE49-F238E27FC236}">
+                <a16:creationId xmlns:a16="http://schemas.microsoft.com/office/drawing/2014/main" id="{0953DB5D-0A37-4498-852C-604ADD855212}"/>
+              </a:ext>
+              <a:ext uri="{C183D7F6-B498-43B3-948B-1728B52AA6E4}">
+                <adec:decorative xmlns:adec="http://schemas.microsoft.com/office/drawing/2017/decorative" val="1"/>
+              </a:ext>
+            </a:extLst>
+          </p:cNvPr>
+          <p:cNvSpPr>
+            <a:spLocks noGrp="1" noRot="1" noChangeAspect="1" noMove="1" noResize="1" noEditPoints="1" noAdjustHandles="1" noChangeArrowheads="1" noChangeShapeType="1" noTextEdit="1"/>
+          </p:cNvSpPr>
+          <p:nvPr>
+            <p:extLst>
+              <p:ext uri="{386F3935-93C4-4BCD-93E2-E3B085C9AB24}">
+                <p16:designElem xmlns:p16="http://schemas.microsoft.com/office/powerpoint/2015/main" val="1"/>
+              </p:ext>
+            </p:extLst>
+          </p:nvPr>
+        </p:nvSpPr>
+        <p:spPr>
+          <a:xfrm>
+            <a:off x="7521959" y="-1"/>
+            <a:ext cx="4670042" cy="6858001"/>
+          </a:xfrm>
+          <a:prstGeom prst="rect">
+            <a:avLst/>
+          </a:prstGeom>
+          <a:solidFill>
+            <a:schemeClr val="tx1"/>
+          </a:solidFill>
+          <a:ln>
+            <a:noFill/>
+          </a:ln>
+        </p:spPr>
+        <p:style>
+          <a:lnRef idx="2">
+            <a:schemeClr val="accent1">
+              <a:shade val="50000"/>
+            </a:schemeClr>
+          </a:lnRef>
+          <a:fillRef idx="1">
+            <a:schemeClr val="accent1"/>
+          </a:fillRef>
+          <a:effectRef idx="0">
+            <a:schemeClr val="accent1"/>
+          </a:effectRef>
+          <a:fontRef idx="minor">
+            <a:schemeClr val="lt1"/>
+          </a:fontRef>
+        </p:style>
+        <p:txBody>
+          <a:bodyPr rtlCol="0" anchor="ctr"/>
+          <a:lstStyle/>
+          <a:p>
+            <a:pPr marL="0" marR="0" lvl="0" indent="0" algn="ctr" defTabSz="914400" rtl="0" eaLnBrk="1" fontAlgn="auto" latinLnBrk="0" hangingPunct="1">
+              <a:lnSpc>
+                <a:spcPct val="100000"/>
+              </a:lnSpc>
+              <a:spcBef>
+                <a:spcPts val="0"/>
+              </a:spcBef>
+              <a:spcAft>
+                <a:spcPts val="0"/>
+              </a:spcAft>
+              <a:buClrTx/>
+              <a:buSzTx/>
+              <a:buFontTx/>
+              <a:buNone/>
+              <a:tabLst/>
+              <a:defRPr/>
+            </a:pPr>
+            <a:endParaRPr kumimoji="0" lang="en-US" sz="1800" b="0" i="0" u="none" strike="noStrike" kern="1200" cap="none" spc="0" normalizeH="0" baseline="0" noProof="0">
+              <a:ln>
+                <a:noFill/>
+              </a:ln>
+              <a:solidFill>
+                <a:prstClr val="white"/>
+              </a:solidFill>
+              <a:effectLst/>
+              <a:uLnTx/>
+              <a:uFillTx/>
+              <a:latin typeface="Calibri" panose="020F0502020204030204"/>
+              <a:ea typeface="+mn-ea"/>
+              <a:cs typeface="+mn-cs"/>
+            </a:endParaRPr>
+          </a:p>
+        </p:txBody>
+      </p:sp>
+      <p:sp useBgFill="1">
+        <p:nvSpPr>
+          <p:cNvPr id="23" name="Freeform: Shape 13">
+            <a:extLst>
+              <a:ext uri="{FF2B5EF4-FFF2-40B4-BE49-F238E27FC236}">
+                <a16:creationId xmlns:a16="http://schemas.microsoft.com/office/drawing/2014/main" id="{52B46D5E-7F74-4741-9FF9-3E105C9570B9}"/>
+              </a:ext>
+              <a:ext uri="{C183D7F6-B498-43B3-948B-1728B52AA6E4}">
+                <adec:decorative xmlns:adec="http://schemas.microsoft.com/office/drawing/2017/decorative" val="1"/>
+              </a:ext>
+            </a:extLst>
+          </p:cNvPr>
+          <p:cNvSpPr>
+            <a:spLocks noGrp="1" noRot="1" noChangeAspect="1" noMove="1" noResize="1" noEditPoints="1" noAdjustHandles="1" noChangeArrowheads="1" noChangeShapeType="1" noTextEdit="1"/>
+          </p:cNvSpPr>
+          <p:nvPr>
+            <p:extLst>
+              <p:ext uri="{386F3935-93C4-4BCD-93E2-E3B085C9AB24}">
+                <p16:designElem xmlns:p16="http://schemas.microsoft.com/office/powerpoint/2015/main" val="1"/>
+              </p:ext>
+            </p:extLst>
+          </p:nvPr>
+        </p:nvSpPr>
+        <p:spPr bwMode="auto">
+          <a:xfrm rot="5400000" flipV="1">
+            <a:off x="512234" y="-512235"/>
+            <a:ext cx="6858001" cy="7882470"/>
+          </a:xfrm>
+          <a:custGeom>
+            <a:avLst/>
+            <a:gdLst>
+              <a:gd name="connsiteX0" fmla="*/ 0 w 6858001"/>
+              <a:gd name="connsiteY0" fmla="*/ 0 h 7882470"/>
+              <a:gd name="connsiteX1" fmla="*/ 0 w 6858001"/>
+              <a:gd name="connsiteY1" fmla="*/ 1067477 h 7882470"/>
+              <a:gd name="connsiteX2" fmla="*/ 0 w 6858001"/>
+              <a:gd name="connsiteY2" fmla="*/ 2201779 h 7882470"/>
+              <a:gd name="connsiteX3" fmla="*/ 0 w 6858001"/>
+              <a:gd name="connsiteY3" fmla="*/ 7552944 h 7882470"/>
+              <a:gd name="connsiteX4" fmla="*/ 1 w 6858001"/>
+              <a:gd name="connsiteY4" fmla="*/ 7552944 h 7882470"/>
+              <a:gd name="connsiteX5" fmla="*/ 1 w 6858001"/>
+              <a:gd name="connsiteY5" fmla="*/ 7584020 h 7882470"/>
+              <a:gd name="connsiteX6" fmla="*/ 1228295 w 6858001"/>
+              <a:gd name="connsiteY6" fmla="*/ 7584020 h 7882470"/>
+              <a:gd name="connsiteX7" fmla="*/ 1609295 w 6858001"/>
+              <a:gd name="connsiteY7" fmla="*/ 7869770 h 7882470"/>
+              <a:gd name="connsiteX8" fmla="*/ 1617762 w 6858001"/>
+              <a:gd name="connsiteY8" fmla="*/ 7872945 h 7882470"/>
+              <a:gd name="connsiteX9" fmla="*/ 1630461 w 6858001"/>
+              <a:gd name="connsiteY9" fmla="*/ 7877708 h 7882470"/>
+              <a:gd name="connsiteX10" fmla="*/ 1643162 w 6858001"/>
+              <a:gd name="connsiteY10" fmla="*/ 7882470 h 7882470"/>
+              <a:gd name="connsiteX11" fmla="*/ 1653745 w 6858001"/>
+              <a:gd name="connsiteY11" fmla="*/ 7882470 h 7882470"/>
+              <a:gd name="connsiteX12" fmla="*/ 1666445 w 6858001"/>
+              <a:gd name="connsiteY12" fmla="*/ 7882470 h 7882470"/>
+              <a:gd name="connsiteX13" fmla="*/ 1677028 w 6858001"/>
+              <a:gd name="connsiteY13" fmla="*/ 7877708 h 7882470"/>
+              <a:gd name="connsiteX14" fmla="*/ 1689728 w 6858001"/>
+              <a:gd name="connsiteY14" fmla="*/ 7872945 h 7882470"/>
+              <a:gd name="connsiteX15" fmla="*/ 1698195 w 6858001"/>
+              <a:gd name="connsiteY15" fmla="*/ 7869770 h 7882470"/>
+              <a:gd name="connsiteX16" fmla="*/ 2079195 w 6858001"/>
+              <a:gd name="connsiteY16" fmla="*/ 7584020 h 7882470"/>
+              <a:gd name="connsiteX17" fmla="*/ 6858001 w 6858001"/>
+              <a:gd name="connsiteY17" fmla="*/ 7584020 h 7882470"/>
+              <a:gd name="connsiteX18" fmla="*/ 6858001 w 6858001"/>
+              <a:gd name="connsiteY18" fmla="*/ 5696482 h 7882470"/>
+              <a:gd name="connsiteX19" fmla="*/ 6858000 w 6858001"/>
+              <a:gd name="connsiteY19" fmla="*/ 5696482 h 7882470"/>
+              <a:gd name="connsiteX20" fmla="*/ 6858000 w 6858001"/>
+              <a:gd name="connsiteY20" fmla="*/ 2201779 h 7882470"/>
+              <a:gd name="connsiteX21" fmla="*/ 6858000 w 6858001"/>
+              <a:gd name="connsiteY21" fmla="*/ 1067477 h 7882470"/>
+              <a:gd name="connsiteX22" fmla="*/ 6858000 w 6858001"/>
+              <a:gd name="connsiteY22" fmla="*/ 0 h 7882470"/>
+            </a:gdLst>
+            <a:ahLst/>
+            <a:cxnLst>
+              <a:cxn ang="0">
+                <a:pos x="connsiteX0" y="connsiteY0"/>
+              </a:cxn>
+              <a:cxn ang="0">
+                <a:pos x="connsiteX1" y="connsiteY1"/>
+              </a:cxn>
+              <a:cxn ang="0">
+                <a:pos x="connsiteX2" y="connsiteY2"/>
+              </a:cxn>
+              <a:cxn ang="0">
+                <a:pos x="connsiteX3" y="connsiteY3"/>
+              </a:cxn>
+              <a:cxn ang="0">
+                <a:pos x="connsiteX4" y="connsiteY4"/>
+              </a:cxn>
+              <a:cxn ang="0">
+                <a:pos x="connsiteX5" y="connsiteY5"/>
+              </a:cxn>
+              <a:cxn ang="0">
+                <a:pos x="connsiteX6" y="connsiteY6"/>
+              </a:cxn>
+              <a:cxn ang="0">
+                <a:pos x="connsiteX7" y="connsiteY7"/>
+              </a:cxn>
+              <a:cxn ang="0">
+                <a:pos x="connsiteX8" y="connsiteY8"/>
+              </a:cxn>
+              <a:cxn ang="0">
+                <a:pos x="connsiteX9" y="connsiteY9"/>
+              </a:cxn>
+              <a:cxn ang="0">
+                <a:pos x="connsiteX10" y="connsiteY10"/>
+              </a:cxn>
+              <a:cxn ang="0">
+                <a:pos x="connsiteX11" y="connsiteY11"/>
+              </a:cxn>
+              <a:cxn ang="0">
+                <a:pos x="connsiteX12" y="connsiteY12"/>
+              </a:cxn>
+              <a:cxn ang="0">
+                <a:pos x="connsiteX13" y="connsiteY13"/>
+              </a:cxn>
+              <a:cxn ang="0">
+                <a:pos x="connsiteX14" y="connsiteY14"/>
+              </a:cxn>
+              <a:cxn ang="0">
+                <a:pos x="connsiteX15" y="connsiteY15"/>
+              </a:cxn>
+              <a:cxn ang="0">
+                <a:pos x="connsiteX16" y="connsiteY16"/>
+              </a:cxn>
+              <a:cxn ang="0">
+                <a:pos x="connsiteX17" y="connsiteY17"/>
+              </a:cxn>
+              <a:cxn ang="0">
+                <a:pos x="connsiteX18" y="connsiteY18"/>
+              </a:cxn>
+              <a:cxn ang="0">
+                <a:pos x="connsiteX19" y="connsiteY19"/>
+              </a:cxn>
+              <a:cxn ang="0">
+                <a:pos x="connsiteX20" y="connsiteY20"/>
+              </a:cxn>
+              <a:cxn ang="0">
+                <a:pos x="connsiteX21" y="connsiteY21"/>
+              </a:cxn>
+              <a:cxn ang="0">
+                <a:pos x="connsiteX22" y="connsiteY22"/>
+              </a:cxn>
+            </a:cxnLst>
+            <a:rect l="l" t="t" r="r" b="b"/>
+            <a:pathLst>
+              <a:path w="6858001" h="7882470">
+                <a:moveTo>
+                  <a:pt x="0" y="0"/>
+                </a:moveTo>
+                <a:lnTo>
+                  <a:pt x="0" y="1067477"/>
+                </a:lnTo>
+                <a:lnTo>
+                  <a:pt x="0" y="2201779"/>
+                </a:lnTo>
+                <a:lnTo>
+                  <a:pt x="0" y="7552944"/>
+                </a:lnTo>
+                <a:lnTo>
+                  <a:pt x="1" y="7552944"/>
+                </a:lnTo>
+                <a:lnTo>
+                  <a:pt x="1" y="7584020"/>
+                </a:lnTo>
+                <a:lnTo>
+                  <a:pt x="1228295" y="7584020"/>
+                </a:lnTo>
+                <a:lnTo>
+                  <a:pt x="1609295" y="7869770"/>
+                </a:lnTo>
+                <a:lnTo>
+                  <a:pt x="1617762" y="7872945"/>
+                </a:lnTo>
+                <a:lnTo>
+                  <a:pt x="1630461" y="7877708"/>
+                </a:lnTo>
+                <a:lnTo>
+                  <a:pt x="1643162" y="7882470"/>
+                </a:lnTo>
+                <a:lnTo>
+                  <a:pt x="1653745" y="7882470"/>
+                </a:lnTo>
+                <a:lnTo>
+                  <a:pt x="1666445" y="7882470"/>
+                </a:lnTo>
+                <a:lnTo>
+                  <a:pt x="1677028" y="7877708"/>
+                </a:lnTo>
+                <a:lnTo>
+                  <a:pt x="1689728" y="7872945"/>
+                </a:lnTo>
+                <a:lnTo>
+                  <a:pt x="1698195" y="7869770"/>
+                </a:lnTo>
+                <a:lnTo>
+                  <a:pt x="2079195" y="7584020"/>
+                </a:lnTo>
+                <a:lnTo>
+                  <a:pt x="6858001" y="7584020"/>
+                </a:lnTo>
+                <a:lnTo>
+                  <a:pt x="6858001" y="5696482"/>
+                </a:lnTo>
+                <a:lnTo>
+                  <a:pt x="6858000" y="5696482"/>
+                </a:lnTo>
+                <a:lnTo>
+                  <a:pt x="6858000" y="2201779"/>
+                </a:lnTo>
+                <a:lnTo>
+                  <a:pt x="6858000" y="1067477"/>
+                </a:lnTo>
+                <a:lnTo>
+                  <a:pt x="6858000" y="0"/>
+                </a:lnTo>
+                <a:close/>
+              </a:path>
+            </a:pathLst>
+          </a:custGeom>
+          <a:ln>
+            <a:noFill/>
+          </a:ln>
+          <a:extLst>
+            <a:ext uri="{91240B29-F687-4f45-9708-019B960494DF}">
+              <a14:hiddenLine xmlns="" xmlns:p14="http://schemas.microsoft.com/office/powerpoint/2010/main" xmlns:a14="http://schemas.microsoft.com/office/drawing/2010/main" xmlns:a16="http://schemas.microsoft.com/office/drawing/2014/main" w="9525">
+                <a:solidFill>
+                  <a:srgbClr val="000000"/>
+                </a:solidFill>
+                <a:round/>
+                <a:headEnd/>
+                <a:tailEnd/>
+              </a14:hiddenLine>
+            </a:ext>
+          </a:extLst>
+        </p:spPr>
+        <p:style>
+          <a:lnRef idx="1">
+            <a:schemeClr val="accent1"/>
+          </a:lnRef>
+          <a:fillRef idx="3">
+            <a:schemeClr val="accent1"/>
+          </a:fillRef>
+          <a:effectRef idx="2">
+            <a:schemeClr val="accent1"/>
+          </a:effectRef>
+          <a:fontRef idx="minor">
+            <a:schemeClr val="lt1"/>
+          </a:fontRef>
+        </p:style>
+      </p:sp>
+      <p:sp>
+        <p:nvSpPr>
+          <p:cNvPr id="2" name="Title 1">
+            <a:extLst>
+              <a:ext uri="{FF2B5EF4-FFF2-40B4-BE49-F238E27FC236}">
+                <a16:creationId xmlns:a16="http://schemas.microsoft.com/office/drawing/2014/main" id="{1822485E-B533-4199-B6EE-43A7C0ADBE8D}"/>
+              </a:ext>
+            </a:extLst>
+          </p:cNvPr>
+          <p:cNvSpPr>
+            <a:spLocks noGrp="1"/>
+          </p:cNvSpPr>
+          <p:nvPr>
+            <p:ph type="title"/>
+          </p:nvPr>
+        </p:nvSpPr>
+        <p:spPr>
+          <a:xfrm>
+            <a:off x="832777" y="885717"/>
+            <a:ext cx="5944308" cy="1559412"/>
+          </a:xfrm>
+        </p:spPr>
+        <p:txBody>
+          <a:bodyPr>
+            <a:normAutofit/>
+          </a:bodyPr>
+          <a:lstStyle/>
+          <a:p>
+            <a:r>
+              <a:rPr lang="en-IL"/>
+              <a:t>tables</a:t>
+            </a:r>
+            <a:endParaRPr lang="en-IL" dirty="0"/>
+          </a:p>
+        </p:txBody>
+      </p:sp>
+      <p:sp>
+        <p:nvSpPr>
+          <p:cNvPr id="3" name="Content Placeholder 2">
+            <a:extLst>
+              <a:ext uri="{FF2B5EF4-FFF2-40B4-BE49-F238E27FC236}">
+                <a16:creationId xmlns:a16="http://schemas.microsoft.com/office/drawing/2014/main" id="{5E1D208B-DA41-E333-0FE8-7F7D939AF99B}"/>
+              </a:ext>
+            </a:extLst>
+          </p:cNvPr>
+          <p:cNvSpPr>
+            <a:spLocks noGrp="1"/>
+          </p:cNvSpPr>
+          <p:nvPr>
+            <p:ph idx="1"/>
+          </p:nvPr>
+        </p:nvSpPr>
+        <p:spPr>
+          <a:xfrm>
+            <a:off x="852985" y="2700810"/>
+            <a:ext cx="5924099" cy="3271473"/>
+          </a:xfrm>
+        </p:spPr>
+        <p:txBody>
+          <a:bodyPr>
+            <a:normAutofit/>
+          </a:bodyPr>
+          <a:lstStyle/>
+          <a:p>
+            <a:r>
+              <a:rPr lang="en-US" sz="2400" b="0" i="0">
+                <a:effectLst/>
+                <a:latin typeface="Söhne"/>
+              </a:rPr>
+              <a:t>HTML tables are used to display data in a tabular format. Tables are divided into rows (with the </a:t>
+            </a:r>
+            <a:r>
+              <a:rPr lang="en-US" sz="2400"/>
+              <a:t>tr</a:t>
+            </a:r>
+            <a:r>
+              <a:rPr lang="en-US" sz="2400" b="0" i="0">
+                <a:effectLst/>
+                <a:latin typeface="Söhne"/>
+              </a:rPr>
+              <a:t> element), and each row is divided into cells (with the </a:t>
+            </a:r>
+            <a:r>
+              <a:rPr lang="en-US" sz="2400"/>
+              <a:t>td</a:t>
+            </a:r>
+            <a:r>
+              <a:rPr lang="en-US" sz="2400" b="0" i="0">
+                <a:effectLst/>
+                <a:latin typeface="Söhne"/>
+              </a:rPr>
+              <a:t> element). You can also use the </a:t>
+            </a:r>
+            <a:r>
+              <a:rPr lang="en-US" sz="2400"/>
+              <a:t>th</a:t>
+            </a:r>
+            <a:r>
+              <a:rPr lang="en-US" sz="2400" b="0" i="0">
+                <a:effectLst/>
+                <a:latin typeface="Söhne"/>
+              </a:rPr>
+              <a:t> element to define table headers.</a:t>
+            </a:r>
+            <a:endParaRPr lang="en-IL" sz="2400"/>
+          </a:p>
+        </p:txBody>
+      </p:sp>
+      <p:sp>
+        <p:nvSpPr>
+          <p:cNvPr id="16" name="Rounded Rectangle 17">
+            <a:extLst>
+              <a:ext uri="{FF2B5EF4-FFF2-40B4-BE49-F238E27FC236}">
+                <a16:creationId xmlns:a16="http://schemas.microsoft.com/office/drawing/2014/main" id="{B97A76A2-B7F2-4D75-AB9E-71FB748825F4}"/>
+              </a:ext>
+              <a:ext uri="{C183D7F6-B498-43B3-948B-1728B52AA6E4}">
+                <adec:decorative xmlns:adec="http://schemas.microsoft.com/office/drawing/2017/decorative" val="1"/>
+              </a:ext>
+            </a:extLst>
+          </p:cNvPr>
+          <p:cNvSpPr>
+            <a:spLocks noGrp="1" noRot="1" noChangeAspect="1" noMove="1" noResize="1" noEditPoints="1" noAdjustHandles="1" noChangeArrowheads="1" noChangeShapeType="1" noTextEdit="1"/>
+          </p:cNvSpPr>
+          <p:nvPr>
+            <p:extLst>
+              <p:ext uri="{386F3935-93C4-4BCD-93E2-E3B085C9AB24}">
+                <p16:designElem xmlns:p16="http://schemas.microsoft.com/office/powerpoint/2015/main" val="1"/>
+              </p:ext>
+            </p:extLst>
+          </p:nvPr>
+        </p:nvSpPr>
+        <p:spPr>
+          <a:xfrm>
+            <a:off x="8193746" y="958640"/>
+            <a:ext cx="3354790" cy="3639118"/>
+          </a:xfrm>
+          <a:prstGeom prst="roundRect">
+            <a:avLst>
+              <a:gd name="adj" fmla="val 3513"/>
+            </a:avLst>
+          </a:prstGeom>
+          <a:solidFill>
+            <a:schemeClr val="tx1"/>
+          </a:solidFill>
+          <a:ln>
+            <a:solidFill>
+              <a:schemeClr val="bg1"/>
+            </a:solidFill>
+          </a:ln>
+          <a:effectLst/>
+        </p:spPr>
+        <p:style>
+          <a:lnRef idx="2">
+            <a:schemeClr val="accent1">
+              <a:shade val="50000"/>
+            </a:schemeClr>
+          </a:lnRef>
+          <a:fillRef idx="1">
+            <a:schemeClr val="accent1"/>
+          </a:fillRef>
+          <a:effectRef idx="0">
+            <a:schemeClr val="accent1"/>
+          </a:effectRef>
+          <a:fontRef idx="minor">
+            <a:schemeClr val="lt1"/>
+          </a:fontRef>
+        </p:style>
+        <p:txBody>
+          <a:bodyPr rtlCol="0" anchor="ctr"/>
+          <a:lstStyle/>
+          <a:p>
+            <a:pPr marL="0" marR="0" lvl="0" indent="0" algn="ctr" defTabSz="914400" rtl="0" eaLnBrk="1" fontAlgn="auto" latinLnBrk="0" hangingPunct="1">
+              <a:lnSpc>
+                <a:spcPct val="100000"/>
+              </a:lnSpc>
+              <a:spcBef>
+                <a:spcPts val="0"/>
+              </a:spcBef>
+              <a:spcAft>
+                <a:spcPts val="0"/>
+              </a:spcAft>
+              <a:buClrTx/>
+              <a:buSzTx/>
+              <a:buFontTx/>
+              <a:buNone/>
+              <a:tabLst/>
+              <a:defRPr/>
+            </a:pPr>
+            <a:endParaRPr kumimoji="0" lang="en-US" sz="1800" b="0" i="0" u="none" strike="noStrike" kern="1200" cap="none" spc="0" normalizeH="0" baseline="0" noProof="0">
+              <a:ln>
+                <a:noFill/>
+              </a:ln>
+              <a:solidFill>
+                <a:prstClr val="white"/>
+              </a:solidFill>
+              <a:effectLst/>
+              <a:uLnTx/>
+              <a:uFillTx/>
+              <a:latin typeface="Calibri" panose="020F0502020204030204"/>
+              <a:ea typeface="+mn-ea"/>
+              <a:cs typeface="+mn-cs"/>
+            </a:endParaRPr>
+          </a:p>
+        </p:txBody>
+      </p:sp>
+      <p:pic>
+        <p:nvPicPr>
+          <p:cNvPr id="7" name="Graphic 6" descr="File HTML">
+            <a:extLst>
+              <a:ext uri="{FF2B5EF4-FFF2-40B4-BE49-F238E27FC236}">
+                <a16:creationId xmlns:a16="http://schemas.microsoft.com/office/drawing/2014/main" id="{EE8903D3-C28E-3429-4E79-A3ACA118C144}"/>
+              </a:ext>
+            </a:extLst>
+          </p:cNvPr>
+          <p:cNvPicPr>
+            <a:picLocks noChangeAspect="1"/>
+          </p:cNvPicPr>
+          <p:nvPr/>
+        </p:nvPicPr>
+        <p:blipFill>
+          <a:blip r:embed="rId2">
+            <a:extLst>
+              <a:ext uri="{28A0092B-C50C-407E-A947-70E740481C1C}">
+                <a14:useLocalDpi xmlns:a14="http://schemas.microsoft.com/office/drawing/2010/main" val="0"/>
+              </a:ext>
+              <a:ext uri="{96DAC541-7B7A-43D3-8B79-37D633B846F1}">
+                <asvg:svgBlip xmlns:asvg="http://schemas.microsoft.com/office/drawing/2016/SVG/main" r:embed="rId3"/>
+              </a:ext>
+            </a:extLst>
+          </a:blip>
+          <a:stretch>
+            <a:fillRect/>
+          </a:stretch>
+        </p:blipFill>
+        <p:spPr>
+          <a:xfrm>
+            <a:off x="8503606" y="1410663"/>
+            <a:ext cx="2735071" cy="2735071"/>
+          </a:xfrm>
+          <a:prstGeom prst="rect">
+            <a:avLst/>
+          </a:prstGeom>
+        </p:spPr>
+      </p:pic>
+    </p:spTree>
+    <p:extLst>
+      <p:ext uri="{BB962C8B-B14F-4D97-AF65-F5344CB8AC3E}">
+        <p14:creationId xmlns:p14="http://schemas.microsoft.com/office/powerpoint/2010/main" val="4000669449"/>
+      </p:ext>
+    </p:extLst>
+  </p:cSld>
+  <p:clrMapOvr>
+    <a:overrideClrMapping bg1="dk1" tx1="lt1" bg2="dk2" tx2="lt2" accent1="accent1" accent2="accent2" accent3="accent3" accent4="accent4" accent5="accent5" accent6="accent6" hlink="hlink" folHlink="folHlink"/>
+  </p:clrMapOvr>
 </p:sld>
 </file>
 
@@ -30491,16 +34890,997 @@
   </p:clrMapOvr>
   <mc:AlternateContent xmlns:mc="http://schemas.openxmlformats.org/markup-compatibility/2006" xmlns:p14="http://schemas.microsoft.com/office/powerpoint/2010/main">
     <mc:Choice Requires="p14">
-      <p:transition spd="slow" p14:dur="3900">
-        <p14:glitter pattern="hexagon"/>
+      <p:transition spd="med" p14:dur="700">
+        <p:fade/>
       </p:transition>
     </mc:Choice>
     <mc:Fallback xmlns="">
-      <p:transition spd="slow">
+      <p:transition spd="med">
         <p:fade/>
       </p:transition>
     </mc:Fallback>
   </mc:AlternateContent>
+</p:sld>
+</file>
+
+<file path=ppt/slides/slide40.xml><?xml version="1.0" encoding="utf-8"?>
+<p:sld xmlns:a="http://schemas.openxmlformats.org/drawingml/2006/main" xmlns:r="http://schemas.openxmlformats.org/officeDocument/2006/relationships" xmlns:p="http://schemas.openxmlformats.org/presentationml/2006/main">
+  <p:cSld>
+    <p:bg>
+      <p:bgPr>
+        <a:solidFill>
+          <a:schemeClr val="bg1"/>
+        </a:solidFill>
+        <a:effectLst/>
+      </p:bgPr>
+    </p:bg>
+    <p:spTree>
+      <p:nvGrpSpPr>
+        <p:cNvPr id="1" name=""/>
+        <p:cNvGrpSpPr/>
+        <p:nvPr/>
+      </p:nvGrpSpPr>
+      <p:grpSpPr>
+        <a:xfrm>
+          <a:off x="0" y="0"/>
+          <a:ext cx="0" cy="0"/>
+          <a:chOff x="0" y="0"/>
+          <a:chExt cx="0" cy="0"/>
+        </a:xfrm>
+      </p:grpSpPr>
+      <p:sp useBgFill="1">
+        <p:nvSpPr>
+          <p:cNvPr id="9" name="Rectangle 8">
+            <a:extLst>
+              <a:ext uri="{FF2B5EF4-FFF2-40B4-BE49-F238E27FC236}">
+                <a16:creationId xmlns:a16="http://schemas.microsoft.com/office/drawing/2014/main" id="{E51BA4DF-2BD4-4EC2-B1DB-B27C8AC71864}"/>
+              </a:ext>
+              <a:ext uri="{C183D7F6-B498-43B3-948B-1728B52AA6E4}">
+                <adec:decorative xmlns:adec="http://schemas.microsoft.com/office/drawing/2017/decorative" val="1"/>
+              </a:ext>
+            </a:extLst>
+          </p:cNvPr>
+          <p:cNvSpPr>
+            <a:spLocks noGrp="1" noRot="1" noChangeAspect="1" noMove="1" noResize="1" noEditPoints="1" noAdjustHandles="1" noChangeArrowheads="1" noChangeShapeType="1" noTextEdit="1"/>
+          </p:cNvSpPr>
+          <p:nvPr>
+            <p:extLst>
+              <p:ext uri="{386F3935-93C4-4BCD-93E2-E3B085C9AB24}">
+                <p16:designElem xmlns:p16="http://schemas.microsoft.com/office/powerpoint/2015/main" val="1"/>
+              </p:ext>
+            </p:extLst>
+          </p:nvPr>
+        </p:nvSpPr>
+        <p:spPr>
+          <a:xfrm>
+            <a:off x="-1" y="0"/>
+            <a:ext cx="12188952" cy="6858000"/>
+          </a:xfrm>
+          <a:prstGeom prst="rect">
+            <a:avLst/>
+          </a:prstGeom>
+          <a:ln>
+            <a:noFill/>
+          </a:ln>
+        </p:spPr>
+        <p:style>
+          <a:lnRef idx="2">
+            <a:schemeClr val="accent1">
+              <a:shade val="50000"/>
+            </a:schemeClr>
+          </a:lnRef>
+          <a:fillRef idx="1">
+            <a:schemeClr val="accent1"/>
+          </a:fillRef>
+          <a:effectRef idx="0">
+            <a:schemeClr val="accent1"/>
+          </a:effectRef>
+          <a:fontRef idx="minor">
+            <a:schemeClr val="lt1"/>
+          </a:fontRef>
+        </p:style>
+        <p:txBody>
+          <a:bodyPr rtlCol="0" anchor="ctr"/>
+          <a:lstStyle/>
+          <a:p>
+            <a:pPr algn="ctr"/>
+            <a:endParaRPr lang="en-US"/>
+          </a:p>
+        </p:txBody>
+      </p:sp>
+      <p:sp>
+        <p:nvSpPr>
+          <p:cNvPr id="2" name="Title 1">
+            <a:extLst>
+              <a:ext uri="{FF2B5EF4-FFF2-40B4-BE49-F238E27FC236}">
+                <a16:creationId xmlns:a16="http://schemas.microsoft.com/office/drawing/2014/main" id="{0E0597E8-5D46-DDBD-9EFE-22261BE4EEF2}"/>
+              </a:ext>
+            </a:extLst>
+          </p:cNvPr>
+          <p:cNvSpPr>
+            <a:spLocks noGrp="1"/>
+          </p:cNvSpPr>
+          <p:nvPr>
+            <p:ph type="title"/>
+          </p:nvPr>
+        </p:nvSpPr>
+        <p:spPr>
+          <a:xfrm>
+            <a:off x="4553733" y="548464"/>
+            <a:ext cx="6798541" cy="1675623"/>
+          </a:xfrm>
+        </p:spPr>
+        <p:txBody>
+          <a:bodyPr anchor="b">
+            <a:normAutofit/>
+          </a:bodyPr>
+          <a:lstStyle/>
+          <a:p>
+            <a:r>
+              <a:rPr lang="en-US" sz="4000" b="0" i="0">
+                <a:effectLst/>
+                <a:latin typeface="Söhne"/>
+              </a:rPr>
+              <a:t>Flexbox</a:t>
+            </a:r>
+            <a:endParaRPr lang="en-IL" sz="4000"/>
+          </a:p>
+        </p:txBody>
+      </p:sp>
+      <p:pic>
+        <p:nvPicPr>
+          <p:cNvPr id="5" name="Picture 4" descr="Cubes connected with a red line">
+            <a:extLst>
+              <a:ext uri="{FF2B5EF4-FFF2-40B4-BE49-F238E27FC236}">
+                <a16:creationId xmlns:a16="http://schemas.microsoft.com/office/drawing/2014/main" id="{06F50988-E31E-50A7-6599-745431F871C0}"/>
+              </a:ext>
+            </a:extLst>
+          </p:cNvPr>
+          <p:cNvPicPr>
+            <a:picLocks noChangeAspect="1"/>
+          </p:cNvPicPr>
+          <p:nvPr/>
+        </p:nvPicPr>
+        <p:blipFill rotWithShape="1">
+          <a:blip r:embed="rId2"/>
+          <a:srcRect l="32156" r="20726" b="-1"/>
+          <a:stretch/>
+        </p:blipFill>
+        <p:spPr>
+          <a:xfrm>
+            <a:off x="1" y="10"/>
+            <a:ext cx="4196496" cy="6857990"/>
+          </a:xfrm>
+          <a:prstGeom prst="rect">
+            <a:avLst/>
+          </a:prstGeom>
+          <a:effectLst/>
+        </p:spPr>
+      </p:pic>
+      <p:sp>
+        <p:nvSpPr>
+          <p:cNvPr id="3" name="Content Placeholder 2">
+            <a:extLst>
+              <a:ext uri="{FF2B5EF4-FFF2-40B4-BE49-F238E27FC236}">
+                <a16:creationId xmlns:a16="http://schemas.microsoft.com/office/drawing/2014/main" id="{63972B90-EB4C-7ABE-8441-F76AABAE5336}"/>
+              </a:ext>
+            </a:extLst>
+          </p:cNvPr>
+          <p:cNvSpPr>
+            <a:spLocks noGrp="1"/>
+          </p:cNvSpPr>
+          <p:nvPr>
+            <p:ph idx="1"/>
+          </p:nvPr>
+        </p:nvSpPr>
+        <p:spPr>
+          <a:xfrm>
+            <a:off x="4553734" y="2409830"/>
+            <a:ext cx="6798539" cy="3705217"/>
+          </a:xfrm>
+        </p:spPr>
+        <p:txBody>
+          <a:bodyPr>
+            <a:normAutofit/>
+          </a:bodyPr>
+          <a:lstStyle/>
+          <a:p>
+            <a:r>
+              <a:rPr lang="en-US" sz="2000"/>
+              <a:t>Flexbox is a layout module in CSS that makes it easier to create flexible, responsive designs. It allows elements within a container to be aligned and distributed in various ways, such as horizontally or vertically. Flexbox is particularly useful for creating flexible grid layouts, and it can also be used to create responsive navigation bars and other UI elements. It has a set of CSS properties that can be used to control the layout of elements within a flex container, such as flex-direction, justify-content, and align-items. Flexbox is supported in most modern web browsers.</a:t>
+            </a:r>
+            <a:endParaRPr lang="en-IL" sz="2000"/>
+          </a:p>
+        </p:txBody>
+      </p:sp>
+    </p:spTree>
+    <p:extLst>
+      <p:ext uri="{BB962C8B-B14F-4D97-AF65-F5344CB8AC3E}">
+        <p14:creationId xmlns:p14="http://schemas.microsoft.com/office/powerpoint/2010/main" val="29475911"/>
+      </p:ext>
+    </p:extLst>
+  </p:cSld>
+  <p:clrMapOvr>
+    <a:masterClrMapping/>
+  </p:clrMapOvr>
+</p:sld>
+</file>
+
+<file path=ppt/slides/slide41.xml><?xml version="1.0" encoding="utf-8"?>
+<p:sld xmlns:a="http://schemas.openxmlformats.org/drawingml/2006/main" xmlns:r="http://schemas.openxmlformats.org/officeDocument/2006/relationships" xmlns:p="http://schemas.openxmlformats.org/presentationml/2006/main">
+  <p:cSld>
+    <p:bg>
+      <p:bgPr>
+        <a:solidFill>
+          <a:schemeClr val="bg1">
+            <a:tint val="95000"/>
+            <a:satMod val="170000"/>
+          </a:schemeClr>
+        </a:solidFill>
+        <a:effectLst/>
+      </p:bgPr>
+    </p:bg>
+    <p:spTree>
+      <p:nvGrpSpPr>
+        <p:cNvPr id="1" name=""/>
+        <p:cNvGrpSpPr/>
+        <p:nvPr/>
+      </p:nvGrpSpPr>
+      <p:grpSpPr>
+        <a:xfrm>
+          <a:off x="0" y="0"/>
+          <a:ext cx="0" cy="0"/>
+          <a:chOff x="0" y="0"/>
+          <a:chExt cx="0" cy="0"/>
+        </a:xfrm>
+      </p:grpSpPr>
+      <p:sp useBgFill="1">
+        <p:nvSpPr>
+          <p:cNvPr id="9" name="!!BGRectangle">
+            <a:extLst>
+              <a:ext uri="{FF2B5EF4-FFF2-40B4-BE49-F238E27FC236}">
+                <a16:creationId xmlns:a16="http://schemas.microsoft.com/office/drawing/2014/main" id="{9B76D444-2756-434F-AE61-96D69830C13E}"/>
+              </a:ext>
+              <a:ext uri="{C183D7F6-B498-43B3-948B-1728B52AA6E4}">
+                <adec:decorative xmlns:adec="http://schemas.microsoft.com/office/drawing/2017/decorative" val="1"/>
+              </a:ext>
+            </a:extLst>
+          </p:cNvPr>
+          <p:cNvSpPr>
+            <a:spLocks noGrp="1" noRot="1" noChangeAspect="1" noMove="1" noResize="1" noEditPoints="1" noAdjustHandles="1" noChangeArrowheads="1" noChangeShapeType="1" noTextEdit="1"/>
+          </p:cNvSpPr>
+          <p:nvPr>
+            <p:extLst>
+              <p:ext uri="{386F3935-93C4-4BCD-93E2-E3B085C9AB24}">
+                <p16:designElem xmlns:p16="http://schemas.microsoft.com/office/powerpoint/2015/main" val="1"/>
+              </p:ext>
+            </p:extLst>
+          </p:nvPr>
+        </p:nvSpPr>
+        <p:spPr>
+          <a:xfrm>
+            <a:off x="0" y="0"/>
+            <a:ext cx="12188952" cy="6858000"/>
+          </a:xfrm>
+          <a:prstGeom prst="rect">
+            <a:avLst/>
+          </a:prstGeom>
+          <a:ln>
+            <a:noFill/>
+          </a:ln>
+        </p:spPr>
+        <p:style>
+          <a:lnRef idx="2">
+            <a:schemeClr val="accent1">
+              <a:shade val="50000"/>
+            </a:schemeClr>
+          </a:lnRef>
+          <a:fillRef idx="1">
+            <a:schemeClr val="accent1"/>
+          </a:fillRef>
+          <a:effectRef idx="0">
+            <a:schemeClr val="accent1"/>
+          </a:effectRef>
+          <a:fontRef idx="minor">
+            <a:schemeClr val="lt1"/>
+          </a:fontRef>
+        </p:style>
+        <p:txBody>
+          <a:bodyPr rtlCol="0" anchor="ctr"/>
+          <a:lstStyle/>
+          <a:p>
+            <a:pPr algn="ctr"/>
+            <a:endParaRPr lang="en-US"/>
+          </a:p>
+        </p:txBody>
+      </p:sp>
+      <p:sp>
+        <p:nvSpPr>
+          <p:cNvPr id="2" name="Title 1">
+            <a:extLst>
+              <a:ext uri="{FF2B5EF4-FFF2-40B4-BE49-F238E27FC236}">
+                <a16:creationId xmlns:a16="http://schemas.microsoft.com/office/drawing/2014/main" id="{0B35CAB9-EBB2-8E06-A8F2-01A2FAAC21E1}"/>
+              </a:ext>
+            </a:extLst>
+          </p:cNvPr>
+          <p:cNvSpPr>
+            <a:spLocks noGrp="1"/>
+          </p:cNvSpPr>
+          <p:nvPr>
+            <p:ph type="title"/>
+          </p:nvPr>
+        </p:nvSpPr>
+        <p:spPr>
+          <a:xfrm>
+            <a:off x="6421700" y="713232"/>
+            <a:ext cx="5154168" cy="1197864"/>
+          </a:xfrm>
+        </p:spPr>
+        <p:txBody>
+          <a:bodyPr>
+            <a:normAutofit/>
+          </a:bodyPr>
+          <a:lstStyle/>
+          <a:p>
+            <a:r>
+              <a:rPr lang="en-US" dirty="0"/>
+              <a:t>outlines</a:t>
+            </a:r>
+            <a:endParaRPr lang="en-IL" dirty="0"/>
+          </a:p>
+        </p:txBody>
+      </p:sp>
+      <p:pic>
+        <p:nvPicPr>
+          <p:cNvPr id="5" name="Picture 4" descr="House line vector icons">
+            <a:extLst>
+              <a:ext uri="{FF2B5EF4-FFF2-40B4-BE49-F238E27FC236}">
+                <a16:creationId xmlns:a16="http://schemas.microsoft.com/office/drawing/2014/main" id="{D3B6B2D5-1D68-D376-7B3F-5146A76BEBF7}"/>
+              </a:ext>
+            </a:extLst>
+          </p:cNvPr>
+          <p:cNvPicPr>
+            <a:picLocks noChangeAspect="1"/>
+          </p:cNvPicPr>
+          <p:nvPr/>
+        </p:nvPicPr>
+        <p:blipFill rotWithShape="1">
+          <a:blip r:embed="rId2"/>
+          <a:srcRect l="20068" r="17632" b="-2"/>
+          <a:stretch/>
+        </p:blipFill>
+        <p:spPr>
+          <a:xfrm>
+            <a:off x="20" y="10"/>
+            <a:ext cx="5495089" cy="6857990"/>
+          </a:xfrm>
+          <a:prstGeom prst="rect">
+            <a:avLst/>
+          </a:prstGeom>
+        </p:spPr>
+      </p:pic>
+      <p:sp>
+        <p:nvSpPr>
+          <p:cNvPr id="11" name="!!Line">
+            <a:extLst>
+              <a:ext uri="{FF2B5EF4-FFF2-40B4-BE49-F238E27FC236}">
+                <a16:creationId xmlns:a16="http://schemas.microsoft.com/office/drawing/2014/main" id="{29A9EE12-EF77-4DB4-84E4-043DE7235244}"/>
+              </a:ext>
+              <a:ext uri="{C183D7F6-B498-43B3-948B-1728B52AA6E4}">
+                <adec:decorative xmlns:adec="http://schemas.microsoft.com/office/drawing/2017/decorative" val="1"/>
+              </a:ext>
+            </a:extLst>
+          </p:cNvPr>
+          <p:cNvSpPr>
+            <a:spLocks noGrp="1" noRot="1" noChangeAspect="1" noMove="1" noResize="1" noEditPoints="1" noAdjustHandles="1" noChangeArrowheads="1" noChangeShapeType="1" noTextEdit="1"/>
+          </p:cNvSpPr>
+          <p:nvPr>
+            <p:extLst>
+              <p:ext uri="{386F3935-93C4-4BCD-93E2-E3B085C9AB24}">
+                <p16:designElem xmlns:p16="http://schemas.microsoft.com/office/powerpoint/2015/main" val="1"/>
+              </p:ext>
+            </p:extLst>
+          </p:nvPr>
+        </p:nvSpPr>
+        <p:spPr>
+          <a:xfrm>
+            <a:off x="6053328" y="822960"/>
+            <a:ext cx="9144" cy="914400"/>
+          </a:xfrm>
+          <a:prstGeom prst="rect">
+            <a:avLst/>
+          </a:prstGeom>
+          <a:solidFill>
+            <a:schemeClr val="tx1"/>
+          </a:solidFill>
+          <a:ln>
+            <a:noFill/>
+          </a:ln>
+        </p:spPr>
+        <p:style>
+          <a:lnRef idx="2">
+            <a:schemeClr val="accent1">
+              <a:shade val="50000"/>
+            </a:schemeClr>
+          </a:lnRef>
+          <a:fillRef idx="1">
+            <a:schemeClr val="accent1"/>
+          </a:fillRef>
+          <a:effectRef idx="0">
+            <a:schemeClr val="accent1"/>
+          </a:effectRef>
+          <a:fontRef idx="minor">
+            <a:schemeClr val="lt1"/>
+          </a:fontRef>
+        </p:style>
+        <p:txBody>
+          <a:bodyPr rtlCol="0" anchor="ctr"/>
+          <a:lstStyle/>
+          <a:p>
+            <a:pPr algn="ctr"/>
+            <a:endParaRPr lang="en-US"/>
+          </a:p>
+        </p:txBody>
+      </p:sp>
+      <p:sp>
+        <p:nvSpPr>
+          <p:cNvPr id="3" name="Content Placeholder 2">
+            <a:extLst>
+              <a:ext uri="{FF2B5EF4-FFF2-40B4-BE49-F238E27FC236}">
+                <a16:creationId xmlns:a16="http://schemas.microsoft.com/office/drawing/2014/main" id="{45979241-6432-66A9-52CC-FAB3C37D50B2}"/>
+              </a:ext>
+            </a:extLst>
+          </p:cNvPr>
+          <p:cNvSpPr>
+            <a:spLocks noGrp="1"/>
+          </p:cNvSpPr>
+          <p:nvPr>
+            <p:ph idx="1"/>
+          </p:nvPr>
+        </p:nvSpPr>
+        <p:spPr>
+          <a:xfrm>
+            <a:off x="6421700" y="2048256"/>
+            <a:ext cx="5154168" cy="4123944"/>
+          </a:xfrm>
+        </p:spPr>
+        <p:txBody>
+          <a:bodyPr anchor="t">
+            <a:normAutofit/>
+          </a:bodyPr>
+          <a:lstStyle/>
+          <a:p>
+            <a:r>
+              <a:rPr lang="en-US" sz="1700"/>
+              <a:t>CSS outlines are a way to draw a line around an element, outside of the element's border. They can be used to highlight or emphasize an element, or to make it stand out from the background.</a:t>
+            </a:r>
+          </a:p>
+          <a:p>
+            <a:r>
+              <a:rPr lang="en-US" sz="1700"/>
+              <a:t>The outline property is a shorthand property that is used to set the outline width, style, and color all at once. It has the following syntax:</a:t>
+            </a:r>
+          </a:p>
+          <a:p>
+            <a:r>
+              <a:rPr lang="en-US" sz="1700">
+                <a:effectLst/>
+              </a:rPr>
+              <a:t>outline: &lt;outline-width&gt; &lt;outline-style&gt; &lt;outline-color&gt;; </a:t>
+            </a:r>
+          </a:p>
+          <a:p>
+            <a:br>
+              <a:rPr lang="en-US" sz="1700" b="0" i="0">
+                <a:effectLst/>
+                <a:latin typeface="Söhne"/>
+              </a:rPr>
+            </a:br>
+            <a:endParaRPr lang="en-US" sz="1700" b="0" i="0">
+              <a:effectLst/>
+              <a:latin typeface="Söhne"/>
+            </a:endParaRPr>
+          </a:p>
+          <a:p>
+            <a:br>
+              <a:rPr lang="en-US" sz="1700"/>
+            </a:br>
+            <a:endParaRPr lang="en-US" sz="1700"/>
+          </a:p>
+          <a:p>
+            <a:endParaRPr lang="en-IL" sz="1700"/>
+          </a:p>
+        </p:txBody>
+      </p:sp>
+    </p:spTree>
+    <p:extLst>
+      <p:ext uri="{BB962C8B-B14F-4D97-AF65-F5344CB8AC3E}">
+        <p14:creationId xmlns:p14="http://schemas.microsoft.com/office/powerpoint/2010/main" val="3629534038"/>
+      </p:ext>
+    </p:extLst>
+  </p:cSld>
+  <p:clrMapOvr>
+    <a:overrideClrMapping bg1="dk1" tx1="lt1" bg2="dk2" tx2="lt2" accent1="accent1" accent2="accent2" accent3="accent3" accent4="accent4" accent5="accent5" accent6="accent6" hlink="hlink" folHlink="folHlink"/>
+  </p:clrMapOvr>
+</p:sld>
+</file>
+
+<file path=ppt/slides/slide42.xml><?xml version="1.0" encoding="utf-8"?>
+<p:sld xmlns:a="http://schemas.openxmlformats.org/drawingml/2006/main" xmlns:r="http://schemas.openxmlformats.org/officeDocument/2006/relationships" xmlns:p="http://schemas.openxmlformats.org/presentationml/2006/main">
+  <p:cSld>
+    <p:bg>
+      <p:bgPr>
+        <a:solidFill>
+          <a:schemeClr val="bg1"/>
+        </a:solidFill>
+        <a:effectLst/>
+      </p:bgPr>
+    </p:bg>
+    <p:spTree>
+      <p:nvGrpSpPr>
+        <p:cNvPr id="1" name=""/>
+        <p:cNvGrpSpPr/>
+        <p:nvPr/>
+      </p:nvGrpSpPr>
+      <p:grpSpPr>
+        <a:xfrm>
+          <a:off x="0" y="0"/>
+          <a:ext cx="0" cy="0"/>
+          <a:chOff x="0" y="0"/>
+          <a:chExt cx="0" cy="0"/>
+        </a:xfrm>
+      </p:grpSpPr>
+      <p:sp>
+        <p:nvSpPr>
+          <p:cNvPr id="2" name="Title 1">
+            <a:extLst>
+              <a:ext uri="{FF2B5EF4-FFF2-40B4-BE49-F238E27FC236}">
+                <a16:creationId xmlns:a16="http://schemas.microsoft.com/office/drawing/2014/main" id="{580AE03B-CD85-92C0-8085-F580E930EC7C}"/>
+              </a:ext>
+            </a:extLst>
+          </p:cNvPr>
+          <p:cNvSpPr>
+            <a:spLocks noGrp="1"/>
+          </p:cNvSpPr>
+          <p:nvPr>
+            <p:ph type="title"/>
+          </p:nvPr>
+        </p:nvSpPr>
+        <p:spPr>
+          <a:xfrm>
+            <a:off x="838200" y="365125"/>
+            <a:ext cx="6254496" cy="1828800"/>
+          </a:xfrm>
+        </p:spPr>
+        <p:txBody>
+          <a:bodyPr>
+            <a:normAutofit/>
+          </a:bodyPr>
+          <a:lstStyle/>
+          <a:p>
+            <a:r>
+              <a:rPr lang="en-US" dirty="0"/>
+              <a:t>float</a:t>
+            </a:r>
+            <a:endParaRPr lang="en-IL" dirty="0"/>
+          </a:p>
+        </p:txBody>
+      </p:sp>
+      <p:pic>
+        <p:nvPicPr>
+          <p:cNvPr id="6" name="Picture 5">
+            <a:extLst>
+              <a:ext uri="{FF2B5EF4-FFF2-40B4-BE49-F238E27FC236}">
+                <a16:creationId xmlns:a16="http://schemas.microsoft.com/office/drawing/2014/main" id="{56DAA052-706C-01FF-6C58-8C580C685A08}"/>
+              </a:ext>
+            </a:extLst>
+          </p:cNvPr>
+          <p:cNvPicPr>
+            <a:picLocks noChangeAspect="1"/>
+          </p:cNvPicPr>
+          <p:nvPr/>
+        </p:nvPicPr>
+        <p:blipFill rotWithShape="1">
+          <a:blip r:embed="rId2"/>
+          <a:srcRect l="28356" r="26484" b="-1"/>
+          <a:stretch/>
+        </p:blipFill>
+        <p:spPr>
+          <a:xfrm>
+            <a:off x="7552266" y="10"/>
+            <a:ext cx="4639733" cy="6857990"/>
+          </a:xfrm>
+          <a:prstGeom prst="rect">
+            <a:avLst/>
+          </a:prstGeom>
+        </p:spPr>
+      </p:pic>
+      <p:graphicFrame>
+        <p:nvGraphicFramePr>
+          <p:cNvPr id="5" name="Content Placeholder 2">
+            <a:extLst>
+              <a:ext uri="{FF2B5EF4-FFF2-40B4-BE49-F238E27FC236}">
+                <a16:creationId xmlns:a16="http://schemas.microsoft.com/office/drawing/2014/main" id="{B0CF906F-C5D9-7F27-5667-0C6A4167ACDC}"/>
+              </a:ext>
+            </a:extLst>
+          </p:cNvPr>
+          <p:cNvGraphicFramePr>
+            <a:graphicFrameLocks noGrp="1"/>
+          </p:cNvGraphicFramePr>
+          <p:nvPr>
+            <p:ph idx="1"/>
+            <p:extLst>
+              <p:ext uri="{D42A27DB-BD31-4B8C-83A1-F6EECF244321}">
+                <p14:modId xmlns:p14="http://schemas.microsoft.com/office/powerpoint/2010/main" val="1485935178"/>
+              </p:ext>
+            </p:extLst>
+          </p:nvPr>
+        </p:nvGraphicFramePr>
+        <p:xfrm>
+          <a:off x="838200" y="2322576"/>
+          <a:ext cx="6254496" cy="3858768"/>
+        </p:xfrm>
+        <a:graphic>
+          <a:graphicData uri="http://schemas.openxmlformats.org/drawingml/2006/diagram">
+            <dgm:relIds xmlns:dgm="http://schemas.openxmlformats.org/drawingml/2006/diagram" xmlns:r="http://schemas.openxmlformats.org/officeDocument/2006/relationships" r:dm="rId3" r:lo="rId4" r:qs="rId5" r:cs="rId6"/>
+          </a:graphicData>
+        </a:graphic>
+      </p:graphicFrame>
+    </p:spTree>
+    <p:extLst>
+      <p:ext uri="{BB962C8B-B14F-4D97-AF65-F5344CB8AC3E}">
+        <p14:creationId xmlns:p14="http://schemas.microsoft.com/office/powerpoint/2010/main" val="3065415360"/>
+      </p:ext>
+    </p:extLst>
+  </p:cSld>
+  <p:clrMapOvr>
+    <a:overrideClrMapping bg1="dk1" tx1="lt1" bg2="dk2" tx2="lt2" accent1="accent1" accent2="accent2" accent3="accent3" accent4="accent4" accent5="accent5" accent6="accent6" hlink="hlink" folHlink="folHlink"/>
+  </p:clrMapOvr>
+</p:sld>
+</file>
+
+<file path=ppt/slides/slide43.xml><?xml version="1.0" encoding="utf-8"?>
+<p:sld xmlns:a="http://schemas.openxmlformats.org/drawingml/2006/main" xmlns:r="http://schemas.openxmlformats.org/officeDocument/2006/relationships" xmlns:p="http://schemas.openxmlformats.org/presentationml/2006/main">
+  <p:cSld>
+    <p:bg>
+      <p:bgPr>
+        <a:solidFill>
+          <a:schemeClr val="bg1">
+            <a:tint val="95000"/>
+            <a:satMod val="170000"/>
+          </a:schemeClr>
+        </a:solidFill>
+        <a:effectLst/>
+      </p:bgPr>
+    </p:bg>
+    <p:spTree>
+      <p:nvGrpSpPr>
+        <p:cNvPr id="1" name=""/>
+        <p:cNvGrpSpPr/>
+        <p:nvPr/>
+      </p:nvGrpSpPr>
+      <p:grpSpPr>
+        <a:xfrm>
+          <a:off x="0" y="0"/>
+          <a:ext cx="0" cy="0"/>
+          <a:chOff x="0" y="0"/>
+          <a:chExt cx="0" cy="0"/>
+        </a:xfrm>
+      </p:grpSpPr>
+      <p:sp useBgFill="1">
+        <p:nvSpPr>
+          <p:cNvPr id="8" name="Rectangle 7">
+            <a:extLst>
+              <a:ext uri="{FF2B5EF4-FFF2-40B4-BE49-F238E27FC236}">
+                <a16:creationId xmlns:a16="http://schemas.microsoft.com/office/drawing/2014/main" id="{AD72D4D1-076F-49D3-9889-EFC4F6D7CA66}"/>
+              </a:ext>
+              <a:ext uri="{C183D7F6-B498-43B3-948B-1728B52AA6E4}">
+                <adec:decorative xmlns:adec="http://schemas.microsoft.com/office/drawing/2017/decorative" val="1"/>
+              </a:ext>
+            </a:extLst>
+          </p:cNvPr>
+          <p:cNvSpPr>
+            <a:spLocks noGrp="1" noRot="1" noChangeAspect="1" noMove="1" noResize="1" noEditPoints="1" noAdjustHandles="1" noChangeArrowheads="1" noChangeShapeType="1" noTextEdit="1"/>
+          </p:cNvSpPr>
+          <p:nvPr>
+            <p:extLst>
+              <p:ext uri="{386F3935-93C4-4BCD-93E2-E3B085C9AB24}">
+                <p16:designElem xmlns:p16="http://schemas.microsoft.com/office/powerpoint/2015/main" val="1"/>
+              </p:ext>
+            </p:extLst>
+          </p:nvPr>
+        </p:nvSpPr>
+        <p:spPr>
+          <a:xfrm>
+            <a:off x="0" y="0"/>
+            <a:ext cx="12188952" cy="6858000"/>
+          </a:xfrm>
+          <a:prstGeom prst="rect">
+            <a:avLst/>
+          </a:prstGeom>
+          <a:ln>
+            <a:noFill/>
+          </a:ln>
+        </p:spPr>
+        <p:style>
+          <a:lnRef idx="2">
+            <a:schemeClr val="accent1">
+              <a:shade val="50000"/>
+            </a:schemeClr>
+          </a:lnRef>
+          <a:fillRef idx="1">
+            <a:schemeClr val="accent1"/>
+          </a:fillRef>
+          <a:effectRef idx="0">
+            <a:schemeClr val="accent1"/>
+          </a:effectRef>
+          <a:fontRef idx="minor">
+            <a:schemeClr val="lt1"/>
+          </a:fontRef>
+        </p:style>
+        <p:txBody>
+          <a:bodyPr rtlCol="0" anchor="ctr"/>
+          <a:lstStyle/>
+          <a:p>
+            <a:pPr algn="ctr"/>
+            <a:endParaRPr lang="en-US"/>
+          </a:p>
+        </p:txBody>
+      </p:sp>
+      <p:sp>
+        <p:nvSpPr>
+          <p:cNvPr id="2" name="Title 1">
+            <a:extLst>
+              <a:ext uri="{FF2B5EF4-FFF2-40B4-BE49-F238E27FC236}">
+                <a16:creationId xmlns:a16="http://schemas.microsoft.com/office/drawing/2014/main" id="{8F4DE981-64F4-88E9-AB54-CA9ED70CE50C}"/>
+              </a:ext>
+            </a:extLst>
+          </p:cNvPr>
+          <p:cNvSpPr>
+            <a:spLocks noGrp="1"/>
+          </p:cNvSpPr>
+          <p:nvPr>
+            <p:ph type="title"/>
+          </p:nvPr>
+        </p:nvSpPr>
+        <p:spPr>
+          <a:xfrm>
+            <a:off x="838200" y="963877"/>
+            <a:ext cx="3494362" cy="4930246"/>
+          </a:xfrm>
+        </p:spPr>
+        <p:txBody>
+          <a:bodyPr>
+            <a:normAutofit/>
+          </a:bodyPr>
+          <a:lstStyle/>
+          <a:p>
+            <a:pPr algn="r"/>
+            <a:r>
+              <a:rPr lang="en-US" dirty="0"/>
+              <a:t>F</a:t>
+            </a:r>
+            <a:r>
+              <a:rPr lang="en-IL" dirty="0"/>
+              <a:t>loat more</a:t>
+            </a:r>
+            <a:endParaRPr lang="en-IL"/>
+          </a:p>
+        </p:txBody>
+      </p:sp>
+      <p:cxnSp>
+        <p:nvCxnSpPr>
+          <p:cNvPr id="10" name="Straight Connector 9">
+            <a:extLst>
+              <a:ext uri="{FF2B5EF4-FFF2-40B4-BE49-F238E27FC236}">
+                <a16:creationId xmlns:a16="http://schemas.microsoft.com/office/drawing/2014/main" id="{2D72A2C9-F3CA-4216-8BAD-FA4C970C3C4E}"/>
+              </a:ext>
+              <a:ext uri="{C183D7F6-B498-43B3-948B-1728B52AA6E4}">
+                <adec:decorative xmlns:adec="http://schemas.microsoft.com/office/drawing/2017/decorative" val="1"/>
+              </a:ext>
+            </a:extLst>
+          </p:cNvPr>
+          <p:cNvCxnSpPr>
+            <a:cxnSpLocks noGrp="1" noRot="1" noChangeAspect="1" noMove="1" noResize="1" noEditPoints="1" noAdjustHandles="1" noChangeArrowheads="1" noChangeShapeType="1"/>
+          </p:cNvCxnSpPr>
+          <p:nvPr>
+            <p:extLst>
+              <p:ext uri="{386F3935-93C4-4BCD-93E2-E3B085C9AB24}">
+                <p16:designElem xmlns:p16="http://schemas.microsoft.com/office/powerpoint/2015/main" val="1"/>
+              </p:ext>
+            </p:extLst>
+          </p:nvPr>
+        </p:nvCxnSpPr>
+        <p:spPr>
+          <a:xfrm>
+            <a:off x="4654296" y="2057400"/>
+            <a:ext cx="0" cy="2743200"/>
+          </a:xfrm>
+          <a:prstGeom prst="line">
+            <a:avLst/>
+          </a:prstGeom>
+          <a:ln w="15875">
+            <a:solidFill>
+              <a:schemeClr val="tx1"/>
+            </a:solidFill>
+          </a:ln>
+        </p:spPr>
+        <p:style>
+          <a:lnRef idx="1">
+            <a:schemeClr val="accent1"/>
+          </a:lnRef>
+          <a:fillRef idx="0">
+            <a:schemeClr val="accent1"/>
+          </a:fillRef>
+          <a:effectRef idx="0">
+            <a:schemeClr val="accent1"/>
+          </a:effectRef>
+          <a:fontRef idx="minor">
+            <a:schemeClr val="tx1"/>
+          </a:fontRef>
+        </p:style>
+      </p:cxnSp>
+      <p:sp>
+        <p:nvSpPr>
+          <p:cNvPr id="3" name="Content Placeholder 2">
+            <a:extLst>
+              <a:ext uri="{FF2B5EF4-FFF2-40B4-BE49-F238E27FC236}">
+                <a16:creationId xmlns:a16="http://schemas.microsoft.com/office/drawing/2014/main" id="{4E0FAA4E-DDF3-EB9F-A5AC-B2720E445886}"/>
+              </a:ext>
+            </a:extLst>
+          </p:cNvPr>
+          <p:cNvSpPr>
+            <a:spLocks noGrp="1"/>
+          </p:cNvSpPr>
+          <p:nvPr>
+            <p:ph idx="1"/>
+          </p:nvPr>
+        </p:nvSpPr>
+        <p:spPr>
+          <a:xfrm>
+            <a:off x="4976031" y="963877"/>
+            <a:ext cx="6377769" cy="4930246"/>
+          </a:xfrm>
+        </p:spPr>
+        <p:txBody>
+          <a:bodyPr anchor="ctr">
+            <a:normAutofit/>
+          </a:bodyPr>
+          <a:lstStyle/>
+          <a:p>
+            <a:pPr marL="0" indent="0">
+              <a:buNone/>
+            </a:pPr>
+            <a:r>
+              <a:rPr lang="en-US" sz="2200"/>
+              <a:t>The text will flow around the image, which will be on the right side of the paragraph.</a:t>
+            </a:r>
+          </a:p>
+          <a:p>
+            <a:pPr marL="0" indent="0">
+              <a:buNone/>
+            </a:pPr>
+            <a:r>
+              <a:rPr lang="en-US" sz="2200"/>
+              <a:t>It's important to note that when an element is floated, the containing element will not automatically adjust its height to fit the floated element. This can lead to layout issues, so it's common to use the clear property in combination with float to fix it.</a:t>
+            </a:r>
+          </a:p>
+          <a:p>
+            <a:pPr marL="0" indent="0">
+              <a:buNone/>
+            </a:pPr>
+            <a:r>
+              <a:rPr lang="en-US" sz="2200"/>
+              <a:t>Additionally, it's a good practice to always set a width when using float, as it might cause unexpected behavior with the width of the element.</a:t>
+            </a:r>
+          </a:p>
+          <a:p>
+            <a:pPr marL="0" indent="0">
+              <a:buNone/>
+            </a:pPr>
+            <a:r>
+              <a:rPr lang="en-US" sz="2200"/>
+              <a:t>It's worth noting that flexbox and grid layout are now preferred over using float for layout and positioning as they are more powerful and flexible.</a:t>
+            </a:r>
+          </a:p>
+          <a:p>
+            <a:pPr marL="0" indent="0">
+              <a:buNone/>
+            </a:pPr>
+            <a:endParaRPr lang="en-IL" sz="2200"/>
+          </a:p>
+        </p:txBody>
+      </p:sp>
+    </p:spTree>
+    <p:extLst>
+      <p:ext uri="{BB962C8B-B14F-4D97-AF65-F5344CB8AC3E}">
+        <p14:creationId xmlns:p14="http://schemas.microsoft.com/office/powerpoint/2010/main" val="2428703882"/>
+      </p:ext>
+    </p:extLst>
+  </p:cSld>
+  <p:clrMapOvr>
+    <a:overrideClrMapping bg1="dk1" tx1="lt1" bg2="dk2" tx2="lt2" accent1="accent1" accent2="accent2" accent3="accent3" accent4="accent4" accent5="accent5" accent6="accent6" hlink="hlink" folHlink="folHlink"/>
+  </p:clrMapOvr>
+</p:sld>
+</file>
+
+<file path=ppt/slides/slide44.xml><?xml version="1.0" encoding="utf-8"?>
+<p:sld xmlns:a="http://schemas.openxmlformats.org/drawingml/2006/main" xmlns:r="http://schemas.openxmlformats.org/officeDocument/2006/relationships" xmlns:p="http://schemas.openxmlformats.org/presentationml/2006/main">
+  <p:cSld>
+    <p:spTree>
+      <p:nvGrpSpPr>
+        <p:cNvPr id="1" name=""/>
+        <p:cNvGrpSpPr/>
+        <p:nvPr/>
+      </p:nvGrpSpPr>
+      <p:grpSpPr>
+        <a:xfrm>
+          <a:off x="0" y="0"/>
+          <a:ext cx="0" cy="0"/>
+          <a:chOff x="0" y="0"/>
+          <a:chExt cx="0" cy="0"/>
+        </a:xfrm>
+      </p:grpSpPr>
+      <p:sp>
+        <p:nvSpPr>
+          <p:cNvPr id="2" name="Title 1">
+            <a:extLst>
+              <a:ext uri="{FF2B5EF4-FFF2-40B4-BE49-F238E27FC236}">
+                <a16:creationId xmlns:a16="http://schemas.microsoft.com/office/drawing/2014/main" id="{D7F534C0-FD84-E7E7-D39C-36509B45F487}"/>
+              </a:ext>
+            </a:extLst>
+          </p:cNvPr>
+          <p:cNvSpPr>
+            <a:spLocks noGrp="1"/>
+          </p:cNvSpPr>
+          <p:nvPr>
+            <p:ph type="title"/>
+          </p:nvPr>
+        </p:nvSpPr>
+        <p:spPr/>
+        <p:txBody>
+          <a:bodyPr/>
+          <a:lstStyle/>
+          <a:p>
+            <a:endParaRPr lang="en-IL"/>
+          </a:p>
+        </p:txBody>
+      </p:sp>
+      <p:sp>
+        <p:nvSpPr>
+          <p:cNvPr id="3" name="Content Placeholder 2">
+            <a:extLst>
+              <a:ext uri="{FF2B5EF4-FFF2-40B4-BE49-F238E27FC236}">
+                <a16:creationId xmlns:a16="http://schemas.microsoft.com/office/drawing/2014/main" id="{B6473F86-52C7-DC03-84B0-837257646147}"/>
+              </a:ext>
+            </a:extLst>
+          </p:cNvPr>
+          <p:cNvSpPr>
+            <a:spLocks noGrp="1"/>
+          </p:cNvSpPr>
+          <p:nvPr>
+            <p:ph idx="1"/>
+          </p:nvPr>
+        </p:nvSpPr>
+        <p:spPr/>
+        <p:txBody>
+          <a:bodyPr/>
+          <a:lstStyle/>
+          <a:p>
+            <a:endParaRPr lang="en-IL"/>
+          </a:p>
+        </p:txBody>
+      </p:sp>
+    </p:spTree>
+    <p:extLst>
+      <p:ext uri="{BB962C8B-B14F-4D97-AF65-F5344CB8AC3E}">
+        <p14:creationId xmlns:p14="http://schemas.microsoft.com/office/powerpoint/2010/main" val="2116466880"/>
+      </p:ext>
+    </p:extLst>
+  </p:cSld>
+  <p:clrMapOvr>
+    <a:masterClrMapping/>
+  </p:clrMapOvr>
 </p:sld>
 </file>
 
@@ -30719,12 +36099,12 @@
   </p:clrMapOvr>
   <mc:AlternateContent xmlns:mc="http://schemas.openxmlformats.org/markup-compatibility/2006" xmlns:p14="http://schemas.microsoft.com/office/powerpoint/2010/main">
     <mc:Choice Requires="p14">
-      <p:transition spd="slow" p14:dur="1600">
-        <p14:prism isContent="1" isInverted="1"/>
+      <p:transition spd="med" p14:dur="700">
+        <p:fade/>
       </p:transition>
     </mc:Choice>
     <mc:Fallback xmlns="">
-      <p:transition spd="slow">
+      <p:transition spd="med">
         <p:fade/>
       </p:transition>
     </mc:Fallback>
@@ -31540,12 +36920,12 @@
   </p:clrMapOvr>
   <mc:AlternateContent xmlns:mc="http://schemas.openxmlformats.org/markup-compatibility/2006" xmlns:p14="http://schemas.microsoft.com/office/powerpoint/2010/main">
     <mc:Choice Requires="p14">
-      <p:transition spd="slow" p14:dur="1250">
-        <p14:flip dir="r"/>
+      <p:transition spd="med" p14:dur="700">
+        <p:fade/>
       </p:transition>
     </mc:Choice>
     <mc:Fallback xmlns="">
-      <p:transition spd="slow">
+      <p:transition spd="med">
         <p:fade/>
       </p:transition>
     </mc:Fallback>
@@ -31776,13 +37156,13 @@
   </p:clrMapOvr>
   <mc:AlternateContent xmlns:mc="http://schemas.openxmlformats.org/markup-compatibility/2006" xmlns:p14="http://schemas.microsoft.com/office/powerpoint/2010/main">
     <mc:Choice Requires="p14">
-      <p:transition spd="slow" p14:dur="2500">
-        <p:checker/>
+      <p:transition spd="med" p14:dur="700">
+        <p:fade/>
       </p:transition>
     </mc:Choice>
     <mc:Fallback xmlns="">
-      <p:transition spd="slow">
-        <p:checker/>
+      <p:transition spd="med">
+        <p:fade/>
       </p:transition>
     </mc:Fallback>
   </mc:AlternateContent>
@@ -32485,9 +37865,18 @@
   <p:clrMapOvr>
     <a:masterClrMapping/>
   </p:clrMapOvr>
-  <p:transition spd="slow">
-    <p:randomBar dir="vert"/>
-  </p:transition>
+  <mc:AlternateContent xmlns:mc="http://schemas.openxmlformats.org/markup-compatibility/2006" xmlns:p14="http://schemas.microsoft.com/office/powerpoint/2010/main">
+    <mc:Choice Requires="p14">
+      <p:transition spd="med" p14:dur="700">
+        <p:fade/>
+      </p:transition>
+    </mc:Choice>
+    <mc:Fallback xmlns="">
+      <p:transition spd="med">
+        <p:fade/>
+      </p:transition>
+    </mc:Fallback>
+  </mc:AlternateContent>
 </p:sld>
 </file>
 
@@ -33651,14 +39040,14 @@
   <p:clrMapOvr>
     <a:masterClrMapping/>
   </p:clrMapOvr>
-  <mc:AlternateContent xmlns:mc="http://schemas.openxmlformats.org/markup-compatibility/2006" xmlns:p15="http://schemas.microsoft.com/office/powerpoint/2012/main">
-    <mc:Choice Requires="p15">
-      <p:transition xmlns:p14="http://schemas.microsoft.com/office/powerpoint/2010/main" spd="slow" p14:dur="2000">
-        <p15:prstTrans prst="fracture"/>
+  <mc:AlternateContent xmlns:mc="http://schemas.openxmlformats.org/markup-compatibility/2006" xmlns:p14="http://schemas.microsoft.com/office/powerpoint/2010/main">
+    <mc:Choice Requires="p14">
+      <p:transition spd="med" p14:dur="700">
+        <p:fade/>
       </p:transition>
     </mc:Choice>
     <mc:Fallback xmlns="">
-      <p:transition spd="slow">
+      <p:transition spd="med">
         <p:fade/>
       </p:transition>
     </mc:Fallback>
